--- a/Python/Lesson 05 - Error Handling/Lesson 05 - Error Handling.pptx
+++ b/Python/Lesson 05 - Error Handling/Lesson 05 - Error Handling.pptx
@@ -5,36 +5,43 @@
     <p:sldMasterId id="2147483684" r:id="rId1"/>
   </p:sldMasterIdLst>
   <p:notesMasterIdLst>
-    <p:notesMasterId r:id="rId12"/>
+    <p:notesMasterId r:id="rId19"/>
   </p:notesMasterIdLst>
   <p:sldIdLst>
     <p:sldId id="256" r:id="rId2"/>
-    <p:sldId id="272" r:id="rId3"/>
-    <p:sldId id="273" r:id="rId4"/>
-    <p:sldId id="274" r:id="rId5"/>
-    <p:sldId id="275" r:id="rId6"/>
-    <p:sldId id="276" r:id="rId7"/>
-    <p:sldId id="277" r:id="rId8"/>
-    <p:sldId id="278" r:id="rId9"/>
-    <p:sldId id="279" r:id="rId10"/>
-    <p:sldId id="280" r:id="rId11"/>
+    <p:sldId id="486" r:id="rId3"/>
+    <p:sldId id="496" r:id="rId4"/>
+    <p:sldId id="497" r:id="rId5"/>
+    <p:sldId id="498" r:id="rId6"/>
+    <p:sldId id="499" r:id="rId7"/>
+    <p:sldId id="272" r:id="rId8"/>
+    <p:sldId id="273" r:id="rId9"/>
+    <p:sldId id="274" r:id="rId10"/>
+    <p:sldId id="275" r:id="rId11"/>
+    <p:sldId id="276" r:id="rId12"/>
+    <p:sldId id="277" r:id="rId13"/>
+    <p:sldId id="494" r:id="rId14"/>
+    <p:sldId id="278" r:id="rId15"/>
+    <p:sldId id="495" r:id="rId16"/>
+    <p:sldId id="279" r:id="rId17"/>
+    <p:sldId id="280" r:id="rId18"/>
   </p:sldIdLst>
   <p:sldSz cx="9144000" cy="5143500" type="screen16x9"/>
   <p:notesSz cx="6858000" cy="9144000"/>
   <p:embeddedFontLst>
     <p:embeddedFont>
       <p:font typeface="Consolas" panose="020B0609020204030204" pitchFamily="49" charset="0"/>
-      <p:regular r:id="rId13"/>
-      <p:bold r:id="rId14"/>
-      <p:italic r:id="rId15"/>
-      <p:boldItalic r:id="rId16"/>
+      <p:regular r:id="rId20"/>
+      <p:bold r:id="rId21"/>
+      <p:italic r:id="rId22"/>
+      <p:boldItalic r:id="rId23"/>
     </p:embeddedFont>
     <p:embeddedFont>
       <p:font typeface="Roboto" panose="02000000000000000000" pitchFamily="2" charset="0"/>
-      <p:regular r:id="rId17"/>
-      <p:bold r:id="rId18"/>
-      <p:italic r:id="rId19"/>
-      <p:boldItalic r:id="rId20"/>
+      <p:regular r:id="rId24"/>
+      <p:bold r:id="rId25"/>
+      <p:italic r:id="rId26"/>
+      <p:boldItalic r:id="rId27"/>
     </p:embeddedFont>
   </p:embeddedFontLst>
   <p:defaultTextStyle>
@@ -991,6 +998,906 @@
   <p:cSld>
     <p:spTree>
       <p:nvGrpSpPr>
+        <p:cNvPr id="1" name="Shape 484"/>
+        <p:cNvGrpSpPr/>
+        <p:nvPr/>
+      </p:nvGrpSpPr>
+      <p:grpSpPr>
+        <a:xfrm>
+          <a:off x="0" y="0"/>
+          <a:ext cx="0" cy="0"/>
+          <a:chOff x="0" y="0"/>
+          <a:chExt cx="0" cy="0"/>
+        </a:xfrm>
+      </p:grpSpPr>
+      <p:sp>
+        <p:nvSpPr>
+          <p:cNvPr id="485" name="Google Shape;485;p20:notes"/>
+          <p:cNvSpPr>
+            <a:spLocks noGrp="1" noRot="1" noChangeAspect="1"/>
+          </p:cNvSpPr>
+          <p:nvPr>
+            <p:ph type="sldImg" idx="2"/>
+          </p:nvPr>
+        </p:nvSpPr>
+        <p:spPr>
+          <a:xfrm>
+            <a:off x="381000" y="685800"/>
+            <a:ext cx="6096000" cy="3429000"/>
+          </a:xfrm>
+          <a:custGeom>
+            <a:avLst/>
+            <a:gdLst/>
+            <a:ahLst/>
+            <a:cxnLst/>
+            <a:rect l="l" t="t" r="r" b="b"/>
+            <a:pathLst>
+              <a:path w="120000" h="120000" extrusionOk="0">
+                <a:moveTo>
+                  <a:pt x="0" y="0"/>
+                </a:moveTo>
+                <a:lnTo>
+                  <a:pt x="120000" y="0"/>
+                </a:lnTo>
+                <a:lnTo>
+                  <a:pt x="120000" y="120000"/>
+                </a:lnTo>
+                <a:lnTo>
+                  <a:pt x="0" y="120000"/>
+                </a:lnTo>
+                <a:close/>
+              </a:path>
+            </a:pathLst>
+          </a:custGeom>
+          <a:noFill/>
+          <a:ln w="9525" cap="flat" cmpd="sng">
+            <a:solidFill>
+              <a:srgbClr val="000000"/>
+            </a:solidFill>
+            <a:prstDash val="solid"/>
+            <a:round/>
+            <a:headEnd type="none" w="sm" len="sm"/>
+            <a:tailEnd type="none" w="sm" len="sm"/>
+          </a:ln>
+        </p:spPr>
+      </p:sp>
+      <p:sp>
+        <p:nvSpPr>
+          <p:cNvPr id="486" name="Google Shape;486;p20:notes"/>
+          <p:cNvSpPr txBox="1">
+            <a:spLocks noGrp="1"/>
+          </p:cNvSpPr>
+          <p:nvPr>
+            <p:ph type="body" idx="1"/>
+          </p:nvPr>
+        </p:nvSpPr>
+        <p:spPr>
+          <a:xfrm>
+            <a:off x="685800" y="4343400"/>
+            <a:ext cx="5486400" cy="4114800"/>
+          </a:xfrm>
+          <a:prstGeom prst="rect">
+            <a:avLst/>
+          </a:prstGeom>
+          <a:noFill/>
+          <a:ln>
+            <a:noFill/>
+          </a:ln>
+        </p:spPr>
+        <p:txBody>
+          <a:bodyPr spcFirstLastPara="1" wrap="square" lIns="91425" tIns="91425" rIns="91425" bIns="91425" anchor="t" anchorCtr="0">
+            <a:noAutofit/>
+          </a:bodyPr>
+          <a:lstStyle/>
+          <a:p>
+            <a:pPr marL="0" lvl="0" indent="0" algn="l" rtl="0">
+              <a:lnSpc>
+                <a:spcPct val="100000"/>
+              </a:lnSpc>
+              <a:spcBef>
+                <a:spcPts val="0"/>
+              </a:spcBef>
+              <a:spcAft>
+                <a:spcPts val="0"/>
+              </a:spcAft>
+              <a:buSzPts val="1100"/>
+              <a:buNone/>
+            </a:pPr>
+            <a:endParaRPr/>
+          </a:p>
+        </p:txBody>
+      </p:sp>
+    </p:spTree>
+  </p:cSld>
+  <p:clrMapOvr>
+    <a:masterClrMapping/>
+  </p:clrMapOvr>
+</p:notes>
+</file>
+
+<file path=ppt/notesSlides/notesSlide11.xml><?xml version="1.0" encoding="utf-8"?>
+<p:notes xmlns:a="http://schemas.openxmlformats.org/drawingml/2006/main" xmlns:r="http://schemas.openxmlformats.org/officeDocument/2006/relationships" xmlns:p="http://schemas.openxmlformats.org/presentationml/2006/main" showMasterSp="0" showMasterPhAnim="0">
+  <p:cSld>
+    <p:spTree>
+      <p:nvGrpSpPr>
+        <p:cNvPr id="1" name="Shape 490"/>
+        <p:cNvGrpSpPr/>
+        <p:nvPr/>
+      </p:nvGrpSpPr>
+      <p:grpSpPr>
+        <a:xfrm>
+          <a:off x="0" y="0"/>
+          <a:ext cx="0" cy="0"/>
+          <a:chOff x="0" y="0"/>
+          <a:chExt cx="0" cy="0"/>
+        </a:xfrm>
+      </p:grpSpPr>
+      <p:sp>
+        <p:nvSpPr>
+          <p:cNvPr id="491" name="Google Shape;491;p21:notes"/>
+          <p:cNvSpPr>
+            <a:spLocks noGrp="1" noRot="1" noChangeAspect="1"/>
+          </p:cNvSpPr>
+          <p:nvPr>
+            <p:ph type="sldImg" idx="2"/>
+          </p:nvPr>
+        </p:nvSpPr>
+        <p:spPr>
+          <a:xfrm>
+            <a:off x="381000" y="685800"/>
+            <a:ext cx="6096000" cy="3429000"/>
+          </a:xfrm>
+          <a:custGeom>
+            <a:avLst/>
+            <a:gdLst/>
+            <a:ahLst/>
+            <a:cxnLst/>
+            <a:rect l="l" t="t" r="r" b="b"/>
+            <a:pathLst>
+              <a:path w="120000" h="120000" extrusionOk="0">
+                <a:moveTo>
+                  <a:pt x="0" y="0"/>
+                </a:moveTo>
+                <a:lnTo>
+                  <a:pt x="120000" y="0"/>
+                </a:lnTo>
+                <a:lnTo>
+                  <a:pt x="120000" y="120000"/>
+                </a:lnTo>
+                <a:lnTo>
+                  <a:pt x="0" y="120000"/>
+                </a:lnTo>
+                <a:close/>
+              </a:path>
+            </a:pathLst>
+          </a:custGeom>
+          <a:noFill/>
+          <a:ln w="9525" cap="flat" cmpd="sng">
+            <a:solidFill>
+              <a:srgbClr val="000000"/>
+            </a:solidFill>
+            <a:prstDash val="solid"/>
+            <a:round/>
+            <a:headEnd type="none" w="sm" len="sm"/>
+            <a:tailEnd type="none" w="sm" len="sm"/>
+          </a:ln>
+        </p:spPr>
+      </p:sp>
+      <p:sp>
+        <p:nvSpPr>
+          <p:cNvPr id="492" name="Google Shape;492;p21:notes"/>
+          <p:cNvSpPr txBox="1">
+            <a:spLocks noGrp="1"/>
+          </p:cNvSpPr>
+          <p:nvPr>
+            <p:ph type="body" idx="1"/>
+          </p:nvPr>
+        </p:nvSpPr>
+        <p:spPr>
+          <a:xfrm>
+            <a:off x="685800" y="4343400"/>
+            <a:ext cx="5486400" cy="4114800"/>
+          </a:xfrm>
+          <a:prstGeom prst="rect">
+            <a:avLst/>
+          </a:prstGeom>
+          <a:noFill/>
+          <a:ln>
+            <a:noFill/>
+          </a:ln>
+        </p:spPr>
+        <p:txBody>
+          <a:bodyPr spcFirstLastPara="1" wrap="square" lIns="91425" tIns="91425" rIns="91425" bIns="91425" anchor="t" anchorCtr="0">
+            <a:noAutofit/>
+          </a:bodyPr>
+          <a:lstStyle/>
+          <a:p>
+            <a:pPr marL="0" lvl="0" indent="0" algn="l" rtl="0">
+              <a:lnSpc>
+                <a:spcPct val="100000"/>
+              </a:lnSpc>
+              <a:spcBef>
+                <a:spcPts val="0"/>
+              </a:spcBef>
+              <a:spcAft>
+                <a:spcPts val="0"/>
+              </a:spcAft>
+              <a:buSzPts val="1100"/>
+              <a:buNone/>
+            </a:pPr>
+            <a:endParaRPr/>
+          </a:p>
+        </p:txBody>
+      </p:sp>
+    </p:spTree>
+  </p:cSld>
+  <p:clrMapOvr>
+    <a:masterClrMapping/>
+  </p:clrMapOvr>
+</p:notes>
+</file>
+
+<file path=ppt/notesSlides/notesSlide12.xml><?xml version="1.0" encoding="utf-8"?>
+<p:notes xmlns:a="http://schemas.openxmlformats.org/drawingml/2006/main" xmlns:r="http://schemas.openxmlformats.org/officeDocument/2006/relationships" xmlns:p="http://schemas.openxmlformats.org/presentationml/2006/main" showMasterSp="0" showMasterPhAnim="0">
+  <p:cSld>
+    <p:spTree>
+      <p:nvGrpSpPr>
+        <p:cNvPr id="1" name="Shape 496"/>
+        <p:cNvGrpSpPr/>
+        <p:nvPr/>
+      </p:nvGrpSpPr>
+      <p:grpSpPr>
+        <a:xfrm>
+          <a:off x="0" y="0"/>
+          <a:ext cx="0" cy="0"/>
+          <a:chOff x="0" y="0"/>
+          <a:chExt cx="0" cy="0"/>
+        </a:xfrm>
+      </p:grpSpPr>
+      <p:sp>
+        <p:nvSpPr>
+          <p:cNvPr id="497" name="Google Shape;497;p22:notes"/>
+          <p:cNvSpPr>
+            <a:spLocks noGrp="1" noRot="1" noChangeAspect="1"/>
+          </p:cNvSpPr>
+          <p:nvPr>
+            <p:ph type="sldImg" idx="2"/>
+          </p:nvPr>
+        </p:nvSpPr>
+        <p:spPr>
+          <a:xfrm>
+            <a:off x="381000" y="685800"/>
+            <a:ext cx="6096000" cy="3429000"/>
+          </a:xfrm>
+          <a:custGeom>
+            <a:avLst/>
+            <a:gdLst/>
+            <a:ahLst/>
+            <a:cxnLst/>
+            <a:rect l="l" t="t" r="r" b="b"/>
+            <a:pathLst>
+              <a:path w="120000" h="120000" extrusionOk="0">
+                <a:moveTo>
+                  <a:pt x="0" y="0"/>
+                </a:moveTo>
+                <a:lnTo>
+                  <a:pt x="120000" y="0"/>
+                </a:lnTo>
+                <a:lnTo>
+                  <a:pt x="120000" y="120000"/>
+                </a:lnTo>
+                <a:lnTo>
+                  <a:pt x="0" y="120000"/>
+                </a:lnTo>
+                <a:close/>
+              </a:path>
+            </a:pathLst>
+          </a:custGeom>
+          <a:noFill/>
+          <a:ln w="9525" cap="flat" cmpd="sng">
+            <a:solidFill>
+              <a:srgbClr val="000000"/>
+            </a:solidFill>
+            <a:prstDash val="solid"/>
+            <a:round/>
+            <a:headEnd type="none" w="sm" len="sm"/>
+            <a:tailEnd type="none" w="sm" len="sm"/>
+          </a:ln>
+        </p:spPr>
+      </p:sp>
+      <p:sp>
+        <p:nvSpPr>
+          <p:cNvPr id="498" name="Google Shape;498;p22:notes"/>
+          <p:cNvSpPr txBox="1">
+            <a:spLocks noGrp="1"/>
+          </p:cNvSpPr>
+          <p:nvPr>
+            <p:ph type="body" idx="1"/>
+          </p:nvPr>
+        </p:nvSpPr>
+        <p:spPr>
+          <a:xfrm>
+            <a:off x="685800" y="4343400"/>
+            <a:ext cx="5486400" cy="4114800"/>
+          </a:xfrm>
+          <a:prstGeom prst="rect">
+            <a:avLst/>
+          </a:prstGeom>
+          <a:noFill/>
+          <a:ln>
+            <a:noFill/>
+          </a:ln>
+        </p:spPr>
+        <p:txBody>
+          <a:bodyPr spcFirstLastPara="1" wrap="square" lIns="91425" tIns="91425" rIns="91425" bIns="91425" anchor="t" anchorCtr="0">
+            <a:noAutofit/>
+          </a:bodyPr>
+          <a:lstStyle/>
+          <a:p>
+            <a:pPr marL="0" lvl="0" indent="0" algn="l" rtl="0">
+              <a:lnSpc>
+                <a:spcPct val="100000"/>
+              </a:lnSpc>
+              <a:spcBef>
+                <a:spcPts val="0"/>
+              </a:spcBef>
+              <a:spcAft>
+                <a:spcPts val="0"/>
+              </a:spcAft>
+              <a:buSzPts val="1100"/>
+              <a:buNone/>
+            </a:pPr>
+            <a:endParaRPr/>
+          </a:p>
+        </p:txBody>
+      </p:sp>
+    </p:spTree>
+  </p:cSld>
+  <p:clrMapOvr>
+    <a:masterClrMapping/>
+  </p:clrMapOvr>
+</p:notes>
+</file>
+
+<file path=ppt/notesSlides/notesSlide13.xml><?xml version="1.0" encoding="utf-8"?>
+<p:notes xmlns:a="http://schemas.openxmlformats.org/drawingml/2006/main" xmlns:r="http://schemas.openxmlformats.org/officeDocument/2006/relationships" xmlns:p="http://schemas.openxmlformats.org/presentationml/2006/main" showMasterSp="0" showMasterPhAnim="0">
+  <p:cSld>
+    <p:spTree>
+      <p:nvGrpSpPr>
+        <p:cNvPr id="1" name="Shape 496">
+          <a:extLst>
+            <a:ext uri="{FF2B5EF4-FFF2-40B4-BE49-F238E27FC236}">
+              <a16:creationId xmlns:a16="http://schemas.microsoft.com/office/drawing/2014/main" id="{FCCCB94E-4DAC-39A1-41C4-98623102D48A}"/>
+            </a:ext>
+          </a:extLst>
+        </p:cNvPr>
+        <p:cNvGrpSpPr/>
+        <p:nvPr/>
+      </p:nvGrpSpPr>
+      <p:grpSpPr>
+        <a:xfrm>
+          <a:off x="0" y="0"/>
+          <a:ext cx="0" cy="0"/>
+          <a:chOff x="0" y="0"/>
+          <a:chExt cx="0" cy="0"/>
+        </a:xfrm>
+      </p:grpSpPr>
+      <p:sp>
+        <p:nvSpPr>
+          <p:cNvPr id="497" name="Google Shape;497;p22:notes">
+            <a:extLst>
+              <a:ext uri="{FF2B5EF4-FFF2-40B4-BE49-F238E27FC236}">
+                <a16:creationId xmlns:a16="http://schemas.microsoft.com/office/drawing/2014/main" id="{8251AABD-B007-4AD5-A972-EE5B4CA90F34}"/>
+              </a:ext>
+            </a:extLst>
+          </p:cNvPr>
+          <p:cNvSpPr>
+            <a:spLocks noGrp="1" noRot="1" noChangeAspect="1"/>
+          </p:cNvSpPr>
+          <p:nvPr>
+            <p:ph type="sldImg" idx="2"/>
+          </p:nvPr>
+        </p:nvSpPr>
+        <p:spPr>
+          <a:xfrm>
+            <a:off x="381000" y="685800"/>
+            <a:ext cx="6096000" cy="3429000"/>
+          </a:xfrm>
+          <a:custGeom>
+            <a:avLst/>
+            <a:gdLst/>
+            <a:ahLst/>
+            <a:cxnLst/>
+            <a:rect l="l" t="t" r="r" b="b"/>
+            <a:pathLst>
+              <a:path w="120000" h="120000" extrusionOk="0">
+                <a:moveTo>
+                  <a:pt x="0" y="0"/>
+                </a:moveTo>
+                <a:lnTo>
+                  <a:pt x="120000" y="0"/>
+                </a:lnTo>
+                <a:lnTo>
+                  <a:pt x="120000" y="120000"/>
+                </a:lnTo>
+                <a:lnTo>
+                  <a:pt x="0" y="120000"/>
+                </a:lnTo>
+                <a:close/>
+              </a:path>
+            </a:pathLst>
+          </a:custGeom>
+          <a:noFill/>
+          <a:ln w="9525" cap="flat" cmpd="sng">
+            <a:solidFill>
+              <a:srgbClr val="000000"/>
+            </a:solidFill>
+            <a:prstDash val="solid"/>
+            <a:round/>
+            <a:headEnd type="none" w="sm" len="sm"/>
+            <a:tailEnd type="none" w="sm" len="sm"/>
+          </a:ln>
+        </p:spPr>
+      </p:sp>
+      <p:sp>
+        <p:nvSpPr>
+          <p:cNvPr id="498" name="Google Shape;498;p22:notes">
+            <a:extLst>
+              <a:ext uri="{FF2B5EF4-FFF2-40B4-BE49-F238E27FC236}">
+                <a16:creationId xmlns:a16="http://schemas.microsoft.com/office/drawing/2014/main" id="{CEF09820-4800-5082-DB50-0BC96C2B2DA3}"/>
+              </a:ext>
+            </a:extLst>
+          </p:cNvPr>
+          <p:cNvSpPr txBox="1">
+            <a:spLocks noGrp="1"/>
+          </p:cNvSpPr>
+          <p:nvPr>
+            <p:ph type="body" idx="1"/>
+          </p:nvPr>
+        </p:nvSpPr>
+        <p:spPr>
+          <a:xfrm>
+            <a:off x="685800" y="4343400"/>
+            <a:ext cx="5486400" cy="4114800"/>
+          </a:xfrm>
+          <a:prstGeom prst="rect">
+            <a:avLst/>
+          </a:prstGeom>
+          <a:noFill/>
+          <a:ln>
+            <a:noFill/>
+          </a:ln>
+        </p:spPr>
+        <p:txBody>
+          <a:bodyPr spcFirstLastPara="1" wrap="square" lIns="91425" tIns="91425" rIns="91425" bIns="91425" anchor="t" anchorCtr="0">
+            <a:noAutofit/>
+          </a:bodyPr>
+          <a:lstStyle/>
+          <a:p>
+            <a:pPr marL="0" lvl="0" indent="0" algn="l" rtl="0">
+              <a:lnSpc>
+                <a:spcPct val="100000"/>
+              </a:lnSpc>
+              <a:spcBef>
+                <a:spcPts val="0"/>
+              </a:spcBef>
+              <a:spcAft>
+                <a:spcPts val="0"/>
+              </a:spcAft>
+              <a:buSzPts val="1100"/>
+              <a:buNone/>
+            </a:pPr>
+            <a:endParaRPr/>
+          </a:p>
+        </p:txBody>
+      </p:sp>
+    </p:spTree>
+    <p:extLst>
+      <p:ext uri="{BB962C8B-B14F-4D97-AF65-F5344CB8AC3E}">
+        <p14:creationId xmlns:p14="http://schemas.microsoft.com/office/powerpoint/2010/main" val="3907583865"/>
+      </p:ext>
+    </p:extLst>
+  </p:cSld>
+  <p:clrMapOvr>
+    <a:masterClrMapping/>
+  </p:clrMapOvr>
+</p:notes>
+</file>
+
+<file path=ppt/notesSlides/notesSlide14.xml><?xml version="1.0" encoding="utf-8"?>
+<p:notes xmlns:a="http://schemas.openxmlformats.org/drawingml/2006/main" xmlns:r="http://schemas.openxmlformats.org/officeDocument/2006/relationships" xmlns:p="http://schemas.openxmlformats.org/presentationml/2006/main" showMasterSp="0" showMasterPhAnim="0">
+  <p:cSld>
+    <p:spTree>
+      <p:nvGrpSpPr>
+        <p:cNvPr id="1" name="Shape 502"/>
+        <p:cNvGrpSpPr/>
+        <p:nvPr/>
+      </p:nvGrpSpPr>
+      <p:grpSpPr>
+        <a:xfrm>
+          <a:off x="0" y="0"/>
+          <a:ext cx="0" cy="0"/>
+          <a:chOff x="0" y="0"/>
+          <a:chExt cx="0" cy="0"/>
+        </a:xfrm>
+      </p:grpSpPr>
+      <p:sp>
+        <p:nvSpPr>
+          <p:cNvPr id="503" name="Google Shape;503;p23:notes"/>
+          <p:cNvSpPr>
+            <a:spLocks noGrp="1" noRot="1" noChangeAspect="1"/>
+          </p:cNvSpPr>
+          <p:nvPr>
+            <p:ph type="sldImg" idx="2"/>
+          </p:nvPr>
+        </p:nvSpPr>
+        <p:spPr>
+          <a:xfrm>
+            <a:off x="381000" y="685800"/>
+            <a:ext cx="6096000" cy="3429000"/>
+          </a:xfrm>
+          <a:custGeom>
+            <a:avLst/>
+            <a:gdLst/>
+            <a:ahLst/>
+            <a:cxnLst/>
+            <a:rect l="l" t="t" r="r" b="b"/>
+            <a:pathLst>
+              <a:path w="120000" h="120000" extrusionOk="0">
+                <a:moveTo>
+                  <a:pt x="0" y="0"/>
+                </a:moveTo>
+                <a:lnTo>
+                  <a:pt x="120000" y="0"/>
+                </a:lnTo>
+                <a:lnTo>
+                  <a:pt x="120000" y="120000"/>
+                </a:lnTo>
+                <a:lnTo>
+                  <a:pt x="0" y="120000"/>
+                </a:lnTo>
+                <a:close/>
+              </a:path>
+            </a:pathLst>
+          </a:custGeom>
+          <a:noFill/>
+          <a:ln w="9525" cap="flat" cmpd="sng">
+            <a:solidFill>
+              <a:srgbClr val="000000"/>
+            </a:solidFill>
+            <a:prstDash val="solid"/>
+            <a:round/>
+            <a:headEnd type="none" w="sm" len="sm"/>
+            <a:tailEnd type="none" w="sm" len="sm"/>
+          </a:ln>
+        </p:spPr>
+      </p:sp>
+      <p:sp>
+        <p:nvSpPr>
+          <p:cNvPr id="504" name="Google Shape;504;p23:notes"/>
+          <p:cNvSpPr txBox="1">
+            <a:spLocks noGrp="1"/>
+          </p:cNvSpPr>
+          <p:nvPr>
+            <p:ph type="body" idx="1"/>
+          </p:nvPr>
+        </p:nvSpPr>
+        <p:spPr>
+          <a:xfrm>
+            <a:off x="685800" y="4343400"/>
+            <a:ext cx="5486400" cy="4114800"/>
+          </a:xfrm>
+          <a:prstGeom prst="rect">
+            <a:avLst/>
+          </a:prstGeom>
+          <a:noFill/>
+          <a:ln>
+            <a:noFill/>
+          </a:ln>
+        </p:spPr>
+        <p:txBody>
+          <a:bodyPr spcFirstLastPara="1" wrap="square" lIns="91425" tIns="91425" rIns="91425" bIns="91425" anchor="t" anchorCtr="0">
+            <a:noAutofit/>
+          </a:bodyPr>
+          <a:lstStyle/>
+          <a:p>
+            <a:pPr marL="0" lvl="0" indent="0" algn="l" rtl="0">
+              <a:lnSpc>
+                <a:spcPct val="100000"/>
+              </a:lnSpc>
+              <a:spcBef>
+                <a:spcPts val="0"/>
+              </a:spcBef>
+              <a:spcAft>
+                <a:spcPts val="0"/>
+              </a:spcAft>
+              <a:buSzPts val="1100"/>
+              <a:buNone/>
+            </a:pPr>
+            <a:endParaRPr/>
+          </a:p>
+        </p:txBody>
+      </p:sp>
+    </p:spTree>
+  </p:cSld>
+  <p:clrMapOvr>
+    <a:masterClrMapping/>
+  </p:clrMapOvr>
+</p:notes>
+</file>
+
+<file path=ppt/notesSlides/notesSlide15.xml><?xml version="1.0" encoding="utf-8"?>
+<p:notes xmlns:a="http://schemas.openxmlformats.org/drawingml/2006/main" xmlns:r="http://schemas.openxmlformats.org/officeDocument/2006/relationships" xmlns:p="http://schemas.openxmlformats.org/presentationml/2006/main" showMasterSp="0" showMasterPhAnim="0">
+  <p:cSld>
+    <p:spTree>
+      <p:nvGrpSpPr>
+        <p:cNvPr id="1" name="Shape 508">
+          <a:extLst>
+            <a:ext uri="{FF2B5EF4-FFF2-40B4-BE49-F238E27FC236}">
+              <a16:creationId xmlns:a16="http://schemas.microsoft.com/office/drawing/2014/main" id="{12846643-1079-C6D7-6752-BBE0CD9F7115}"/>
+            </a:ext>
+          </a:extLst>
+        </p:cNvPr>
+        <p:cNvGrpSpPr/>
+        <p:nvPr/>
+      </p:nvGrpSpPr>
+      <p:grpSpPr>
+        <a:xfrm>
+          <a:off x="0" y="0"/>
+          <a:ext cx="0" cy="0"/>
+          <a:chOff x="0" y="0"/>
+          <a:chExt cx="0" cy="0"/>
+        </a:xfrm>
+      </p:grpSpPr>
+      <p:sp>
+        <p:nvSpPr>
+          <p:cNvPr id="509" name="Google Shape;509;p24:notes">
+            <a:extLst>
+              <a:ext uri="{FF2B5EF4-FFF2-40B4-BE49-F238E27FC236}">
+                <a16:creationId xmlns:a16="http://schemas.microsoft.com/office/drawing/2014/main" id="{D6687998-9C0B-95BE-F9C2-3285C2C98603}"/>
+              </a:ext>
+            </a:extLst>
+          </p:cNvPr>
+          <p:cNvSpPr>
+            <a:spLocks noGrp="1" noRot="1" noChangeAspect="1"/>
+          </p:cNvSpPr>
+          <p:nvPr>
+            <p:ph type="sldImg" idx="2"/>
+          </p:nvPr>
+        </p:nvSpPr>
+        <p:spPr>
+          <a:xfrm>
+            <a:off x="381000" y="685800"/>
+            <a:ext cx="6096000" cy="3429000"/>
+          </a:xfrm>
+          <a:custGeom>
+            <a:avLst/>
+            <a:gdLst/>
+            <a:ahLst/>
+            <a:cxnLst/>
+            <a:rect l="l" t="t" r="r" b="b"/>
+            <a:pathLst>
+              <a:path w="120000" h="120000" extrusionOk="0">
+                <a:moveTo>
+                  <a:pt x="0" y="0"/>
+                </a:moveTo>
+                <a:lnTo>
+                  <a:pt x="120000" y="0"/>
+                </a:lnTo>
+                <a:lnTo>
+                  <a:pt x="120000" y="120000"/>
+                </a:lnTo>
+                <a:lnTo>
+                  <a:pt x="0" y="120000"/>
+                </a:lnTo>
+                <a:close/>
+              </a:path>
+            </a:pathLst>
+          </a:custGeom>
+          <a:noFill/>
+          <a:ln w="9525" cap="flat" cmpd="sng">
+            <a:solidFill>
+              <a:srgbClr val="000000"/>
+            </a:solidFill>
+            <a:prstDash val="solid"/>
+            <a:round/>
+            <a:headEnd type="none" w="sm" len="sm"/>
+            <a:tailEnd type="none" w="sm" len="sm"/>
+          </a:ln>
+        </p:spPr>
+      </p:sp>
+      <p:sp>
+        <p:nvSpPr>
+          <p:cNvPr id="510" name="Google Shape;510;p24:notes">
+            <a:extLst>
+              <a:ext uri="{FF2B5EF4-FFF2-40B4-BE49-F238E27FC236}">
+                <a16:creationId xmlns:a16="http://schemas.microsoft.com/office/drawing/2014/main" id="{4417934F-AE4E-78D3-31A3-D55C3A3515FF}"/>
+              </a:ext>
+            </a:extLst>
+          </p:cNvPr>
+          <p:cNvSpPr txBox="1">
+            <a:spLocks noGrp="1"/>
+          </p:cNvSpPr>
+          <p:nvPr>
+            <p:ph type="body" idx="1"/>
+          </p:nvPr>
+        </p:nvSpPr>
+        <p:spPr>
+          <a:xfrm>
+            <a:off x="685800" y="4343400"/>
+            <a:ext cx="5486400" cy="4114800"/>
+          </a:xfrm>
+          <a:prstGeom prst="rect">
+            <a:avLst/>
+          </a:prstGeom>
+          <a:noFill/>
+          <a:ln>
+            <a:noFill/>
+          </a:ln>
+        </p:spPr>
+        <p:txBody>
+          <a:bodyPr spcFirstLastPara="1" wrap="square" lIns="91425" tIns="91425" rIns="91425" bIns="91425" anchor="t" anchorCtr="0">
+            <a:noAutofit/>
+          </a:bodyPr>
+          <a:lstStyle/>
+          <a:p>
+            <a:pPr marL="0" lvl="0" indent="0" algn="l" rtl="0">
+              <a:lnSpc>
+                <a:spcPct val="100000"/>
+              </a:lnSpc>
+              <a:spcBef>
+                <a:spcPts val="0"/>
+              </a:spcBef>
+              <a:spcAft>
+                <a:spcPts val="0"/>
+              </a:spcAft>
+              <a:buSzPts val="1100"/>
+              <a:buNone/>
+            </a:pPr>
+            <a:endParaRPr/>
+          </a:p>
+        </p:txBody>
+      </p:sp>
+    </p:spTree>
+    <p:extLst>
+      <p:ext uri="{BB962C8B-B14F-4D97-AF65-F5344CB8AC3E}">
+        <p14:creationId xmlns:p14="http://schemas.microsoft.com/office/powerpoint/2010/main" val="2733208844"/>
+      </p:ext>
+    </p:extLst>
+  </p:cSld>
+  <p:clrMapOvr>
+    <a:masterClrMapping/>
+  </p:clrMapOvr>
+</p:notes>
+</file>
+
+<file path=ppt/notesSlides/notesSlide16.xml><?xml version="1.0" encoding="utf-8"?>
+<p:notes xmlns:a="http://schemas.openxmlformats.org/drawingml/2006/main" xmlns:r="http://schemas.openxmlformats.org/officeDocument/2006/relationships" xmlns:p="http://schemas.openxmlformats.org/presentationml/2006/main" showMasterSp="0" showMasterPhAnim="0">
+  <p:cSld>
+    <p:spTree>
+      <p:nvGrpSpPr>
+        <p:cNvPr id="1" name="Shape 508"/>
+        <p:cNvGrpSpPr/>
+        <p:nvPr/>
+      </p:nvGrpSpPr>
+      <p:grpSpPr>
+        <a:xfrm>
+          <a:off x="0" y="0"/>
+          <a:ext cx="0" cy="0"/>
+          <a:chOff x="0" y="0"/>
+          <a:chExt cx="0" cy="0"/>
+        </a:xfrm>
+      </p:grpSpPr>
+      <p:sp>
+        <p:nvSpPr>
+          <p:cNvPr id="509" name="Google Shape;509;p24:notes"/>
+          <p:cNvSpPr>
+            <a:spLocks noGrp="1" noRot="1" noChangeAspect="1"/>
+          </p:cNvSpPr>
+          <p:nvPr>
+            <p:ph type="sldImg" idx="2"/>
+          </p:nvPr>
+        </p:nvSpPr>
+        <p:spPr>
+          <a:xfrm>
+            <a:off x="381000" y="685800"/>
+            <a:ext cx="6096000" cy="3429000"/>
+          </a:xfrm>
+          <a:custGeom>
+            <a:avLst/>
+            <a:gdLst/>
+            <a:ahLst/>
+            <a:cxnLst/>
+            <a:rect l="l" t="t" r="r" b="b"/>
+            <a:pathLst>
+              <a:path w="120000" h="120000" extrusionOk="0">
+                <a:moveTo>
+                  <a:pt x="0" y="0"/>
+                </a:moveTo>
+                <a:lnTo>
+                  <a:pt x="120000" y="0"/>
+                </a:lnTo>
+                <a:lnTo>
+                  <a:pt x="120000" y="120000"/>
+                </a:lnTo>
+                <a:lnTo>
+                  <a:pt x="0" y="120000"/>
+                </a:lnTo>
+                <a:close/>
+              </a:path>
+            </a:pathLst>
+          </a:custGeom>
+          <a:noFill/>
+          <a:ln w="9525" cap="flat" cmpd="sng">
+            <a:solidFill>
+              <a:srgbClr val="000000"/>
+            </a:solidFill>
+            <a:prstDash val="solid"/>
+            <a:round/>
+            <a:headEnd type="none" w="sm" len="sm"/>
+            <a:tailEnd type="none" w="sm" len="sm"/>
+          </a:ln>
+        </p:spPr>
+      </p:sp>
+      <p:sp>
+        <p:nvSpPr>
+          <p:cNvPr id="510" name="Google Shape;510;p24:notes"/>
+          <p:cNvSpPr txBox="1">
+            <a:spLocks noGrp="1"/>
+          </p:cNvSpPr>
+          <p:nvPr>
+            <p:ph type="body" idx="1"/>
+          </p:nvPr>
+        </p:nvSpPr>
+        <p:spPr>
+          <a:xfrm>
+            <a:off x="685800" y="4343400"/>
+            <a:ext cx="5486400" cy="4114800"/>
+          </a:xfrm>
+          <a:prstGeom prst="rect">
+            <a:avLst/>
+          </a:prstGeom>
+          <a:noFill/>
+          <a:ln>
+            <a:noFill/>
+          </a:ln>
+        </p:spPr>
+        <p:txBody>
+          <a:bodyPr spcFirstLastPara="1" wrap="square" lIns="91425" tIns="91425" rIns="91425" bIns="91425" anchor="t" anchorCtr="0">
+            <a:noAutofit/>
+          </a:bodyPr>
+          <a:lstStyle/>
+          <a:p>
+            <a:pPr marL="0" lvl="0" indent="0" algn="l" rtl="0">
+              <a:lnSpc>
+                <a:spcPct val="100000"/>
+              </a:lnSpc>
+              <a:spcBef>
+                <a:spcPts val="0"/>
+              </a:spcBef>
+              <a:spcAft>
+                <a:spcPts val="0"/>
+              </a:spcAft>
+              <a:buSzPts val="1100"/>
+              <a:buNone/>
+            </a:pPr>
+            <a:endParaRPr/>
+          </a:p>
+        </p:txBody>
+      </p:sp>
+    </p:spTree>
+  </p:cSld>
+  <p:clrMapOvr>
+    <a:masterClrMapping/>
+  </p:clrMapOvr>
+</p:notes>
+</file>
+
+<file path=ppt/notesSlides/notesSlide17.xml><?xml version="1.0" encoding="utf-8"?>
+<p:notes xmlns:a="http://schemas.openxmlformats.org/drawingml/2006/main" xmlns:r="http://schemas.openxmlformats.org/officeDocument/2006/relationships" xmlns:p="http://schemas.openxmlformats.org/presentationml/2006/main" showMasterSp="0" showMasterPhAnim="0">
+  <p:cSld>
+    <p:spTree>
+      <p:nvGrpSpPr>
         <p:cNvPr id="1" name="Shape 514"/>
         <p:cNvGrpSpPr/>
         <p:nvPr/>
@@ -1109,6 +2016,699 @@
 </file>
 
 <file path=ppt/notesSlides/notesSlide2.xml><?xml version="1.0" encoding="utf-8"?>
+<p:notes xmlns:a="http://schemas.openxmlformats.org/drawingml/2006/main" xmlns:r="http://schemas.openxmlformats.org/officeDocument/2006/relationships" xmlns:p="http://schemas.openxmlformats.org/presentationml/2006/main">
+  <p:cSld>
+    <p:spTree>
+      <p:nvGrpSpPr>
+        <p:cNvPr id="1" name="">
+          <a:extLst>
+            <a:ext uri="{FF2B5EF4-FFF2-40B4-BE49-F238E27FC236}">
+              <a16:creationId xmlns:a16="http://schemas.microsoft.com/office/drawing/2014/main" id="{1CD64719-007A-9D20-6D43-3A4FCAADACE1}"/>
+            </a:ext>
+          </a:extLst>
+        </p:cNvPr>
+        <p:cNvGrpSpPr/>
+        <p:nvPr/>
+      </p:nvGrpSpPr>
+      <p:grpSpPr>
+        <a:xfrm>
+          <a:off x="0" y="0"/>
+          <a:ext cx="0" cy="0"/>
+          <a:chOff x="0" y="0"/>
+          <a:chExt cx="0" cy="0"/>
+        </a:xfrm>
+      </p:grpSpPr>
+      <p:sp>
+        <p:nvSpPr>
+          <p:cNvPr id="2" name="Slide Image Placeholder 1">
+            <a:extLst>
+              <a:ext uri="{FF2B5EF4-FFF2-40B4-BE49-F238E27FC236}">
+                <a16:creationId xmlns:a16="http://schemas.microsoft.com/office/drawing/2014/main" id="{E432F23C-3B6C-06AD-FDEF-F55DEF812C1E}"/>
+              </a:ext>
+            </a:extLst>
+          </p:cNvPr>
+          <p:cNvSpPr>
+            <a:spLocks noGrp="1" noRot="1" noChangeAspect="1"/>
+          </p:cNvSpPr>
+          <p:nvPr>
+            <p:ph type="sldImg"/>
+          </p:nvPr>
+        </p:nvSpPr>
+        <p:spPr>
+          <a:xfrm>
+            <a:off x="381000" y="685800"/>
+            <a:ext cx="6096000" cy="3429000"/>
+          </a:xfrm>
+        </p:spPr>
+      </p:sp>
+      <p:sp>
+        <p:nvSpPr>
+          <p:cNvPr id="3" name="Notes Placeholder 2">
+            <a:extLst>
+              <a:ext uri="{FF2B5EF4-FFF2-40B4-BE49-F238E27FC236}">
+                <a16:creationId xmlns:a16="http://schemas.microsoft.com/office/drawing/2014/main" id="{0784E9A6-CB51-3C7D-DF18-0DDEC1AC4207}"/>
+              </a:ext>
+            </a:extLst>
+          </p:cNvPr>
+          <p:cNvSpPr>
+            <a:spLocks noGrp="1"/>
+          </p:cNvSpPr>
+          <p:nvPr>
+            <p:ph type="body" idx="1"/>
+          </p:nvPr>
+        </p:nvSpPr>
+        <p:spPr/>
+        <p:txBody>
+          <a:bodyPr/>
+          <a:lstStyle/>
+          <a:p>
+            <a:endParaRPr lang="en-US" dirty="0"/>
+          </a:p>
+        </p:txBody>
+      </p:sp>
+      <p:sp>
+        <p:nvSpPr>
+          <p:cNvPr id="4" name="Slide Number Placeholder 3">
+            <a:extLst>
+              <a:ext uri="{FF2B5EF4-FFF2-40B4-BE49-F238E27FC236}">
+                <a16:creationId xmlns:a16="http://schemas.microsoft.com/office/drawing/2014/main" id="{D045C7A3-AEE3-A283-A203-B801AB559F92}"/>
+              </a:ext>
+            </a:extLst>
+          </p:cNvPr>
+          <p:cNvSpPr>
+            <a:spLocks noGrp="1"/>
+          </p:cNvSpPr>
+          <p:nvPr>
+            <p:ph type="sldNum" sz="quarter" idx="5"/>
+          </p:nvPr>
+        </p:nvSpPr>
+        <p:spPr/>
+        <p:txBody>
+          <a:bodyPr/>
+          <a:lstStyle/>
+          <a:p>
+            <a:fld id="{292570D5-C374-43AE-876B-55C2A221664E}" type="slidenum">
+              <a:rPr lang="en-US" smtClean="0"/>
+              <a:t>2</a:t>
+            </a:fld>
+            <a:endParaRPr lang="en-US"/>
+          </a:p>
+        </p:txBody>
+      </p:sp>
+    </p:spTree>
+    <p:extLst>
+      <p:ext uri="{BB962C8B-B14F-4D97-AF65-F5344CB8AC3E}">
+        <p14:creationId xmlns:p14="http://schemas.microsoft.com/office/powerpoint/2010/main" val="2731214060"/>
+      </p:ext>
+    </p:extLst>
+  </p:cSld>
+  <p:clrMapOvr>
+    <a:masterClrMapping/>
+  </p:clrMapOvr>
+</p:notes>
+</file>
+
+<file path=ppt/notesSlides/notesSlide3.xml><?xml version="1.0" encoding="utf-8"?>
+<p:notes xmlns:a="http://schemas.openxmlformats.org/drawingml/2006/main" xmlns:r="http://schemas.openxmlformats.org/officeDocument/2006/relationships" xmlns:p="http://schemas.openxmlformats.org/presentationml/2006/main" showMasterSp="0" showMasterPhAnim="0">
+  <p:cSld>
+    <p:spTree>
+      <p:nvGrpSpPr>
+        <p:cNvPr id="1" name="Shape 467">
+          <a:extLst>
+            <a:ext uri="{FF2B5EF4-FFF2-40B4-BE49-F238E27FC236}">
+              <a16:creationId xmlns:a16="http://schemas.microsoft.com/office/drawing/2014/main" id="{E6376FA9-B5F0-B037-8046-B6615FDA6FF6}"/>
+            </a:ext>
+          </a:extLst>
+        </p:cNvPr>
+        <p:cNvGrpSpPr/>
+        <p:nvPr/>
+      </p:nvGrpSpPr>
+      <p:grpSpPr>
+        <a:xfrm>
+          <a:off x="0" y="0"/>
+          <a:ext cx="0" cy="0"/>
+          <a:chOff x="0" y="0"/>
+          <a:chExt cx="0" cy="0"/>
+        </a:xfrm>
+      </p:grpSpPr>
+      <p:sp>
+        <p:nvSpPr>
+          <p:cNvPr id="468" name="Google Shape;468;p17:notes">
+            <a:extLst>
+              <a:ext uri="{FF2B5EF4-FFF2-40B4-BE49-F238E27FC236}">
+                <a16:creationId xmlns:a16="http://schemas.microsoft.com/office/drawing/2014/main" id="{DD419411-177D-3D00-B750-FE80CE812B25}"/>
+              </a:ext>
+            </a:extLst>
+          </p:cNvPr>
+          <p:cNvSpPr>
+            <a:spLocks noGrp="1" noRot="1" noChangeAspect="1"/>
+          </p:cNvSpPr>
+          <p:nvPr>
+            <p:ph type="sldImg" idx="2"/>
+          </p:nvPr>
+        </p:nvSpPr>
+        <p:spPr>
+          <a:xfrm>
+            <a:off x="381000" y="685800"/>
+            <a:ext cx="6096000" cy="3429000"/>
+          </a:xfrm>
+          <a:custGeom>
+            <a:avLst/>
+            <a:gdLst/>
+            <a:ahLst/>
+            <a:cxnLst/>
+            <a:rect l="l" t="t" r="r" b="b"/>
+            <a:pathLst>
+              <a:path w="120000" h="120000" extrusionOk="0">
+                <a:moveTo>
+                  <a:pt x="0" y="0"/>
+                </a:moveTo>
+                <a:lnTo>
+                  <a:pt x="120000" y="0"/>
+                </a:lnTo>
+                <a:lnTo>
+                  <a:pt x="120000" y="120000"/>
+                </a:lnTo>
+                <a:lnTo>
+                  <a:pt x="0" y="120000"/>
+                </a:lnTo>
+                <a:close/>
+              </a:path>
+            </a:pathLst>
+          </a:custGeom>
+          <a:noFill/>
+          <a:ln w="9525" cap="flat" cmpd="sng">
+            <a:solidFill>
+              <a:srgbClr val="000000"/>
+            </a:solidFill>
+            <a:prstDash val="solid"/>
+            <a:round/>
+            <a:headEnd type="none" w="sm" len="sm"/>
+            <a:tailEnd type="none" w="sm" len="sm"/>
+          </a:ln>
+        </p:spPr>
+      </p:sp>
+      <p:sp>
+        <p:nvSpPr>
+          <p:cNvPr id="469" name="Google Shape;469;p17:notes">
+            <a:extLst>
+              <a:ext uri="{FF2B5EF4-FFF2-40B4-BE49-F238E27FC236}">
+                <a16:creationId xmlns:a16="http://schemas.microsoft.com/office/drawing/2014/main" id="{78A8749A-07B8-1837-285F-24B38AB73009}"/>
+              </a:ext>
+            </a:extLst>
+          </p:cNvPr>
+          <p:cNvSpPr txBox="1">
+            <a:spLocks noGrp="1"/>
+          </p:cNvSpPr>
+          <p:nvPr>
+            <p:ph type="body" idx="1"/>
+          </p:nvPr>
+        </p:nvSpPr>
+        <p:spPr>
+          <a:xfrm>
+            <a:off x="685800" y="4343400"/>
+            <a:ext cx="5486400" cy="4114800"/>
+          </a:xfrm>
+          <a:prstGeom prst="rect">
+            <a:avLst/>
+          </a:prstGeom>
+          <a:noFill/>
+          <a:ln>
+            <a:noFill/>
+          </a:ln>
+        </p:spPr>
+        <p:txBody>
+          <a:bodyPr spcFirstLastPara="1" wrap="square" lIns="91425" tIns="91425" rIns="91425" bIns="91425" anchor="t" anchorCtr="0">
+            <a:noAutofit/>
+          </a:bodyPr>
+          <a:lstStyle/>
+          <a:p>
+            <a:pPr marL="0" lvl="0" indent="0" algn="l" rtl="0">
+              <a:lnSpc>
+                <a:spcPct val="100000"/>
+              </a:lnSpc>
+              <a:spcBef>
+                <a:spcPts val="0"/>
+              </a:spcBef>
+              <a:spcAft>
+                <a:spcPts val="0"/>
+              </a:spcAft>
+              <a:buSzPts val="1100"/>
+              <a:buNone/>
+            </a:pPr>
+            <a:endParaRPr/>
+          </a:p>
+        </p:txBody>
+      </p:sp>
+    </p:spTree>
+    <p:extLst>
+      <p:ext uri="{BB962C8B-B14F-4D97-AF65-F5344CB8AC3E}">
+        <p14:creationId xmlns:p14="http://schemas.microsoft.com/office/powerpoint/2010/main" val="1678703663"/>
+      </p:ext>
+    </p:extLst>
+  </p:cSld>
+  <p:clrMapOvr>
+    <a:masterClrMapping/>
+  </p:clrMapOvr>
+</p:notes>
+</file>
+
+<file path=ppt/notesSlides/notesSlide4.xml><?xml version="1.0" encoding="utf-8"?>
+<p:notes xmlns:a="http://schemas.openxmlformats.org/drawingml/2006/main" xmlns:r="http://schemas.openxmlformats.org/officeDocument/2006/relationships" xmlns:p="http://schemas.openxmlformats.org/presentationml/2006/main" showMasterSp="0" showMasterPhAnim="0">
+  <p:cSld>
+    <p:spTree>
+      <p:nvGrpSpPr>
+        <p:cNvPr id="1" name="Shape 467">
+          <a:extLst>
+            <a:ext uri="{FF2B5EF4-FFF2-40B4-BE49-F238E27FC236}">
+              <a16:creationId xmlns:a16="http://schemas.microsoft.com/office/drawing/2014/main" id="{043152F8-3649-B807-263D-B391F303EF9A}"/>
+            </a:ext>
+          </a:extLst>
+        </p:cNvPr>
+        <p:cNvGrpSpPr/>
+        <p:nvPr/>
+      </p:nvGrpSpPr>
+      <p:grpSpPr>
+        <a:xfrm>
+          <a:off x="0" y="0"/>
+          <a:ext cx="0" cy="0"/>
+          <a:chOff x="0" y="0"/>
+          <a:chExt cx="0" cy="0"/>
+        </a:xfrm>
+      </p:grpSpPr>
+      <p:sp>
+        <p:nvSpPr>
+          <p:cNvPr id="468" name="Google Shape;468;p17:notes">
+            <a:extLst>
+              <a:ext uri="{FF2B5EF4-FFF2-40B4-BE49-F238E27FC236}">
+                <a16:creationId xmlns:a16="http://schemas.microsoft.com/office/drawing/2014/main" id="{D1E0B138-BDAD-22BA-9A52-5E4F9D1697D6}"/>
+              </a:ext>
+            </a:extLst>
+          </p:cNvPr>
+          <p:cNvSpPr>
+            <a:spLocks noGrp="1" noRot="1" noChangeAspect="1"/>
+          </p:cNvSpPr>
+          <p:nvPr>
+            <p:ph type="sldImg" idx="2"/>
+          </p:nvPr>
+        </p:nvSpPr>
+        <p:spPr>
+          <a:xfrm>
+            <a:off x="381000" y="685800"/>
+            <a:ext cx="6096000" cy="3429000"/>
+          </a:xfrm>
+          <a:custGeom>
+            <a:avLst/>
+            <a:gdLst/>
+            <a:ahLst/>
+            <a:cxnLst/>
+            <a:rect l="l" t="t" r="r" b="b"/>
+            <a:pathLst>
+              <a:path w="120000" h="120000" extrusionOk="0">
+                <a:moveTo>
+                  <a:pt x="0" y="0"/>
+                </a:moveTo>
+                <a:lnTo>
+                  <a:pt x="120000" y="0"/>
+                </a:lnTo>
+                <a:lnTo>
+                  <a:pt x="120000" y="120000"/>
+                </a:lnTo>
+                <a:lnTo>
+                  <a:pt x="0" y="120000"/>
+                </a:lnTo>
+                <a:close/>
+              </a:path>
+            </a:pathLst>
+          </a:custGeom>
+          <a:noFill/>
+          <a:ln w="9525" cap="flat" cmpd="sng">
+            <a:solidFill>
+              <a:srgbClr val="000000"/>
+            </a:solidFill>
+            <a:prstDash val="solid"/>
+            <a:round/>
+            <a:headEnd type="none" w="sm" len="sm"/>
+            <a:tailEnd type="none" w="sm" len="sm"/>
+          </a:ln>
+        </p:spPr>
+      </p:sp>
+      <p:sp>
+        <p:nvSpPr>
+          <p:cNvPr id="469" name="Google Shape;469;p17:notes">
+            <a:extLst>
+              <a:ext uri="{FF2B5EF4-FFF2-40B4-BE49-F238E27FC236}">
+                <a16:creationId xmlns:a16="http://schemas.microsoft.com/office/drawing/2014/main" id="{CF3F03FE-85F3-88C7-4359-C593C7C6F22B}"/>
+              </a:ext>
+            </a:extLst>
+          </p:cNvPr>
+          <p:cNvSpPr txBox="1">
+            <a:spLocks noGrp="1"/>
+          </p:cNvSpPr>
+          <p:nvPr>
+            <p:ph type="body" idx="1"/>
+          </p:nvPr>
+        </p:nvSpPr>
+        <p:spPr>
+          <a:xfrm>
+            <a:off x="685800" y="4343400"/>
+            <a:ext cx="5486400" cy="4114800"/>
+          </a:xfrm>
+          <a:prstGeom prst="rect">
+            <a:avLst/>
+          </a:prstGeom>
+          <a:noFill/>
+          <a:ln>
+            <a:noFill/>
+          </a:ln>
+        </p:spPr>
+        <p:txBody>
+          <a:bodyPr spcFirstLastPara="1" wrap="square" lIns="91425" tIns="91425" rIns="91425" bIns="91425" anchor="t" anchorCtr="0">
+            <a:noAutofit/>
+          </a:bodyPr>
+          <a:lstStyle/>
+          <a:p>
+            <a:pPr marL="0" lvl="0" indent="0" algn="l" rtl="0">
+              <a:lnSpc>
+                <a:spcPct val="100000"/>
+              </a:lnSpc>
+              <a:spcBef>
+                <a:spcPts val="0"/>
+              </a:spcBef>
+              <a:spcAft>
+                <a:spcPts val="0"/>
+              </a:spcAft>
+              <a:buSzPts val="1100"/>
+              <a:buNone/>
+            </a:pPr>
+            <a:endParaRPr/>
+          </a:p>
+        </p:txBody>
+      </p:sp>
+    </p:spTree>
+    <p:extLst>
+      <p:ext uri="{BB962C8B-B14F-4D97-AF65-F5344CB8AC3E}">
+        <p14:creationId xmlns:p14="http://schemas.microsoft.com/office/powerpoint/2010/main" val="612688048"/>
+      </p:ext>
+    </p:extLst>
+  </p:cSld>
+  <p:clrMapOvr>
+    <a:masterClrMapping/>
+  </p:clrMapOvr>
+</p:notes>
+</file>
+
+<file path=ppt/notesSlides/notesSlide5.xml><?xml version="1.0" encoding="utf-8"?>
+<p:notes xmlns:a="http://schemas.openxmlformats.org/drawingml/2006/main" xmlns:r="http://schemas.openxmlformats.org/officeDocument/2006/relationships" xmlns:p="http://schemas.openxmlformats.org/presentationml/2006/main" showMasterSp="0" showMasterPhAnim="0">
+  <p:cSld>
+    <p:spTree>
+      <p:nvGrpSpPr>
+        <p:cNvPr id="1" name="Shape 467">
+          <a:extLst>
+            <a:ext uri="{FF2B5EF4-FFF2-40B4-BE49-F238E27FC236}">
+              <a16:creationId xmlns:a16="http://schemas.microsoft.com/office/drawing/2014/main" id="{6A42F07E-2DF9-30B8-1B59-4FE150015828}"/>
+            </a:ext>
+          </a:extLst>
+        </p:cNvPr>
+        <p:cNvGrpSpPr/>
+        <p:nvPr/>
+      </p:nvGrpSpPr>
+      <p:grpSpPr>
+        <a:xfrm>
+          <a:off x="0" y="0"/>
+          <a:ext cx="0" cy="0"/>
+          <a:chOff x="0" y="0"/>
+          <a:chExt cx="0" cy="0"/>
+        </a:xfrm>
+      </p:grpSpPr>
+      <p:sp>
+        <p:nvSpPr>
+          <p:cNvPr id="468" name="Google Shape;468;p17:notes">
+            <a:extLst>
+              <a:ext uri="{FF2B5EF4-FFF2-40B4-BE49-F238E27FC236}">
+                <a16:creationId xmlns:a16="http://schemas.microsoft.com/office/drawing/2014/main" id="{B37E34B5-94DB-CADE-0CC8-E01A9ACEACFE}"/>
+              </a:ext>
+            </a:extLst>
+          </p:cNvPr>
+          <p:cNvSpPr>
+            <a:spLocks noGrp="1" noRot="1" noChangeAspect="1"/>
+          </p:cNvSpPr>
+          <p:nvPr>
+            <p:ph type="sldImg" idx="2"/>
+          </p:nvPr>
+        </p:nvSpPr>
+        <p:spPr>
+          <a:xfrm>
+            <a:off x="381000" y="685800"/>
+            <a:ext cx="6096000" cy="3429000"/>
+          </a:xfrm>
+          <a:custGeom>
+            <a:avLst/>
+            <a:gdLst/>
+            <a:ahLst/>
+            <a:cxnLst/>
+            <a:rect l="l" t="t" r="r" b="b"/>
+            <a:pathLst>
+              <a:path w="120000" h="120000" extrusionOk="0">
+                <a:moveTo>
+                  <a:pt x="0" y="0"/>
+                </a:moveTo>
+                <a:lnTo>
+                  <a:pt x="120000" y="0"/>
+                </a:lnTo>
+                <a:lnTo>
+                  <a:pt x="120000" y="120000"/>
+                </a:lnTo>
+                <a:lnTo>
+                  <a:pt x="0" y="120000"/>
+                </a:lnTo>
+                <a:close/>
+              </a:path>
+            </a:pathLst>
+          </a:custGeom>
+          <a:noFill/>
+          <a:ln w="9525" cap="flat" cmpd="sng">
+            <a:solidFill>
+              <a:srgbClr val="000000"/>
+            </a:solidFill>
+            <a:prstDash val="solid"/>
+            <a:round/>
+            <a:headEnd type="none" w="sm" len="sm"/>
+            <a:tailEnd type="none" w="sm" len="sm"/>
+          </a:ln>
+        </p:spPr>
+      </p:sp>
+      <p:sp>
+        <p:nvSpPr>
+          <p:cNvPr id="469" name="Google Shape;469;p17:notes">
+            <a:extLst>
+              <a:ext uri="{FF2B5EF4-FFF2-40B4-BE49-F238E27FC236}">
+                <a16:creationId xmlns:a16="http://schemas.microsoft.com/office/drawing/2014/main" id="{DA6DEF0B-A165-966F-E676-253A68C7960B}"/>
+              </a:ext>
+            </a:extLst>
+          </p:cNvPr>
+          <p:cNvSpPr txBox="1">
+            <a:spLocks noGrp="1"/>
+          </p:cNvSpPr>
+          <p:nvPr>
+            <p:ph type="body" idx="1"/>
+          </p:nvPr>
+        </p:nvSpPr>
+        <p:spPr>
+          <a:xfrm>
+            <a:off x="685800" y="4343400"/>
+            <a:ext cx="5486400" cy="4114800"/>
+          </a:xfrm>
+          <a:prstGeom prst="rect">
+            <a:avLst/>
+          </a:prstGeom>
+          <a:noFill/>
+          <a:ln>
+            <a:noFill/>
+          </a:ln>
+        </p:spPr>
+        <p:txBody>
+          <a:bodyPr spcFirstLastPara="1" wrap="square" lIns="91425" tIns="91425" rIns="91425" bIns="91425" anchor="t" anchorCtr="0">
+            <a:noAutofit/>
+          </a:bodyPr>
+          <a:lstStyle/>
+          <a:p>
+            <a:pPr marL="0" lvl="0" indent="0" algn="l" rtl="0">
+              <a:lnSpc>
+                <a:spcPct val="100000"/>
+              </a:lnSpc>
+              <a:spcBef>
+                <a:spcPts val="0"/>
+              </a:spcBef>
+              <a:spcAft>
+                <a:spcPts val="0"/>
+              </a:spcAft>
+              <a:buSzPts val="1100"/>
+              <a:buNone/>
+            </a:pPr>
+            <a:endParaRPr/>
+          </a:p>
+        </p:txBody>
+      </p:sp>
+    </p:spTree>
+    <p:extLst>
+      <p:ext uri="{BB962C8B-B14F-4D97-AF65-F5344CB8AC3E}">
+        <p14:creationId xmlns:p14="http://schemas.microsoft.com/office/powerpoint/2010/main" val="3090974149"/>
+      </p:ext>
+    </p:extLst>
+  </p:cSld>
+  <p:clrMapOvr>
+    <a:masterClrMapping/>
+  </p:clrMapOvr>
+</p:notes>
+</file>
+
+<file path=ppt/notesSlides/notesSlide6.xml><?xml version="1.0" encoding="utf-8"?>
+<p:notes xmlns:a="http://schemas.openxmlformats.org/drawingml/2006/main" xmlns:r="http://schemas.openxmlformats.org/officeDocument/2006/relationships" xmlns:p="http://schemas.openxmlformats.org/presentationml/2006/main" showMasterSp="0" showMasterPhAnim="0">
+  <p:cSld>
+    <p:spTree>
+      <p:nvGrpSpPr>
+        <p:cNvPr id="1" name="Shape 467">
+          <a:extLst>
+            <a:ext uri="{FF2B5EF4-FFF2-40B4-BE49-F238E27FC236}">
+              <a16:creationId xmlns:a16="http://schemas.microsoft.com/office/drawing/2014/main" id="{74B698B1-BDFD-3AEB-C900-2EF1F80921C5}"/>
+            </a:ext>
+          </a:extLst>
+        </p:cNvPr>
+        <p:cNvGrpSpPr/>
+        <p:nvPr/>
+      </p:nvGrpSpPr>
+      <p:grpSpPr>
+        <a:xfrm>
+          <a:off x="0" y="0"/>
+          <a:ext cx="0" cy="0"/>
+          <a:chOff x="0" y="0"/>
+          <a:chExt cx="0" cy="0"/>
+        </a:xfrm>
+      </p:grpSpPr>
+      <p:sp>
+        <p:nvSpPr>
+          <p:cNvPr id="468" name="Google Shape;468;p17:notes">
+            <a:extLst>
+              <a:ext uri="{FF2B5EF4-FFF2-40B4-BE49-F238E27FC236}">
+                <a16:creationId xmlns:a16="http://schemas.microsoft.com/office/drawing/2014/main" id="{5A7C1F7B-8E67-7540-B4E0-759A8BBC5D1E}"/>
+              </a:ext>
+            </a:extLst>
+          </p:cNvPr>
+          <p:cNvSpPr>
+            <a:spLocks noGrp="1" noRot="1" noChangeAspect="1"/>
+          </p:cNvSpPr>
+          <p:nvPr>
+            <p:ph type="sldImg" idx="2"/>
+          </p:nvPr>
+        </p:nvSpPr>
+        <p:spPr>
+          <a:xfrm>
+            <a:off x="381000" y="685800"/>
+            <a:ext cx="6096000" cy="3429000"/>
+          </a:xfrm>
+          <a:custGeom>
+            <a:avLst/>
+            <a:gdLst/>
+            <a:ahLst/>
+            <a:cxnLst/>
+            <a:rect l="l" t="t" r="r" b="b"/>
+            <a:pathLst>
+              <a:path w="120000" h="120000" extrusionOk="0">
+                <a:moveTo>
+                  <a:pt x="0" y="0"/>
+                </a:moveTo>
+                <a:lnTo>
+                  <a:pt x="120000" y="0"/>
+                </a:lnTo>
+                <a:lnTo>
+                  <a:pt x="120000" y="120000"/>
+                </a:lnTo>
+                <a:lnTo>
+                  <a:pt x="0" y="120000"/>
+                </a:lnTo>
+                <a:close/>
+              </a:path>
+            </a:pathLst>
+          </a:custGeom>
+          <a:noFill/>
+          <a:ln w="9525" cap="flat" cmpd="sng">
+            <a:solidFill>
+              <a:srgbClr val="000000"/>
+            </a:solidFill>
+            <a:prstDash val="solid"/>
+            <a:round/>
+            <a:headEnd type="none" w="sm" len="sm"/>
+            <a:tailEnd type="none" w="sm" len="sm"/>
+          </a:ln>
+        </p:spPr>
+      </p:sp>
+      <p:sp>
+        <p:nvSpPr>
+          <p:cNvPr id="469" name="Google Shape;469;p17:notes">
+            <a:extLst>
+              <a:ext uri="{FF2B5EF4-FFF2-40B4-BE49-F238E27FC236}">
+                <a16:creationId xmlns:a16="http://schemas.microsoft.com/office/drawing/2014/main" id="{6538A9C4-2FF2-8D63-0C42-F54643121E6B}"/>
+              </a:ext>
+            </a:extLst>
+          </p:cNvPr>
+          <p:cNvSpPr txBox="1">
+            <a:spLocks noGrp="1"/>
+          </p:cNvSpPr>
+          <p:nvPr>
+            <p:ph type="body" idx="1"/>
+          </p:nvPr>
+        </p:nvSpPr>
+        <p:spPr>
+          <a:xfrm>
+            <a:off x="685800" y="4343400"/>
+            <a:ext cx="5486400" cy="4114800"/>
+          </a:xfrm>
+          <a:prstGeom prst="rect">
+            <a:avLst/>
+          </a:prstGeom>
+          <a:noFill/>
+          <a:ln>
+            <a:noFill/>
+          </a:ln>
+        </p:spPr>
+        <p:txBody>
+          <a:bodyPr spcFirstLastPara="1" wrap="square" lIns="91425" tIns="91425" rIns="91425" bIns="91425" anchor="t" anchorCtr="0">
+            <a:noAutofit/>
+          </a:bodyPr>
+          <a:lstStyle/>
+          <a:p>
+            <a:pPr marL="0" lvl="0" indent="0" algn="l" rtl="0">
+              <a:lnSpc>
+                <a:spcPct val="100000"/>
+              </a:lnSpc>
+              <a:spcBef>
+                <a:spcPts val="0"/>
+              </a:spcBef>
+              <a:spcAft>
+                <a:spcPts val="0"/>
+              </a:spcAft>
+              <a:buSzPts val="1100"/>
+              <a:buNone/>
+            </a:pPr>
+            <a:endParaRPr/>
+          </a:p>
+        </p:txBody>
+      </p:sp>
+    </p:spTree>
+    <p:extLst>
+      <p:ext uri="{BB962C8B-B14F-4D97-AF65-F5344CB8AC3E}">
+        <p14:creationId xmlns:p14="http://schemas.microsoft.com/office/powerpoint/2010/main" val="2281977140"/>
+      </p:ext>
+    </p:extLst>
+  </p:cSld>
+  <p:clrMapOvr>
+    <a:masterClrMapping/>
+  </p:clrMapOvr>
+</p:notes>
+</file>
+
+<file path=ppt/notesSlides/notesSlide7.xml><?xml version="1.0" encoding="utf-8"?>
 <p:notes xmlns:a="http://schemas.openxmlformats.org/drawingml/2006/main" xmlns:r="http://schemas.openxmlformats.org/officeDocument/2006/relationships" xmlns:p="http://schemas.openxmlformats.org/presentationml/2006/main" showMasterSp="0" showMasterPhAnim="0">
   <p:cSld>
     <p:spTree>
@@ -1230,7 +2830,7 @@
 </p:notes>
 </file>
 
-<file path=ppt/notesSlides/notesSlide3.xml><?xml version="1.0" encoding="utf-8"?>
+<file path=ppt/notesSlides/notesSlide8.xml><?xml version="1.0" encoding="utf-8"?>
 <p:notes xmlns:a="http://schemas.openxmlformats.org/drawingml/2006/main" xmlns:r="http://schemas.openxmlformats.org/officeDocument/2006/relationships" xmlns:p="http://schemas.openxmlformats.org/presentationml/2006/main" showMasterSp="0" showMasterPhAnim="0">
   <p:cSld>
     <p:spTree>
@@ -1352,7 +2952,7 @@
 </p:notes>
 </file>
 
-<file path=ppt/notesSlides/notesSlide4.xml><?xml version="1.0" encoding="utf-8"?>
+<file path=ppt/notesSlides/notesSlide9.xml><?xml version="1.0" encoding="utf-8"?>
 <p:notes xmlns:a="http://schemas.openxmlformats.org/drawingml/2006/main" xmlns:r="http://schemas.openxmlformats.org/officeDocument/2006/relationships" xmlns:p="http://schemas.openxmlformats.org/presentationml/2006/main" showMasterSp="0" showMasterPhAnim="0">
   <p:cSld>
     <p:spTree>
@@ -1423,616 +3023,6 @@
       <p:sp>
         <p:nvSpPr>
           <p:cNvPr id="481" name="Google Shape;481;p19:notes"/>
-          <p:cNvSpPr txBox="1">
-            <a:spLocks noGrp="1"/>
-          </p:cNvSpPr>
-          <p:nvPr>
-            <p:ph type="body" idx="1"/>
-          </p:nvPr>
-        </p:nvSpPr>
-        <p:spPr>
-          <a:xfrm>
-            <a:off x="685800" y="4343400"/>
-            <a:ext cx="5486400" cy="4114800"/>
-          </a:xfrm>
-          <a:prstGeom prst="rect">
-            <a:avLst/>
-          </a:prstGeom>
-          <a:noFill/>
-          <a:ln>
-            <a:noFill/>
-          </a:ln>
-        </p:spPr>
-        <p:txBody>
-          <a:bodyPr spcFirstLastPara="1" wrap="square" lIns="91425" tIns="91425" rIns="91425" bIns="91425" anchor="t" anchorCtr="0">
-            <a:noAutofit/>
-          </a:bodyPr>
-          <a:lstStyle/>
-          <a:p>
-            <a:pPr marL="0" lvl="0" indent="0" algn="l" rtl="0">
-              <a:lnSpc>
-                <a:spcPct val="100000"/>
-              </a:lnSpc>
-              <a:spcBef>
-                <a:spcPts val="0"/>
-              </a:spcBef>
-              <a:spcAft>
-                <a:spcPts val="0"/>
-              </a:spcAft>
-              <a:buSzPts val="1100"/>
-              <a:buNone/>
-            </a:pPr>
-            <a:endParaRPr/>
-          </a:p>
-        </p:txBody>
-      </p:sp>
-    </p:spTree>
-  </p:cSld>
-  <p:clrMapOvr>
-    <a:masterClrMapping/>
-  </p:clrMapOvr>
-</p:notes>
-</file>
-
-<file path=ppt/notesSlides/notesSlide5.xml><?xml version="1.0" encoding="utf-8"?>
-<p:notes xmlns:a="http://schemas.openxmlformats.org/drawingml/2006/main" xmlns:r="http://schemas.openxmlformats.org/officeDocument/2006/relationships" xmlns:p="http://schemas.openxmlformats.org/presentationml/2006/main" showMasterSp="0" showMasterPhAnim="0">
-  <p:cSld>
-    <p:spTree>
-      <p:nvGrpSpPr>
-        <p:cNvPr id="1" name="Shape 484"/>
-        <p:cNvGrpSpPr/>
-        <p:nvPr/>
-      </p:nvGrpSpPr>
-      <p:grpSpPr>
-        <a:xfrm>
-          <a:off x="0" y="0"/>
-          <a:ext cx="0" cy="0"/>
-          <a:chOff x="0" y="0"/>
-          <a:chExt cx="0" cy="0"/>
-        </a:xfrm>
-      </p:grpSpPr>
-      <p:sp>
-        <p:nvSpPr>
-          <p:cNvPr id="485" name="Google Shape;485;p20:notes"/>
-          <p:cNvSpPr>
-            <a:spLocks noGrp="1" noRot="1" noChangeAspect="1"/>
-          </p:cNvSpPr>
-          <p:nvPr>
-            <p:ph type="sldImg" idx="2"/>
-          </p:nvPr>
-        </p:nvSpPr>
-        <p:spPr>
-          <a:xfrm>
-            <a:off x="381000" y="685800"/>
-            <a:ext cx="6096000" cy="3429000"/>
-          </a:xfrm>
-          <a:custGeom>
-            <a:avLst/>
-            <a:gdLst/>
-            <a:ahLst/>
-            <a:cxnLst/>
-            <a:rect l="l" t="t" r="r" b="b"/>
-            <a:pathLst>
-              <a:path w="120000" h="120000" extrusionOk="0">
-                <a:moveTo>
-                  <a:pt x="0" y="0"/>
-                </a:moveTo>
-                <a:lnTo>
-                  <a:pt x="120000" y="0"/>
-                </a:lnTo>
-                <a:lnTo>
-                  <a:pt x="120000" y="120000"/>
-                </a:lnTo>
-                <a:lnTo>
-                  <a:pt x="0" y="120000"/>
-                </a:lnTo>
-                <a:close/>
-              </a:path>
-            </a:pathLst>
-          </a:custGeom>
-          <a:noFill/>
-          <a:ln w="9525" cap="flat" cmpd="sng">
-            <a:solidFill>
-              <a:srgbClr val="000000"/>
-            </a:solidFill>
-            <a:prstDash val="solid"/>
-            <a:round/>
-            <a:headEnd type="none" w="sm" len="sm"/>
-            <a:tailEnd type="none" w="sm" len="sm"/>
-          </a:ln>
-        </p:spPr>
-      </p:sp>
-      <p:sp>
-        <p:nvSpPr>
-          <p:cNvPr id="486" name="Google Shape;486;p20:notes"/>
-          <p:cNvSpPr txBox="1">
-            <a:spLocks noGrp="1"/>
-          </p:cNvSpPr>
-          <p:nvPr>
-            <p:ph type="body" idx="1"/>
-          </p:nvPr>
-        </p:nvSpPr>
-        <p:spPr>
-          <a:xfrm>
-            <a:off x="685800" y="4343400"/>
-            <a:ext cx="5486400" cy="4114800"/>
-          </a:xfrm>
-          <a:prstGeom prst="rect">
-            <a:avLst/>
-          </a:prstGeom>
-          <a:noFill/>
-          <a:ln>
-            <a:noFill/>
-          </a:ln>
-        </p:spPr>
-        <p:txBody>
-          <a:bodyPr spcFirstLastPara="1" wrap="square" lIns="91425" tIns="91425" rIns="91425" bIns="91425" anchor="t" anchorCtr="0">
-            <a:noAutofit/>
-          </a:bodyPr>
-          <a:lstStyle/>
-          <a:p>
-            <a:pPr marL="0" lvl="0" indent="0" algn="l" rtl="0">
-              <a:lnSpc>
-                <a:spcPct val="100000"/>
-              </a:lnSpc>
-              <a:spcBef>
-                <a:spcPts val="0"/>
-              </a:spcBef>
-              <a:spcAft>
-                <a:spcPts val="0"/>
-              </a:spcAft>
-              <a:buSzPts val="1100"/>
-              <a:buNone/>
-            </a:pPr>
-            <a:endParaRPr/>
-          </a:p>
-        </p:txBody>
-      </p:sp>
-    </p:spTree>
-  </p:cSld>
-  <p:clrMapOvr>
-    <a:masterClrMapping/>
-  </p:clrMapOvr>
-</p:notes>
-</file>
-
-<file path=ppt/notesSlides/notesSlide6.xml><?xml version="1.0" encoding="utf-8"?>
-<p:notes xmlns:a="http://schemas.openxmlformats.org/drawingml/2006/main" xmlns:r="http://schemas.openxmlformats.org/officeDocument/2006/relationships" xmlns:p="http://schemas.openxmlformats.org/presentationml/2006/main" showMasterSp="0" showMasterPhAnim="0">
-  <p:cSld>
-    <p:spTree>
-      <p:nvGrpSpPr>
-        <p:cNvPr id="1" name="Shape 490"/>
-        <p:cNvGrpSpPr/>
-        <p:nvPr/>
-      </p:nvGrpSpPr>
-      <p:grpSpPr>
-        <a:xfrm>
-          <a:off x="0" y="0"/>
-          <a:ext cx="0" cy="0"/>
-          <a:chOff x="0" y="0"/>
-          <a:chExt cx="0" cy="0"/>
-        </a:xfrm>
-      </p:grpSpPr>
-      <p:sp>
-        <p:nvSpPr>
-          <p:cNvPr id="491" name="Google Shape;491;p21:notes"/>
-          <p:cNvSpPr>
-            <a:spLocks noGrp="1" noRot="1" noChangeAspect="1"/>
-          </p:cNvSpPr>
-          <p:nvPr>
-            <p:ph type="sldImg" idx="2"/>
-          </p:nvPr>
-        </p:nvSpPr>
-        <p:spPr>
-          <a:xfrm>
-            <a:off x="381000" y="685800"/>
-            <a:ext cx="6096000" cy="3429000"/>
-          </a:xfrm>
-          <a:custGeom>
-            <a:avLst/>
-            <a:gdLst/>
-            <a:ahLst/>
-            <a:cxnLst/>
-            <a:rect l="l" t="t" r="r" b="b"/>
-            <a:pathLst>
-              <a:path w="120000" h="120000" extrusionOk="0">
-                <a:moveTo>
-                  <a:pt x="0" y="0"/>
-                </a:moveTo>
-                <a:lnTo>
-                  <a:pt x="120000" y="0"/>
-                </a:lnTo>
-                <a:lnTo>
-                  <a:pt x="120000" y="120000"/>
-                </a:lnTo>
-                <a:lnTo>
-                  <a:pt x="0" y="120000"/>
-                </a:lnTo>
-                <a:close/>
-              </a:path>
-            </a:pathLst>
-          </a:custGeom>
-          <a:noFill/>
-          <a:ln w="9525" cap="flat" cmpd="sng">
-            <a:solidFill>
-              <a:srgbClr val="000000"/>
-            </a:solidFill>
-            <a:prstDash val="solid"/>
-            <a:round/>
-            <a:headEnd type="none" w="sm" len="sm"/>
-            <a:tailEnd type="none" w="sm" len="sm"/>
-          </a:ln>
-        </p:spPr>
-      </p:sp>
-      <p:sp>
-        <p:nvSpPr>
-          <p:cNvPr id="492" name="Google Shape;492;p21:notes"/>
-          <p:cNvSpPr txBox="1">
-            <a:spLocks noGrp="1"/>
-          </p:cNvSpPr>
-          <p:nvPr>
-            <p:ph type="body" idx="1"/>
-          </p:nvPr>
-        </p:nvSpPr>
-        <p:spPr>
-          <a:xfrm>
-            <a:off x="685800" y="4343400"/>
-            <a:ext cx="5486400" cy="4114800"/>
-          </a:xfrm>
-          <a:prstGeom prst="rect">
-            <a:avLst/>
-          </a:prstGeom>
-          <a:noFill/>
-          <a:ln>
-            <a:noFill/>
-          </a:ln>
-        </p:spPr>
-        <p:txBody>
-          <a:bodyPr spcFirstLastPara="1" wrap="square" lIns="91425" tIns="91425" rIns="91425" bIns="91425" anchor="t" anchorCtr="0">
-            <a:noAutofit/>
-          </a:bodyPr>
-          <a:lstStyle/>
-          <a:p>
-            <a:pPr marL="0" lvl="0" indent="0" algn="l" rtl="0">
-              <a:lnSpc>
-                <a:spcPct val="100000"/>
-              </a:lnSpc>
-              <a:spcBef>
-                <a:spcPts val="0"/>
-              </a:spcBef>
-              <a:spcAft>
-                <a:spcPts val="0"/>
-              </a:spcAft>
-              <a:buSzPts val="1100"/>
-              <a:buNone/>
-            </a:pPr>
-            <a:endParaRPr/>
-          </a:p>
-        </p:txBody>
-      </p:sp>
-    </p:spTree>
-  </p:cSld>
-  <p:clrMapOvr>
-    <a:masterClrMapping/>
-  </p:clrMapOvr>
-</p:notes>
-</file>
-
-<file path=ppt/notesSlides/notesSlide7.xml><?xml version="1.0" encoding="utf-8"?>
-<p:notes xmlns:a="http://schemas.openxmlformats.org/drawingml/2006/main" xmlns:r="http://schemas.openxmlformats.org/officeDocument/2006/relationships" xmlns:p="http://schemas.openxmlformats.org/presentationml/2006/main" showMasterSp="0" showMasterPhAnim="0">
-  <p:cSld>
-    <p:spTree>
-      <p:nvGrpSpPr>
-        <p:cNvPr id="1" name="Shape 496"/>
-        <p:cNvGrpSpPr/>
-        <p:nvPr/>
-      </p:nvGrpSpPr>
-      <p:grpSpPr>
-        <a:xfrm>
-          <a:off x="0" y="0"/>
-          <a:ext cx="0" cy="0"/>
-          <a:chOff x="0" y="0"/>
-          <a:chExt cx="0" cy="0"/>
-        </a:xfrm>
-      </p:grpSpPr>
-      <p:sp>
-        <p:nvSpPr>
-          <p:cNvPr id="497" name="Google Shape;497;p22:notes"/>
-          <p:cNvSpPr>
-            <a:spLocks noGrp="1" noRot="1" noChangeAspect="1"/>
-          </p:cNvSpPr>
-          <p:nvPr>
-            <p:ph type="sldImg" idx="2"/>
-          </p:nvPr>
-        </p:nvSpPr>
-        <p:spPr>
-          <a:xfrm>
-            <a:off x="381000" y="685800"/>
-            <a:ext cx="6096000" cy="3429000"/>
-          </a:xfrm>
-          <a:custGeom>
-            <a:avLst/>
-            <a:gdLst/>
-            <a:ahLst/>
-            <a:cxnLst/>
-            <a:rect l="l" t="t" r="r" b="b"/>
-            <a:pathLst>
-              <a:path w="120000" h="120000" extrusionOk="0">
-                <a:moveTo>
-                  <a:pt x="0" y="0"/>
-                </a:moveTo>
-                <a:lnTo>
-                  <a:pt x="120000" y="0"/>
-                </a:lnTo>
-                <a:lnTo>
-                  <a:pt x="120000" y="120000"/>
-                </a:lnTo>
-                <a:lnTo>
-                  <a:pt x="0" y="120000"/>
-                </a:lnTo>
-                <a:close/>
-              </a:path>
-            </a:pathLst>
-          </a:custGeom>
-          <a:noFill/>
-          <a:ln w="9525" cap="flat" cmpd="sng">
-            <a:solidFill>
-              <a:srgbClr val="000000"/>
-            </a:solidFill>
-            <a:prstDash val="solid"/>
-            <a:round/>
-            <a:headEnd type="none" w="sm" len="sm"/>
-            <a:tailEnd type="none" w="sm" len="sm"/>
-          </a:ln>
-        </p:spPr>
-      </p:sp>
-      <p:sp>
-        <p:nvSpPr>
-          <p:cNvPr id="498" name="Google Shape;498;p22:notes"/>
-          <p:cNvSpPr txBox="1">
-            <a:spLocks noGrp="1"/>
-          </p:cNvSpPr>
-          <p:nvPr>
-            <p:ph type="body" idx="1"/>
-          </p:nvPr>
-        </p:nvSpPr>
-        <p:spPr>
-          <a:xfrm>
-            <a:off x="685800" y="4343400"/>
-            <a:ext cx="5486400" cy="4114800"/>
-          </a:xfrm>
-          <a:prstGeom prst="rect">
-            <a:avLst/>
-          </a:prstGeom>
-          <a:noFill/>
-          <a:ln>
-            <a:noFill/>
-          </a:ln>
-        </p:spPr>
-        <p:txBody>
-          <a:bodyPr spcFirstLastPara="1" wrap="square" lIns="91425" tIns="91425" rIns="91425" bIns="91425" anchor="t" anchorCtr="0">
-            <a:noAutofit/>
-          </a:bodyPr>
-          <a:lstStyle/>
-          <a:p>
-            <a:pPr marL="0" lvl="0" indent="0" algn="l" rtl="0">
-              <a:lnSpc>
-                <a:spcPct val="100000"/>
-              </a:lnSpc>
-              <a:spcBef>
-                <a:spcPts val="0"/>
-              </a:spcBef>
-              <a:spcAft>
-                <a:spcPts val="0"/>
-              </a:spcAft>
-              <a:buSzPts val="1100"/>
-              <a:buNone/>
-            </a:pPr>
-            <a:endParaRPr/>
-          </a:p>
-        </p:txBody>
-      </p:sp>
-    </p:spTree>
-  </p:cSld>
-  <p:clrMapOvr>
-    <a:masterClrMapping/>
-  </p:clrMapOvr>
-</p:notes>
-</file>
-
-<file path=ppt/notesSlides/notesSlide8.xml><?xml version="1.0" encoding="utf-8"?>
-<p:notes xmlns:a="http://schemas.openxmlformats.org/drawingml/2006/main" xmlns:r="http://schemas.openxmlformats.org/officeDocument/2006/relationships" xmlns:p="http://schemas.openxmlformats.org/presentationml/2006/main" showMasterSp="0" showMasterPhAnim="0">
-  <p:cSld>
-    <p:spTree>
-      <p:nvGrpSpPr>
-        <p:cNvPr id="1" name="Shape 502"/>
-        <p:cNvGrpSpPr/>
-        <p:nvPr/>
-      </p:nvGrpSpPr>
-      <p:grpSpPr>
-        <a:xfrm>
-          <a:off x="0" y="0"/>
-          <a:ext cx="0" cy="0"/>
-          <a:chOff x="0" y="0"/>
-          <a:chExt cx="0" cy="0"/>
-        </a:xfrm>
-      </p:grpSpPr>
-      <p:sp>
-        <p:nvSpPr>
-          <p:cNvPr id="503" name="Google Shape;503;p23:notes"/>
-          <p:cNvSpPr>
-            <a:spLocks noGrp="1" noRot="1" noChangeAspect="1"/>
-          </p:cNvSpPr>
-          <p:nvPr>
-            <p:ph type="sldImg" idx="2"/>
-          </p:nvPr>
-        </p:nvSpPr>
-        <p:spPr>
-          <a:xfrm>
-            <a:off x="381000" y="685800"/>
-            <a:ext cx="6096000" cy="3429000"/>
-          </a:xfrm>
-          <a:custGeom>
-            <a:avLst/>
-            <a:gdLst/>
-            <a:ahLst/>
-            <a:cxnLst/>
-            <a:rect l="l" t="t" r="r" b="b"/>
-            <a:pathLst>
-              <a:path w="120000" h="120000" extrusionOk="0">
-                <a:moveTo>
-                  <a:pt x="0" y="0"/>
-                </a:moveTo>
-                <a:lnTo>
-                  <a:pt x="120000" y="0"/>
-                </a:lnTo>
-                <a:lnTo>
-                  <a:pt x="120000" y="120000"/>
-                </a:lnTo>
-                <a:lnTo>
-                  <a:pt x="0" y="120000"/>
-                </a:lnTo>
-                <a:close/>
-              </a:path>
-            </a:pathLst>
-          </a:custGeom>
-          <a:noFill/>
-          <a:ln w="9525" cap="flat" cmpd="sng">
-            <a:solidFill>
-              <a:srgbClr val="000000"/>
-            </a:solidFill>
-            <a:prstDash val="solid"/>
-            <a:round/>
-            <a:headEnd type="none" w="sm" len="sm"/>
-            <a:tailEnd type="none" w="sm" len="sm"/>
-          </a:ln>
-        </p:spPr>
-      </p:sp>
-      <p:sp>
-        <p:nvSpPr>
-          <p:cNvPr id="504" name="Google Shape;504;p23:notes"/>
-          <p:cNvSpPr txBox="1">
-            <a:spLocks noGrp="1"/>
-          </p:cNvSpPr>
-          <p:nvPr>
-            <p:ph type="body" idx="1"/>
-          </p:nvPr>
-        </p:nvSpPr>
-        <p:spPr>
-          <a:xfrm>
-            <a:off x="685800" y="4343400"/>
-            <a:ext cx="5486400" cy="4114800"/>
-          </a:xfrm>
-          <a:prstGeom prst="rect">
-            <a:avLst/>
-          </a:prstGeom>
-          <a:noFill/>
-          <a:ln>
-            <a:noFill/>
-          </a:ln>
-        </p:spPr>
-        <p:txBody>
-          <a:bodyPr spcFirstLastPara="1" wrap="square" lIns="91425" tIns="91425" rIns="91425" bIns="91425" anchor="t" anchorCtr="0">
-            <a:noAutofit/>
-          </a:bodyPr>
-          <a:lstStyle/>
-          <a:p>
-            <a:pPr marL="0" lvl="0" indent="0" algn="l" rtl="0">
-              <a:lnSpc>
-                <a:spcPct val="100000"/>
-              </a:lnSpc>
-              <a:spcBef>
-                <a:spcPts val="0"/>
-              </a:spcBef>
-              <a:spcAft>
-                <a:spcPts val="0"/>
-              </a:spcAft>
-              <a:buSzPts val="1100"/>
-              <a:buNone/>
-            </a:pPr>
-            <a:endParaRPr/>
-          </a:p>
-        </p:txBody>
-      </p:sp>
-    </p:spTree>
-  </p:cSld>
-  <p:clrMapOvr>
-    <a:masterClrMapping/>
-  </p:clrMapOvr>
-</p:notes>
-</file>
-
-<file path=ppt/notesSlides/notesSlide9.xml><?xml version="1.0" encoding="utf-8"?>
-<p:notes xmlns:a="http://schemas.openxmlformats.org/drawingml/2006/main" xmlns:r="http://schemas.openxmlformats.org/officeDocument/2006/relationships" xmlns:p="http://schemas.openxmlformats.org/presentationml/2006/main" showMasterSp="0" showMasterPhAnim="0">
-  <p:cSld>
-    <p:spTree>
-      <p:nvGrpSpPr>
-        <p:cNvPr id="1" name="Shape 508"/>
-        <p:cNvGrpSpPr/>
-        <p:nvPr/>
-      </p:nvGrpSpPr>
-      <p:grpSpPr>
-        <a:xfrm>
-          <a:off x="0" y="0"/>
-          <a:ext cx="0" cy="0"/>
-          <a:chOff x="0" y="0"/>
-          <a:chExt cx="0" cy="0"/>
-        </a:xfrm>
-      </p:grpSpPr>
-      <p:sp>
-        <p:nvSpPr>
-          <p:cNvPr id="509" name="Google Shape;509;p24:notes"/>
-          <p:cNvSpPr>
-            <a:spLocks noGrp="1" noRot="1" noChangeAspect="1"/>
-          </p:cNvSpPr>
-          <p:nvPr>
-            <p:ph type="sldImg" idx="2"/>
-          </p:nvPr>
-        </p:nvSpPr>
-        <p:spPr>
-          <a:xfrm>
-            <a:off x="381000" y="685800"/>
-            <a:ext cx="6096000" cy="3429000"/>
-          </a:xfrm>
-          <a:custGeom>
-            <a:avLst/>
-            <a:gdLst/>
-            <a:ahLst/>
-            <a:cxnLst/>
-            <a:rect l="l" t="t" r="r" b="b"/>
-            <a:pathLst>
-              <a:path w="120000" h="120000" extrusionOk="0">
-                <a:moveTo>
-                  <a:pt x="0" y="0"/>
-                </a:moveTo>
-                <a:lnTo>
-                  <a:pt x="120000" y="0"/>
-                </a:lnTo>
-                <a:lnTo>
-                  <a:pt x="120000" y="120000"/>
-                </a:lnTo>
-                <a:lnTo>
-                  <a:pt x="0" y="120000"/>
-                </a:lnTo>
-                <a:close/>
-              </a:path>
-            </a:pathLst>
-          </a:custGeom>
-          <a:noFill/>
-          <a:ln w="9525" cap="flat" cmpd="sng">
-            <a:solidFill>
-              <a:srgbClr val="000000"/>
-            </a:solidFill>
-            <a:prstDash val="solid"/>
-            <a:round/>
-            <a:headEnd type="none" w="sm" len="sm"/>
-            <a:tailEnd type="none" w="sm" len="sm"/>
-          </a:ln>
-        </p:spPr>
-      </p:sp>
-      <p:sp>
-        <p:nvSpPr>
-          <p:cNvPr id="510" name="Google Shape;510;p24:notes"/>
           <p:cNvSpPr txBox="1">
             <a:spLocks noGrp="1"/>
           </p:cNvSpPr>
@@ -16098,106 +17088,6 @@
               <a:rPr lang="en"/>
               <a:t>‹#›</a:t>
             </a:fld>
-            <a:endParaRPr/>
-          </a:p>
-        </p:txBody>
-      </p:sp>
-      <p:sp>
-        <p:nvSpPr>
-          <p:cNvPr id="281" name="Google Shape;281;p21"/>
-          <p:cNvSpPr/>
-          <p:nvPr/>
-        </p:nvSpPr>
-        <p:spPr>
-          <a:xfrm>
-            <a:off x="1040130" y="4970376"/>
-            <a:ext cx="7063740" cy="173124"/>
-          </a:xfrm>
-          <a:prstGeom prst="rect">
-            <a:avLst/>
-          </a:prstGeom>
-          <a:noFill/>
-          <a:ln>
-            <a:noFill/>
-          </a:ln>
-        </p:spPr>
-        <p:txBody>
-          <a:bodyPr spcFirstLastPara="1" wrap="square" lIns="0" tIns="45700" rIns="0" bIns="45700" anchor="b" anchorCtr="0">
-            <a:noAutofit/>
-          </a:bodyPr>
-          <a:lstStyle/>
-          <a:p>
-            <a:pPr marL="0" marR="0" lvl="0" indent="0" algn="ctr" rtl="0">
-              <a:spcBef>
-                <a:spcPts val="0"/>
-              </a:spcBef>
-              <a:spcAft>
-                <a:spcPts val="0"/>
-              </a:spcAft>
-              <a:buNone/>
-            </a:pPr>
-            <a:r>
-              <a:rPr lang="en" sz="525" b="1" i="0" u="none" strike="noStrike" cap="none">
-                <a:solidFill>
-                  <a:schemeClr val="lt1"/>
-                </a:solidFill>
-                <a:latin typeface="Arial"/>
-                <a:ea typeface="Arial"/>
-                <a:cs typeface="Arial"/>
-                <a:sym typeface="Arial"/>
-              </a:rPr>
-              <a:t>EDIT CONTROL STATEMENT UNDER &gt; VIEW &gt; SLIDE MASTER &gt; SCROLL TO TOP &gt; CHANGE HEADER AND FOOTER</a:t>
-            </a:r>
-            <a:endParaRPr/>
-          </a:p>
-        </p:txBody>
-      </p:sp>
-      <p:sp>
-        <p:nvSpPr>
-          <p:cNvPr id="282" name="Google Shape;282;p21"/>
-          <p:cNvSpPr/>
-          <p:nvPr/>
-        </p:nvSpPr>
-        <p:spPr>
-          <a:xfrm>
-            <a:off x="1040130" y="0"/>
-            <a:ext cx="7063740" cy="173124"/>
-          </a:xfrm>
-          <a:prstGeom prst="rect">
-            <a:avLst/>
-          </a:prstGeom>
-          <a:noFill/>
-          <a:ln>
-            <a:noFill/>
-          </a:ln>
-        </p:spPr>
-        <p:txBody>
-          <a:bodyPr spcFirstLastPara="1" wrap="square" lIns="91425" tIns="45700" rIns="91425" bIns="45700" anchor="t" anchorCtr="0">
-            <a:noAutofit/>
-          </a:bodyPr>
-          <a:lstStyle/>
-          <a:p>
-            <a:pPr marL="0" marR="0" lvl="0" indent="0" algn="ctr" rtl="0">
-              <a:spcBef>
-                <a:spcPts val="0"/>
-              </a:spcBef>
-              <a:spcAft>
-                <a:spcPts val="0"/>
-              </a:spcAft>
-              <a:buNone/>
-            </a:pPr>
-            <a:r>
-              <a:rPr lang="en" sz="525" b="1" i="0" u="none" strike="noStrike" cap="none">
-                <a:solidFill>
-                  <a:schemeClr val="lt1"/>
-                </a:solidFill>
-                <a:latin typeface="Arial"/>
-                <a:ea typeface="Arial"/>
-                <a:cs typeface="Arial"/>
-                <a:sym typeface="Arial"/>
-              </a:rPr>
-              <a:t>EDIT CONTROL STATEMENT UNDER &gt; VIEW &gt; SLIDE MASTER &gt; SCROLL TO TOP &gt; CHANGE HEADER AND FOOTER</a:t>
-            </a:r>
             <a:endParaRPr/>
           </a:p>
         </p:txBody>
@@ -30487,723 +31377,6 @@
 </file>
 
 <file path=ppt/slideLayouts/slideLayout32.xml><?xml version="1.0" encoding="utf-8"?>
-<p:sldLayout xmlns:a="http://schemas.openxmlformats.org/drawingml/2006/main" xmlns:r="http://schemas.openxmlformats.org/officeDocument/2006/relationships" xmlns:p="http://schemas.openxmlformats.org/presentationml/2006/main" matchingName="Title and body" type="tx">
-  <p:cSld name="TITLE_AND_BODY">
-    <p:spTree>
-      <p:nvGrpSpPr>
-        <p:cNvPr id="1" name="Shape 350"/>
-        <p:cNvGrpSpPr/>
-        <p:nvPr/>
-      </p:nvGrpSpPr>
-      <p:grpSpPr>
-        <a:xfrm>
-          <a:off x="0" y="0"/>
-          <a:ext cx="0" cy="0"/>
-          <a:chOff x="0" y="0"/>
-          <a:chExt cx="0" cy="0"/>
-        </a:xfrm>
-      </p:grpSpPr>
-      <p:sp>
-        <p:nvSpPr>
-          <p:cNvPr id="351" name="Google Shape;351;p35"/>
-          <p:cNvSpPr txBox="1">
-            <a:spLocks noGrp="1"/>
-          </p:cNvSpPr>
-          <p:nvPr>
-            <p:ph type="title"/>
-          </p:nvPr>
-        </p:nvSpPr>
-        <p:spPr>
-          <a:xfrm>
-            <a:off x="311725" y="500925"/>
-            <a:ext cx="3706500" cy="2508900"/>
-          </a:xfrm>
-          <a:prstGeom prst="rect">
-            <a:avLst/>
-          </a:prstGeom>
-          <a:noFill/>
-          <a:ln>
-            <a:noFill/>
-          </a:ln>
-        </p:spPr>
-        <p:txBody>
-          <a:bodyPr spcFirstLastPara="1" wrap="square" lIns="91425" tIns="91425" rIns="91425" bIns="91425" anchor="t" anchorCtr="0">
-            <a:normAutofit/>
-          </a:bodyPr>
-          <a:lstStyle>
-            <a:lvl1pPr lvl="0" algn="l">
-              <a:lnSpc>
-                <a:spcPct val="100000"/>
-              </a:lnSpc>
-              <a:spcBef>
-                <a:spcPts val="0"/>
-              </a:spcBef>
-              <a:spcAft>
-                <a:spcPts val="0"/>
-              </a:spcAft>
-              <a:buClr>
-                <a:schemeClr val="lt1"/>
-              </a:buClr>
-              <a:buSzPts val="2800"/>
-              <a:buFont typeface="Arial"/>
-              <a:buNone/>
-              <a:defRPr>
-                <a:solidFill>
-                  <a:schemeClr val="lt1"/>
-                </a:solidFill>
-              </a:defRPr>
-            </a:lvl1pPr>
-            <a:lvl2pPr lvl="1" algn="l">
-              <a:lnSpc>
-                <a:spcPct val="100000"/>
-              </a:lnSpc>
-              <a:spcBef>
-                <a:spcPts val="0"/>
-              </a:spcBef>
-              <a:spcAft>
-                <a:spcPts val="0"/>
-              </a:spcAft>
-              <a:buClr>
-                <a:schemeClr val="lt1"/>
-              </a:buClr>
-              <a:buSzPts val="2800"/>
-              <a:buNone/>
-              <a:defRPr>
-                <a:solidFill>
-                  <a:schemeClr val="lt1"/>
-                </a:solidFill>
-              </a:defRPr>
-            </a:lvl2pPr>
-            <a:lvl3pPr lvl="2" algn="l">
-              <a:lnSpc>
-                <a:spcPct val="100000"/>
-              </a:lnSpc>
-              <a:spcBef>
-                <a:spcPts val="0"/>
-              </a:spcBef>
-              <a:spcAft>
-                <a:spcPts val="0"/>
-              </a:spcAft>
-              <a:buClr>
-                <a:schemeClr val="lt1"/>
-              </a:buClr>
-              <a:buSzPts val="2800"/>
-              <a:buNone/>
-              <a:defRPr>
-                <a:solidFill>
-                  <a:schemeClr val="lt1"/>
-                </a:solidFill>
-              </a:defRPr>
-            </a:lvl3pPr>
-            <a:lvl4pPr lvl="3" algn="l">
-              <a:lnSpc>
-                <a:spcPct val="100000"/>
-              </a:lnSpc>
-              <a:spcBef>
-                <a:spcPts val="0"/>
-              </a:spcBef>
-              <a:spcAft>
-                <a:spcPts val="0"/>
-              </a:spcAft>
-              <a:buClr>
-                <a:schemeClr val="lt1"/>
-              </a:buClr>
-              <a:buSzPts val="2800"/>
-              <a:buNone/>
-              <a:defRPr>
-                <a:solidFill>
-                  <a:schemeClr val="lt1"/>
-                </a:solidFill>
-              </a:defRPr>
-            </a:lvl4pPr>
-            <a:lvl5pPr lvl="4" algn="l">
-              <a:lnSpc>
-                <a:spcPct val="100000"/>
-              </a:lnSpc>
-              <a:spcBef>
-                <a:spcPts val="0"/>
-              </a:spcBef>
-              <a:spcAft>
-                <a:spcPts val="0"/>
-              </a:spcAft>
-              <a:buClr>
-                <a:schemeClr val="lt1"/>
-              </a:buClr>
-              <a:buSzPts val="2800"/>
-              <a:buNone/>
-              <a:defRPr>
-                <a:solidFill>
-                  <a:schemeClr val="lt1"/>
-                </a:solidFill>
-              </a:defRPr>
-            </a:lvl5pPr>
-            <a:lvl6pPr lvl="5" algn="l">
-              <a:lnSpc>
-                <a:spcPct val="100000"/>
-              </a:lnSpc>
-              <a:spcBef>
-                <a:spcPts val="0"/>
-              </a:spcBef>
-              <a:spcAft>
-                <a:spcPts val="0"/>
-              </a:spcAft>
-              <a:buClr>
-                <a:schemeClr val="lt1"/>
-              </a:buClr>
-              <a:buSzPts val="2800"/>
-              <a:buNone/>
-              <a:defRPr>
-                <a:solidFill>
-                  <a:schemeClr val="lt1"/>
-                </a:solidFill>
-              </a:defRPr>
-            </a:lvl6pPr>
-            <a:lvl7pPr lvl="6" algn="l">
-              <a:lnSpc>
-                <a:spcPct val="100000"/>
-              </a:lnSpc>
-              <a:spcBef>
-                <a:spcPts val="0"/>
-              </a:spcBef>
-              <a:spcAft>
-                <a:spcPts val="0"/>
-              </a:spcAft>
-              <a:buClr>
-                <a:schemeClr val="lt1"/>
-              </a:buClr>
-              <a:buSzPts val="2800"/>
-              <a:buNone/>
-              <a:defRPr>
-                <a:solidFill>
-                  <a:schemeClr val="lt1"/>
-                </a:solidFill>
-              </a:defRPr>
-            </a:lvl7pPr>
-            <a:lvl8pPr lvl="7" algn="l">
-              <a:lnSpc>
-                <a:spcPct val="100000"/>
-              </a:lnSpc>
-              <a:spcBef>
-                <a:spcPts val="0"/>
-              </a:spcBef>
-              <a:spcAft>
-                <a:spcPts val="0"/>
-              </a:spcAft>
-              <a:buClr>
-                <a:schemeClr val="lt1"/>
-              </a:buClr>
-              <a:buSzPts val="2800"/>
-              <a:buNone/>
-              <a:defRPr>
-                <a:solidFill>
-                  <a:schemeClr val="lt1"/>
-                </a:solidFill>
-              </a:defRPr>
-            </a:lvl8pPr>
-            <a:lvl9pPr lvl="8" algn="l">
-              <a:lnSpc>
-                <a:spcPct val="100000"/>
-              </a:lnSpc>
-              <a:spcBef>
-                <a:spcPts val="0"/>
-              </a:spcBef>
-              <a:spcAft>
-                <a:spcPts val="0"/>
-              </a:spcAft>
-              <a:buClr>
-                <a:schemeClr val="lt1"/>
-              </a:buClr>
-              <a:buSzPts val="2800"/>
-              <a:buNone/>
-              <a:defRPr>
-                <a:solidFill>
-                  <a:schemeClr val="lt1"/>
-                </a:solidFill>
-              </a:defRPr>
-            </a:lvl9pPr>
-          </a:lstStyle>
-          <a:p>
-            <a:endParaRPr/>
-          </a:p>
-        </p:txBody>
-      </p:sp>
-      <p:sp>
-        <p:nvSpPr>
-          <p:cNvPr id="352" name="Google Shape;352;p35"/>
-          <p:cNvSpPr txBox="1">
-            <a:spLocks noGrp="1"/>
-          </p:cNvSpPr>
-          <p:nvPr>
-            <p:ph type="body" idx="1"/>
-          </p:nvPr>
-        </p:nvSpPr>
-        <p:spPr>
-          <a:xfrm>
-            <a:off x="4644675" y="500925"/>
-            <a:ext cx="4166400" cy="4098600"/>
-          </a:xfrm>
-          <a:prstGeom prst="rect">
-            <a:avLst/>
-          </a:prstGeom>
-          <a:noFill/>
-          <a:ln>
-            <a:noFill/>
-          </a:ln>
-        </p:spPr>
-        <p:txBody>
-          <a:bodyPr spcFirstLastPara="1" wrap="square" lIns="91425" tIns="91425" rIns="91425" bIns="91425" anchor="t" anchorCtr="0">
-            <a:normAutofit/>
-          </a:bodyPr>
-          <a:lstStyle>
-            <a:lvl1pPr marL="457200" lvl="0" indent="-311150" algn="l">
-              <a:lnSpc>
-                <a:spcPct val="115000"/>
-              </a:lnSpc>
-              <a:spcBef>
-                <a:spcPts val="0"/>
-              </a:spcBef>
-              <a:spcAft>
-                <a:spcPts val="0"/>
-              </a:spcAft>
-              <a:buClr>
-                <a:schemeClr val="dk1"/>
-              </a:buClr>
-              <a:buSzPts val="1300"/>
-              <a:buChar char="●"/>
-              <a:defRPr/>
-            </a:lvl1pPr>
-            <a:lvl2pPr marL="914400" lvl="1" indent="-298450" algn="l">
-              <a:lnSpc>
-                <a:spcPct val="115000"/>
-              </a:lnSpc>
-              <a:spcBef>
-                <a:spcPts val="0"/>
-              </a:spcBef>
-              <a:spcAft>
-                <a:spcPts val="0"/>
-              </a:spcAft>
-              <a:buClr>
-                <a:schemeClr val="dk1"/>
-              </a:buClr>
-              <a:buSzPts val="1100"/>
-              <a:buChar char="○"/>
-              <a:defRPr/>
-            </a:lvl2pPr>
-            <a:lvl3pPr marL="1371600" lvl="2" indent="-298450" algn="l">
-              <a:lnSpc>
-                <a:spcPct val="115000"/>
-              </a:lnSpc>
-              <a:spcBef>
-                <a:spcPts val="0"/>
-              </a:spcBef>
-              <a:spcAft>
-                <a:spcPts val="0"/>
-              </a:spcAft>
-              <a:buClr>
-                <a:schemeClr val="dk1"/>
-              </a:buClr>
-              <a:buSzPts val="1100"/>
-              <a:buChar char="■"/>
-              <a:defRPr/>
-            </a:lvl3pPr>
-            <a:lvl4pPr marL="1828800" lvl="3" indent="-298450" algn="l">
-              <a:lnSpc>
-                <a:spcPct val="115000"/>
-              </a:lnSpc>
-              <a:spcBef>
-                <a:spcPts val="0"/>
-              </a:spcBef>
-              <a:spcAft>
-                <a:spcPts val="0"/>
-              </a:spcAft>
-              <a:buClr>
-                <a:schemeClr val="dk1"/>
-              </a:buClr>
-              <a:buSzPts val="1100"/>
-              <a:buChar char="●"/>
-              <a:defRPr/>
-            </a:lvl4pPr>
-            <a:lvl5pPr marL="2286000" lvl="4" indent="-298450" algn="l">
-              <a:lnSpc>
-                <a:spcPct val="115000"/>
-              </a:lnSpc>
-              <a:spcBef>
-                <a:spcPts val="0"/>
-              </a:spcBef>
-              <a:spcAft>
-                <a:spcPts val="0"/>
-              </a:spcAft>
-              <a:buClr>
-                <a:schemeClr val="dk1"/>
-              </a:buClr>
-              <a:buSzPts val="1100"/>
-              <a:buChar char="○"/>
-              <a:defRPr/>
-            </a:lvl5pPr>
-            <a:lvl6pPr marL="2743200" lvl="5" indent="-298450" algn="l">
-              <a:lnSpc>
-                <a:spcPct val="115000"/>
-              </a:lnSpc>
-              <a:spcBef>
-                <a:spcPts val="0"/>
-              </a:spcBef>
-              <a:spcAft>
-                <a:spcPts val="0"/>
-              </a:spcAft>
-              <a:buClr>
-                <a:schemeClr val="dk1"/>
-              </a:buClr>
-              <a:buSzPts val="1100"/>
-              <a:buChar char="■"/>
-              <a:defRPr/>
-            </a:lvl6pPr>
-            <a:lvl7pPr marL="3200400" lvl="6" indent="-298450" algn="l">
-              <a:lnSpc>
-                <a:spcPct val="115000"/>
-              </a:lnSpc>
-              <a:spcBef>
-                <a:spcPts val="0"/>
-              </a:spcBef>
-              <a:spcAft>
-                <a:spcPts val="0"/>
-              </a:spcAft>
-              <a:buClr>
-                <a:schemeClr val="dk1"/>
-              </a:buClr>
-              <a:buSzPts val="1100"/>
-              <a:buChar char="●"/>
-              <a:defRPr/>
-            </a:lvl7pPr>
-            <a:lvl8pPr marL="3657600" lvl="7" indent="-298450" algn="l">
-              <a:lnSpc>
-                <a:spcPct val="115000"/>
-              </a:lnSpc>
-              <a:spcBef>
-                <a:spcPts val="0"/>
-              </a:spcBef>
-              <a:spcAft>
-                <a:spcPts val="0"/>
-              </a:spcAft>
-              <a:buClr>
-                <a:schemeClr val="dk1"/>
-              </a:buClr>
-              <a:buSzPts val="1100"/>
-              <a:buChar char="○"/>
-              <a:defRPr/>
-            </a:lvl8pPr>
-            <a:lvl9pPr marL="4114800" lvl="8" indent="-298450" algn="l">
-              <a:lnSpc>
-                <a:spcPct val="115000"/>
-              </a:lnSpc>
-              <a:spcBef>
-                <a:spcPts val="0"/>
-              </a:spcBef>
-              <a:spcAft>
-                <a:spcPts val="0"/>
-              </a:spcAft>
-              <a:buClr>
-                <a:schemeClr val="dk1"/>
-              </a:buClr>
-              <a:buSzPts val="1100"/>
-              <a:buChar char="■"/>
-              <a:defRPr/>
-            </a:lvl9pPr>
-          </a:lstStyle>
-          <a:p>
-            <a:endParaRPr/>
-          </a:p>
-        </p:txBody>
-      </p:sp>
-      <p:sp>
-        <p:nvSpPr>
-          <p:cNvPr id="353" name="Google Shape;353;p35"/>
-          <p:cNvSpPr txBox="1">
-            <a:spLocks noGrp="1"/>
-          </p:cNvSpPr>
-          <p:nvPr>
-            <p:ph type="sldNum" idx="12"/>
-          </p:nvPr>
-        </p:nvSpPr>
-        <p:spPr>
-          <a:xfrm>
-            <a:off x="8472458" y="4663217"/>
-            <a:ext cx="548700" cy="393600"/>
-          </a:xfrm>
-          <a:prstGeom prst="rect">
-            <a:avLst/>
-          </a:prstGeom>
-          <a:noFill/>
-          <a:ln>
-            <a:noFill/>
-          </a:ln>
-        </p:spPr>
-        <p:txBody>
-          <a:bodyPr spcFirstLastPara="1" wrap="square" lIns="91425" tIns="91425" rIns="91425" bIns="91425" anchor="ctr" anchorCtr="0">
-            <a:normAutofit/>
-          </a:bodyPr>
-          <a:lstStyle>
-            <a:lvl1pPr marL="0" marR="0" lvl="0" indent="0" algn="r">
-              <a:lnSpc>
-                <a:spcPct val="100000"/>
-              </a:lnSpc>
-              <a:spcBef>
-                <a:spcPts val="0"/>
-              </a:spcBef>
-              <a:spcAft>
-                <a:spcPts val="0"/>
-              </a:spcAft>
-              <a:buClr>
-                <a:srgbClr val="000000"/>
-              </a:buClr>
-              <a:buSzPts val="1000"/>
-              <a:buFont typeface="Arial"/>
-              <a:buNone/>
-              <a:defRPr sz="1000" b="0" i="0" u="none" strike="noStrike" cap="none">
-                <a:solidFill>
-                  <a:schemeClr val="dk2"/>
-                </a:solidFill>
-                <a:latin typeface="Roboto"/>
-                <a:ea typeface="Roboto"/>
-                <a:cs typeface="Roboto"/>
-                <a:sym typeface="Roboto"/>
-              </a:defRPr>
-            </a:lvl1pPr>
-            <a:lvl2pPr marL="0" marR="0" lvl="1" indent="0" algn="r">
-              <a:lnSpc>
-                <a:spcPct val="100000"/>
-              </a:lnSpc>
-              <a:spcBef>
-                <a:spcPts val="0"/>
-              </a:spcBef>
-              <a:spcAft>
-                <a:spcPts val="0"/>
-              </a:spcAft>
-              <a:buClr>
-                <a:srgbClr val="000000"/>
-              </a:buClr>
-              <a:buSzPts val="1000"/>
-              <a:buFont typeface="Arial"/>
-              <a:buNone/>
-              <a:defRPr sz="1000" b="0" i="0" u="none" strike="noStrike" cap="none">
-                <a:solidFill>
-                  <a:schemeClr val="dk2"/>
-                </a:solidFill>
-                <a:latin typeface="Roboto"/>
-                <a:ea typeface="Roboto"/>
-                <a:cs typeface="Roboto"/>
-                <a:sym typeface="Roboto"/>
-              </a:defRPr>
-            </a:lvl2pPr>
-            <a:lvl3pPr marL="0" marR="0" lvl="2" indent="0" algn="r">
-              <a:lnSpc>
-                <a:spcPct val="100000"/>
-              </a:lnSpc>
-              <a:spcBef>
-                <a:spcPts val="0"/>
-              </a:spcBef>
-              <a:spcAft>
-                <a:spcPts val="0"/>
-              </a:spcAft>
-              <a:buClr>
-                <a:srgbClr val="000000"/>
-              </a:buClr>
-              <a:buSzPts val="1000"/>
-              <a:buFont typeface="Arial"/>
-              <a:buNone/>
-              <a:defRPr sz="1000" b="0" i="0" u="none" strike="noStrike" cap="none">
-                <a:solidFill>
-                  <a:schemeClr val="dk2"/>
-                </a:solidFill>
-                <a:latin typeface="Roboto"/>
-                <a:ea typeface="Roboto"/>
-                <a:cs typeface="Roboto"/>
-                <a:sym typeface="Roboto"/>
-              </a:defRPr>
-            </a:lvl3pPr>
-            <a:lvl4pPr marL="0" marR="0" lvl="3" indent="0" algn="r">
-              <a:lnSpc>
-                <a:spcPct val="100000"/>
-              </a:lnSpc>
-              <a:spcBef>
-                <a:spcPts val="0"/>
-              </a:spcBef>
-              <a:spcAft>
-                <a:spcPts val="0"/>
-              </a:spcAft>
-              <a:buClr>
-                <a:srgbClr val="000000"/>
-              </a:buClr>
-              <a:buSzPts val="1000"/>
-              <a:buFont typeface="Arial"/>
-              <a:buNone/>
-              <a:defRPr sz="1000" b="0" i="0" u="none" strike="noStrike" cap="none">
-                <a:solidFill>
-                  <a:schemeClr val="dk2"/>
-                </a:solidFill>
-                <a:latin typeface="Roboto"/>
-                <a:ea typeface="Roboto"/>
-                <a:cs typeface="Roboto"/>
-                <a:sym typeface="Roboto"/>
-              </a:defRPr>
-            </a:lvl4pPr>
-            <a:lvl5pPr marL="0" marR="0" lvl="4" indent="0" algn="r">
-              <a:lnSpc>
-                <a:spcPct val="100000"/>
-              </a:lnSpc>
-              <a:spcBef>
-                <a:spcPts val="0"/>
-              </a:spcBef>
-              <a:spcAft>
-                <a:spcPts val="0"/>
-              </a:spcAft>
-              <a:buClr>
-                <a:srgbClr val="000000"/>
-              </a:buClr>
-              <a:buSzPts val="1000"/>
-              <a:buFont typeface="Arial"/>
-              <a:buNone/>
-              <a:defRPr sz="1000" b="0" i="0" u="none" strike="noStrike" cap="none">
-                <a:solidFill>
-                  <a:schemeClr val="dk2"/>
-                </a:solidFill>
-                <a:latin typeface="Roboto"/>
-                <a:ea typeface="Roboto"/>
-                <a:cs typeface="Roboto"/>
-                <a:sym typeface="Roboto"/>
-              </a:defRPr>
-            </a:lvl5pPr>
-            <a:lvl6pPr marL="0" marR="0" lvl="5" indent="0" algn="r">
-              <a:lnSpc>
-                <a:spcPct val="100000"/>
-              </a:lnSpc>
-              <a:spcBef>
-                <a:spcPts val="0"/>
-              </a:spcBef>
-              <a:spcAft>
-                <a:spcPts val="0"/>
-              </a:spcAft>
-              <a:buClr>
-                <a:srgbClr val="000000"/>
-              </a:buClr>
-              <a:buSzPts val="1000"/>
-              <a:buFont typeface="Arial"/>
-              <a:buNone/>
-              <a:defRPr sz="1000" b="0" i="0" u="none" strike="noStrike" cap="none">
-                <a:solidFill>
-                  <a:schemeClr val="dk2"/>
-                </a:solidFill>
-                <a:latin typeface="Roboto"/>
-                <a:ea typeface="Roboto"/>
-                <a:cs typeface="Roboto"/>
-                <a:sym typeface="Roboto"/>
-              </a:defRPr>
-            </a:lvl6pPr>
-            <a:lvl7pPr marL="0" marR="0" lvl="6" indent="0" algn="r">
-              <a:lnSpc>
-                <a:spcPct val="100000"/>
-              </a:lnSpc>
-              <a:spcBef>
-                <a:spcPts val="0"/>
-              </a:spcBef>
-              <a:spcAft>
-                <a:spcPts val="0"/>
-              </a:spcAft>
-              <a:buClr>
-                <a:srgbClr val="000000"/>
-              </a:buClr>
-              <a:buSzPts val="1000"/>
-              <a:buFont typeface="Arial"/>
-              <a:buNone/>
-              <a:defRPr sz="1000" b="0" i="0" u="none" strike="noStrike" cap="none">
-                <a:solidFill>
-                  <a:schemeClr val="dk2"/>
-                </a:solidFill>
-                <a:latin typeface="Roboto"/>
-                <a:ea typeface="Roboto"/>
-                <a:cs typeface="Roboto"/>
-                <a:sym typeface="Roboto"/>
-              </a:defRPr>
-            </a:lvl7pPr>
-            <a:lvl8pPr marL="0" marR="0" lvl="7" indent="0" algn="r">
-              <a:lnSpc>
-                <a:spcPct val="100000"/>
-              </a:lnSpc>
-              <a:spcBef>
-                <a:spcPts val="0"/>
-              </a:spcBef>
-              <a:spcAft>
-                <a:spcPts val="0"/>
-              </a:spcAft>
-              <a:buClr>
-                <a:srgbClr val="000000"/>
-              </a:buClr>
-              <a:buSzPts val="1000"/>
-              <a:buFont typeface="Arial"/>
-              <a:buNone/>
-              <a:defRPr sz="1000" b="0" i="0" u="none" strike="noStrike" cap="none">
-                <a:solidFill>
-                  <a:schemeClr val="dk2"/>
-                </a:solidFill>
-                <a:latin typeface="Roboto"/>
-                <a:ea typeface="Roboto"/>
-                <a:cs typeface="Roboto"/>
-                <a:sym typeface="Roboto"/>
-              </a:defRPr>
-            </a:lvl8pPr>
-            <a:lvl9pPr marL="0" marR="0" lvl="8" indent="0" algn="r">
-              <a:lnSpc>
-                <a:spcPct val="100000"/>
-              </a:lnSpc>
-              <a:spcBef>
-                <a:spcPts val="0"/>
-              </a:spcBef>
-              <a:spcAft>
-                <a:spcPts val="0"/>
-              </a:spcAft>
-              <a:buClr>
-                <a:srgbClr val="000000"/>
-              </a:buClr>
-              <a:buSzPts val="1000"/>
-              <a:buFont typeface="Arial"/>
-              <a:buNone/>
-              <a:defRPr sz="1000" b="0" i="0" u="none" strike="noStrike" cap="none">
-                <a:solidFill>
-                  <a:schemeClr val="dk2"/>
-                </a:solidFill>
-                <a:latin typeface="Roboto"/>
-                <a:ea typeface="Roboto"/>
-                <a:cs typeface="Roboto"/>
-                <a:sym typeface="Roboto"/>
-              </a:defRPr>
-            </a:lvl9pPr>
-          </a:lstStyle>
-          <a:p>
-            <a:pPr marL="0" lvl="0" indent="0" algn="r" rtl="0">
-              <a:spcBef>
-                <a:spcPts val="0"/>
-              </a:spcBef>
-              <a:spcAft>
-                <a:spcPts val="0"/>
-              </a:spcAft>
-              <a:buNone/>
-            </a:pPr>
-            <a:fld id="{00000000-1234-1234-1234-123412341234}" type="slidenum">
-              <a:rPr lang="en"/>
-              <a:t>‹#›</a:t>
-            </a:fld>
-            <a:endParaRPr/>
-          </a:p>
-        </p:txBody>
-      </p:sp>
-    </p:spTree>
-  </p:cSld>
-  <p:clrMapOvr>
-    <a:masterClrMapping/>
-  </p:clrMapOvr>
-</p:sldLayout>
-</file>
-
-<file path=ppt/slideLayouts/slideLayout33.xml><?xml version="1.0" encoding="utf-8"?>
 <p:sldLayout xmlns:a="http://schemas.openxmlformats.org/drawingml/2006/main" xmlns:r="http://schemas.openxmlformats.org/officeDocument/2006/relationships" xmlns:p="http://schemas.openxmlformats.org/presentationml/2006/main" matchingName="Blank" type="blank">
   <p:cSld name="BLANK">
     <p:spTree>
@@ -31506,6 +31679,198 @@
   <p:clrMapOvr>
     <a:masterClrMapping/>
   </p:clrMapOvr>
+</p:sldLayout>
+</file>
+
+<file path=ppt/slideLayouts/slideLayout33.xml><?xml version="1.0" encoding="utf-8"?>
+<p:sldLayout xmlns:a="http://schemas.openxmlformats.org/drawingml/2006/main" xmlns:r="http://schemas.openxmlformats.org/officeDocument/2006/relationships" xmlns:p="http://schemas.openxmlformats.org/presentationml/2006/main" type="obj">
+  <p:cSld name="Title and Content">
+    <p:spTree>
+      <p:nvGrpSpPr>
+        <p:cNvPr id="1" name=""/>
+        <p:cNvGrpSpPr/>
+        <p:nvPr/>
+      </p:nvGrpSpPr>
+      <p:grpSpPr>
+        <a:xfrm>
+          <a:off x="0" y="0"/>
+          <a:ext cx="0" cy="0"/>
+          <a:chOff x="0" y="0"/>
+          <a:chExt cx="0" cy="0"/>
+        </a:xfrm>
+      </p:grpSpPr>
+      <p:sp>
+        <p:nvSpPr>
+          <p:cNvPr id="2" name="Title 1"/>
+          <p:cNvSpPr>
+            <a:spLocks noGrp="1"/>
+          </p:cNvSpPr>
+          <p:nvPr>
+            <p:ph type="title" hasCustomPrompt="1"/>
+          </p:nvPr>
+        </p:nvSpPr>
+        <p:spPr/>
+        <p:txBody>
+          <a:bodyPr/>
+          <a:lstStyle/>
+          <a:p>
+            <a:r>
+              <a:rPr lang="en-US"/>
+              <a:t>[Slide title]</a:t>
+            </a:r>
+          </a:p>
+        </p:txBody>
+      </p:sp>
+      <p:sp>
+        <p:nvSpPr>
+          <p:cNvPr id="3" name="Content Placeholder 2"/>
+          <p:cNvSpPr>
+            <a:spLocks noGrp="1"/>
+          </p:cNvSpPr>
+          <p:nvPr>
+            <p:ph idx="1"/>
+          </p:nvPr>
+        </p:nvSpPr>
+        <p:spPr>
+          <a:xfrm>
+            <a:off x="411480" y="1200149"/>
+            <a:ext cx="5096352" cy="3429000"/>
+          </a:xfrm>
+        </p:spPr>
+        <p:txBody>
+          <a:bodyPr/>
+          <a:lstStyle/>
+          <a:p>
+            <a:pPr lvl="0"/>
+            <a:r>
+              <a:rPr lang="en-US"/>
+              <a:t>Click to edit Master text styles</a:t>
+            </a:r>
+          </a:p>
+          <a:p>
+            <a:pPr lvl="1"/>
+            <a:r>
+              <a:rPr lang="en-US"/>
+              <a:t>Second level</a:t>
+            </a:r>
+          </a:p>
+          <a:p>
+            <a:pPr lvl="2"/>
+            <a:r>
+              <a:rPr lang="en-US"/>
+              <a:t>Third level</a:t>
+            </a:r>
+          </a:p>
+          <a:p>
+            <a:pPr lvl="3"/>
+            <a:r>
+              <a:rPr lang="en-US"/>
+              <a:t>Fourth level</a:t>
+            </a:r>
+          </a:p>
+          <a:p>
+            <a:pPr lvl="4"/>
+            <a:r>
+              <a:rPr lang="en-US"/>
+              <a:t>Fifth level</a:t>
+            </a:r>
+          </a:p>
+        </p:txBody>
+      </p:sp>
+      <p:sp>
+        <p:nvSpPr>
+          <p:cNvPr id="5" name="Date Placeholder 4">
+            <a:extLst>
+              <a:ext uri="{FF2B5EF4-FFF2-40B4-BE49-F238E27FC236}">
+                <a16:creationId xmlns:a16="http://schemas.microsoft.com/office/drawing/2014/main" id="{F4FBB89F-F200-3967-06C8-C1B71C7F0FF9}"/>
+              </a:ext>
+            </a:extLst>
+          </p:cNvPr>
+          <p:cNvSpPr>
+            <a:spLocks noGrp="1"/>
+          </p:cNvSpPr>
+          <p:nvPr>
+            <p:ph type="dt" sz="half" idx="10"/>
+          </p:nvPr>
+        </p:nvSpPr>
+        <p:spPr>
+          <a:xfrm>
+            <a:off x="411480" y="4972050"/>
+            <a:ext cx="617220" cy="171450"/>
+          </a:xfrm>
+        </p:spPr>
+        <p:txBody>
+          <a:bodyPr lIns="0"/>
+          <a:lstStyle/>
+          <a:p>
+            <a:fld id="{971AFA9C-17DA-4726-B9E3-ADECF7729AF7}" type="datetimeFigureOut">
+              <a:rPr lang="en-US" smtClean="0"/>
+              <a:t>6/22/2026</a:t>
+            </a:fld>
+            <a:endParaRPr lang="en-US"/>
+          </a:p>
+        </p:txBody>
+      </p:sp>
+      <p:sp>
+        <p:nvSpPr>
+          <p:cNvPr id="6" name="Slide Number Placeholder 5">
+            <a:extLst>
+              <a:ext uri="{FF2B5EF4-FFF2-40B4-BE49-F238E27FC236}">
+                <a16:creationId xmlns:a16="http://schemas.microsoft.com/office/drawing/2014/main" id="{03C0BAD3-337A-DC60-A7ED-BF13F0826264}"/>
+              </a:ext>
+            </a:extLst>
+          </p:cNvPr>
+          <p:cNvSpPr>
+            <a:spLocks noGrp="1"/>
+          </p:cNvSpPr>
+          <p:nvPr>
+            <p:ph type="sldNum" sz="quarter" idx="11"/>
+          </p:nvPr>
+        </p:nvSpPr>
+        <p:spPr>
+          <a:xfrm>
+            <a:off x="8433828" y="4972050"/>
+            <a:ext cx="299408" cy="171450"/>
+          </a:xfrm>
+        </p:spPr>
+        <p:txBody>
+          <a:bodyPr rIns="0"/>
+          <a:lstStyle/>
+          <a:p>
+            <a:fld id="{79D051F2-C7C4-43BD-B552-C78CE0DE4128}" type="slidenum">
+              <a:rPr lang="en-US" smtClean="0"/>
+              <a:t>‹#›</a:t>
+            </a:fld>
+            <a:endParaRPr lang="en-US"/>
+          </a:p>
+        </p:txBody>
+      </p:sp>
+    </p:spTree>
+    <p:extLst>
+      <p:ext uri="{BB962C8B-B14F-4D97-AF65-F5344CB8AC3E}">
+        <p14:creationId xmlns:p14="http://schemas.microsoft.com/office/powerpoint/2010/main" val="329811480"/>
+      </p:ext>
+    </p:extLst>
+  </p:cSld>
+  <p:clrMapOvr>
+    <a:masterClrMapping/>
+  </p:clrMapOvr>
+  <p:extLst>
+    <p:ext uri="{DCECCB84-F9BA-43D5-87BE-67443E8EF086}">
+      <p15:sldGuideLst xmlns:p15="http://schemas.microsoft.com/office/powerpoint/2012/main">
+        <p15:guide id="1" orient="horz" pos="1008">
+          <p15:clr>
+            <a:srgbClr val="A4A3A4"/>
+          </p15:clr>
+        </p15:guide>
+        <p15:guide id="2" orient="horz" pos="3888">
+          <p15:clr>
+            <a:srgbClr val="A4A3A4"/>
+          </p15:clr>
+        </p15:guide>
+      </p15:sldGuideLst>
+    </p:ext>
+  </p:extLst>
 </p:sldLayout>
 </file>
 
@@ -43157,8 +43522,8 @@
     <p:sldLayoutId id="2147483678" r:id="rId29"/>
     <p:sldLayoutId id="2147483679" r:id="rId30"/>
     <p:sldLayoutId id="2147483680" r:id="rId31"/>
-    <p:sldLayoutId id="2147483681" r:id="rId32"/>
-    <p:sldLayoutId id="2147483682" r:id="rId33"/>
+    <p:sldLayoutId id="2147483682" r:id="rId32"/>
+    <p:sldLayoutId id="2147483685" r:id="rId33"/>
   </p:sldLayoutIdLst>
   <p:hf sldNum="0" hdr="0" ftr="0" dt="0"/>
   <p:txStyles>
@@ -44318,6 +44683,1937 @@
   <p:cSld>
     <p:spTree>
       <p:nvGrpSpPr>
+        <p:cNvPr id="1" name="Shape 487"/>
+        <p:cNvGrpSpPr/>
+        <p:nvPr/>
+      </p:nvGrpSpPr>
+      <p:grpSpPr>
+        <a:xfrm>
+          <a:off x="0" y="0"/>
+          <a:ext cx="0" cy="0"/>
+          <a:chOff x="0" y="0"/>
+          <a:chExt cx="0" cy="0"/>
+        </a:xfrm>
+      </p:grpSpPr>
+      <p:sp>
+        <p:nvSpPr>
+          <p:cNvPr id="488" name="Google Shape;488;p58"/>
+          <p:cNvSpPr txBox="1">
+            <a:spLocks noGrp="1"/>
+          </p:cNvSpPr>
+          <p:nvPr>
+            <p:ph type="title"/>
+          </p:nvPr>
+        </p:nvSpPr>
+        <p:spPr>
+          <a:xfrm>
+            <a:off x="411480" y="308611"/>
+            <a:ext cx="6173470" cy="891778"/>
+          </a:xfrm>
+          <a:noFill/>
+          <a:ln>
+            <a:noFill/>
+          </a:ln>
+        </p:spPr>
+        <p:txBody>
+          <a:bodyPr spcFirstLastPara="1" wrap="square" lIns="91425" tIns="91425" rIns="91425" bIns="91425" anchor="t" anchorCtr="0">
+            <a:normAutofit/>
+          </a:bodyPr>
+          <a:lstStyle/>
+          <a:p>
+            <a:pPr lvl="0"/>
+            <a:r>
+              <a:rPr lang="en-US"/>
+              <a:t>ERROR HANDLING</a:t>
+            </a:r>
+          </a:p>
+        </p:txBody>
+      </p:sp>
+      <p:sp>
+        <p:nvSpPr>
+          <p:cNvPr id="489" name="Google Shape;489;p58"/>
+          <p:cNvSpPr txBox="1"/>
+          <p:nvPr/>
+        </p:nvSpPr>
+        <p:spPr>
+          <a:xfrm>
+            <a:off x="606210" y="1570610"/>
+            <a:ext cx="7647000" cy="3241500"/>
+          </a:xfrm>
+          <a:prstGeom prst="rect">
+            <a:avLst/>
+          </a:prstGeom>
+          <a:noFill/>
+          <a:ln>
+            <a:noFill/>
+          </a:ln>
+        </p:spPr>
+        <p:txBody>
+          <a:bodyPr spcFirstLastPara="1" wrap="square" lIns="91425" tIns="91425" rIns="91425" bIns="91425" anchor="t" anchorCtr="0">
+            <a:noAutofit/>
+          </a:bodyPr>
+          <a:lstStyle/>
+          <a:p>
+            <a:pPr marL="457200" marR="0" lvl="0" indent="-342900" algn="l" rtl="0">
+              <a:lnSpc>
+                <a:spcPct val="100000"/>
+              </a:lnSpc>
+              <a:spcBef>
+                <a:spcPts val="0"/>
+              </a:spcBef>
+              <a:spcAft>
+                <a:spcPts val="0"/>
+              </a:spcAft>
+              <a:buClr>
+                <a:srgbClr val="FFFFFF"/>
+              </a:buClr>
+              <a:buSzPts val="1800"/>
+              <a:buFont typeface="Arial"/>
+              <a:buChar char="•"/>
+            </a:pPr>
+            <a:r>
+              <a:rPr lang="en" sz="1800" b="0" i="0" u="none" strike="noStrike" cap="none">
+                <a:solidFill>
+                  <a:schemeClr val="lt1"/>
+                </a:solidFill>
+                <a:latin typeface="Roboto"/>
+                <a:ea typeface="Roboto"/>
+                <a:cs typeface="Roboto"/>
+                <a:sym typeface="Roboto"/>
+              </a:rPr>
+              <a:t>Why Handle Errors?</a:t>
+            </a:r>
+            <a:endParaRPr sz="1800" b="0" i="0" u="none" strike="noStrike" cap="none">
+              <a:solidFill>
+                <a:schemeClr val="lt1"/>
+              </a:solidFill>
+              <a:latin typeface="Roboto"/>
+              <a:ea typeface="Roboto"/>
+              <a:cs typeface="Roboto"/>
+              <a:sym typeface="Roboto"/>
+            </a:endParaRPr>
+          </a:p>
+          <a:p>
+            <a:pPr marL="914400" marR="0" lvl="1" indent="-342900" algn="l" rtl="0">
+              <a:lnSpc>
+                <a:spcPct val="100000"/>
+              </a:lnSpc>
+              <a:spcBef>
+                <a:spcPts val="0"/>
+              </a:spcBef>
+              <a:spcAft>
+                <a:spcPts val="0"/>
+              </a:spcAft>
+              <a:buClr>
+                <a:srgbClr val="FFFFFF"/>
+              </a:buClr>
+              <a:buSzPts val="1800"/>
+              <a:buFont typeface="Arial"/>
+              <a:buChar char="•"/>
+            </a:pPr>
+            <a:r>
+              <a:rPr lang="en" sz="1800" b="0" i="0" u="none" strike="noStrike" cap="none">
+                <a:solidFill>
+                  <a:schemeClr val="lt1"/>
+                </a:solidFill>
+                <a:latin typeface="Roboto"/>
+                <a:ea typeface="Roboto"/>
+                <a:cs typeface="Roboto"/>
+                <a:sym typeface="Roboto"/>
+              </a:rPr>
+              <a:t>Prevent your program from crashing</a:t>
+            </a:r>
+            <a:endParaRPr sz="1800" b="0" i="0" u="none" strike="noStrike" cap="none">
+              <a:solidFill>
+                <a:schemeClr val="lt1"/>
+              </a:solidFill>
+              <a:latin typeface="Roboto"/>
+              <a:ea typeface="Roboto"/>
+              <a:cs typeface="Roboto"/>
+              <a:sym typeface="Roboto"/>
+            </a:endParaRPr>
+          </a:p>
+          <a:p>
+            <a:pPr marL="914400" marR="0" lvl="1" indent="-342900" algn="l" rtl="0">
+              <a:lnSpc>
+                <a:spcPct val="100000"/>
+              </a:lnSpc>
+              <a:spcBef>
+                <a:spcPts val="0"/>
+              </a:spcBef>
+              <a:spcAft>
+                <a:spcPts val="0"/>
+              </a:spcAft>
+              <a:buClr>
+                <a:srgbClr val="FFFFFF"/>
+              </a:buClr>
+              <a:buSzPts val="1800"/>
+              <a:buFont typeface="Arial"/>
+              <a:buChar char="•"/>
+            </a:pPr>
+            <a:r>
+              <a:rPr lang="en" sz="1800" b="0" i="0" u="none" strike="noStrike" cap="none">
+                <a:solidFill>
+                  <a:schemeClr val="lt1"/>
+                </a:solidFill>
+                <a:latin typeface="Roboto"/>
+                <a:ea typeface="Roboto"/>
+                <a:cs typeface="Roboto"/>
+                <a:sym typeface="Roboto"/>
+              </a:rPr>
+              <a:t>Provide helpful messages to users</a:t>
+            </a:r>
+            <a:endParaRPr sz="1800" b="0" i="0" u="none" strike="noStrike" cap="none">
+              <a:solidFill>
+                <a:schemeClr val="lt1"/>
+              </a:solidFill>
+              <a:latin typeface="Roboto"/>
+              <a:ea typeface="Roboto"/>
+              <a:cs typeface="Roboto"/>
+              <a:sym typeface="Roboto"/>
+            </a:endParaRPr>
+          </a:p>
+          <a:p>
+            <a:pPr marL="914400" marR="0" lvl="1" indent="-342900" algn="l" rtl="0">
+              <a:lnSpc>
+                <a:spcPct val="100000"/>
+              </a:lnSpc>
+              <a:spcBef>
+                <a:spcPts val="0"/>
+              </a:spcBef>
+              <a:spcAft>
+                <a:spcPts val="0"/>
+              </a:spcAft>
+              <a:buClr>
+                <a:srgbClr val="FFFFFF"/>
+              </a:buClr>
+              <a:buSzPts val="1800"/>
+              <a:buFont typeface="Arial"/>
+              <a:buChar char="•"/>
+            </a:pPr>
+            <a:r>
+              <a:rPr lang="en" sz="1800" b="0" i="0" u="none" strike="noStrike" cap="none">
+                <a:solidFill>
+                  <a:schemeClr val="lt1"/>
+                </a:solidFill>
+                <a:latin typeface="Roboto"/>
+                <a:ea typeface="Roboto"/>
+                <a:cs typeface="Roboto"/>
+                <a:sym typeface="Roboto"/>
+              </a:rPr>
+              <a:t>Let your code recover from unexpected situations</a:t>
+            </a:r>
+            <a:endParaRPr sz="1800" b="0" i="0" u="none" strike="noStrike" cap="none">
+              <a:solidFill>
+                <a:schemeClr val="lt1"/>
+              </a:solidFill>
+              <a:latin typeface="Roboto"/>
+              <a:ea typeface="Roboto"/>
+              <a:cs typeface="Roboto"/>
+              <a:sym typeface="Roboto"/>
+            </a:endParaRPr>
+          </a:p>
+        </p:txBody>
+      </p:sp>
+    </p:spTree>
+  </p:cSld>
+  <p:clrMapOvr>
+    <a:masterClrMapping/>
+  </p:clrMapOvr>
+</p:sld>
+</file>
+
+<file path=ppt/slides/slide11.xml><?xml version="1.0" encoding="utf-8"?>
+<p:sld xmlns:a="http://schemas.openxmlformats.org/drawingml/2006/main" xmlns:r="http://schemas.openxmlformats.org/officeDocument/2006/relationships" xmlns:p="http://schemas.openxmlformats.org/presentationml/2006/main">
+  <p:cSld>
+    <p:spTree>
+      <p:nvGrpSpPr>
+        <p:cNvPr id="1" name="Shape 493"/>
+        <p:cNvGrpSpPr/>
+        <p:nvPr/>
+      </p:nvGrpSpPr>
+      <p:grpSpPr>
+        <a:xfrm>
+          <a:off x="0" y="0"/>
+          <a:ext cx="0" cy="0"/>
+          <a:chOff x="0" y="0"/>
+          <a:chExt cx="0" cy="0"/>
+        </a:xfrm>
+      </p:grpSpPr>
+      <p:sp>
+        <p:nvSpPr>
+          <p:cNvPr id="494" name="Google Shape;494;p59"/>
+          <p:cNvSpPr txBox="1">
+            <a:spLocks noGrp="1"/>
+          </p:cNvSpPr>
+          <p:nvPr>
+            <p:ph type="title"/>
+          </p:nvPr>
+        </p:nvSpPr>
+        <p:spPr>
+          <a:xfrm>
+            <a:off x="411480" y="308611"/>
+            <a:ext cx="6173470" cy="891778"/>
+          </a:xfrm>
+          <a:noFill/>
+          <a:ln>
+            <a:noFill/>
+          </a:ln>
+        </p:spPr>
+        <p:txBody>
+          <a:bodyPr spcFirstLastPara="1" wrap="square" lIns="91425" tIns="91425" rIns="91425" bIns="91425" anchor="t" anchorCtr="0">
+            <a:normAutofit/>
+          </a:bodyPr>
+          <a:lstStyle/>
+          <a:p>
+            <a:pPr lvl="0"/>
+            <a:r>
+              <a:rPr lang="en-US"/>
+              <a:t>TRY - EXCEPT</a:t>
+            </a:r>
+          </a:p>
+        </p:txBody>
+      </p:sp>
+      <p:sp>
+        <p:nvSpPr>
+          <p:cNvPr id="495" name="Google Shape;495;p59"/>
+          <p:cNvSpPr txBox="1">
+            <a:spLocks noGrp="1"/>
+          </p:cNvSpPr>
+          <p:nvPr>
+            <p:ph type="body" idx="1"/>
+          </p:nvPr>
+        </p:nvSpPr>
+        <p:spPr>
+          <a:xfrm>
+            <a:off x="411480" y="1062990"/>
+            <a:ext cx="7572793" cy="3017520"/>
+          </a:xfrm>
+          <a:noFill/>
+          <a:ln>
+            <a:noFill/>
+          </a:ln>
+        </p:spPr>
+        <p:txBody>
+          <a:bodyPr spcFirstLastPara="1" wrap="square" lIns="91425" tIns="91425" rIns="91425" bIns="91425" anchor="t" anchorCtr="0">
+            <a:normAutofit/>
+          </a:bodyPr>
+          <a:lstStyle/>
+          <a:p>
+            <a:pPr lvl="0"/>
+            <a:r>
+              <a:rPr lang="en-US" dirty="0">
+                <a:solidFill>
+                  <a:schemeClr val="bg1"/>
+                </a:solidFill>
+              </a:rPr>
+              <a:t>Tries a block a code and if an error is raised, can handle that error gracefully</a:t>
+            </a:r>
+          </a:p>
+          <a:p>
+            <a:pPr lvl="0"/>
+            <a:endParaRPr lang="en-US" dirty="0"/>
+          </a:p>
+        </p:txBody>
+      </p:sp>
+      <p:sp>
+        <p:nvSpPr>
+          <p:cNvPr id="3" name="TextBox 2">
+            <a:extLst>
+              <a:ext uri="{FF2B5EF4-FFF2-40B4-BE49-F238E27FC236}">
+                <a16:creationId xmlns:a16="http://schemas.microsoft.com/office/drawing/2014/main" id="{FBB90202-0B70-8588-4936-1142769ECA11}"/>
+              </a:ext>
+            </a:extLst>
+          </p:cNvPr>
+          <p:cNvSpPr txBox="1"/>
+          <p:nvPr/>
+        </p:nvSpPr>
+        <p:spPr>
+          <a:xfrm>
+            <a:off x="553841" y="2099097"/>
+            <a:ext cx="5356303" cy="1631216"/>
+          </a:xfrm>
+          <a:prstGeom prst="rect">
+            <a:avLst/>
+          </a:prstGeom>
+          <a:noFill/>
+        </p:spPr>
+        <p:txBody>
+          <a:bodyPr wrap="square">
+            <a:spAutoFit/>
+          </a:bodyPr>
+          <a:lstStyle/>
+          <a:p>
+            <a:pPr lvl="0"/>
+            <a:r>
+              <a:rPr lang="en-US" sz="2000" dirty="0">
+                <a:solidFill>
+                  <a:schemeClr val="bg1"/>
+                </a:solidFill>
+                <a:sym typeface="Consolas"/>
+              </a:rPr>
+              <a:t>try:</a:t>
+            </a:r>
+          </a:p>
+          <a:p>
+            <a:pPr lvl="0"/>
+            <a:r>
+              <a:rPr lang="en-US" sz="2000" dirty="0">
+                <a:solidFill>
+                  <a:schemeClr val="bg1"/>
+                </a:solidFill>
+                <a:sym typeface="Consolas"/>
+              </a:rPr>
+              <a:t>     # code that might cause an error</a:t>
+            </a:r>
+          </a:p>
+          <a:p>
+            <a:pPr lvl="0"/>
+            <a:r>
+              <a:rPr lang="en-US" sz="2000" dirty="0">
+                <a:solidFill>
+                  <a:schemeClr val="bg1"/>
+                </a:solidFill>
+                <a:sym typeface="Consolas"/>
+              </a:rPr>
+              <a:t>     number = int("</a:t>
+            </a:r>
+            <a:r>
+              <a:rPr lang="en-US" sz="2000" dirty="0" err="1">
+                <a:solidFill>
+                  <a:schemeClr val="bg1"/>
+                </a:solidFill>
+                <a:sym typeface="Consolas"/>
+              </a:rPr>
+              <a:t>abc</a:t>
+            </a:r>
+            <a:r>
+              <a:rPr lang="en-US" sz="2000" dirty="0">
+                <a:solidFill>
+                  <a:schemeClr val="bg1"/>
+                </a:solidFill>
+                <a:sym typeface="Consolas"/>
+              </a:rPr>
+              <a:t>")</a:t>
+            </a:r>
+            <a:endParaRPr lang="en-US" sz="2000" dirty="0">
+              <a:solidFill>
+                <a:schemeClr val="bg1"/>
+              </a:solidFill>
+            </a:endParaRPr>
+          </a:p>
+          <a:p>
+            <a:pPr lvl="0"/>
+            <a:r>
+              <a:rPr lang="en-US" sz="2000" dirty="0">
+                <a:solidFill>
+                  <a:schemeClr val="bg1"/>
+                </a:solidFill>
+                <a:sym typeface="Consolas"/>
+              </a:rPr>
+              <a:t>except </a:t>
+            </a:r>
+            <a:r>
+              <a:rPr lang="en-US" sz="2000" dirty="0" err="1">
+                <a:solidFill>
+                  <a:schemeClr val="bg1"/>
+                </a:solidFill>
+                <a:sym typeface="Consolas"/>
+              </a:rPr>
+              <a:t>ValueError</a:t>
+            </a:r>
+            <a:r>
+              <a:rPr lang="en-US" sz="2000" dirty="0">
+                <a:solidFill>
+                  <a:schemeClr val="bg1"/>
+                </a:solidFill>
+                <a:sym typeface="Consolas"/>
+              </a:rPr>
+              <a:t>:</a:t>
+            </a:r>
+          </a:p>
+          <a:p>
+            <a:pPr lvl="0"/>
+            <a:r>
+              <a:rPr lang="en-US" sz="2000" dirty="0">
+                <a:solidFill>
+                  <a:schemeClr val="bg1"/>
+                </a:solidFill>
+                <a:sym typeface="Consolas"/>
+              </a:rPr>
+              <a:t>     print("Oops! That wasn't a number.")</a:t>
+            </a:r>
+          </a:p>
+        </p:txBody>
+      </p:sp>
+    </p:spTree>
+  </p:cSld>
+  <p:clrMapOvr>
+    <a:masterClrMapping/>
+  </p:clrMapOvr>
+</p:sld>
+</file>
+
+<file path=ppt/slides/slide12.xml><?xml version="1.0" encoding="utf-8"?>
+<p:sld xmlns:a="http://schemas.openxmlformats.org/drawingml/2006/main" xmlns:r="http://schemas.openxmlformats.org/officeDocument/2006/relationships" xmlns:p="http://schemas.openxmlformats.org/presentationml/2006/main">
+  <p:cSld>
+    <p:spTree>
+      <p:nvGrpSpPr>
+        <p:cNvPr id="1" name="Shape 499"/>
+        <p:cNvGrpSpPr/>
+        <p:nvPr/>
+      </p:nvGrpSpPr>
+      <p:grpSpPr>
+        <a:xfrm>
+          <a:off x="0" y="0"/>
+          <a:ext cx="0" cy="0"/>
+          <a:chOff x="0" y="0"/>
+          <a:chExt cx="0" cy="0"/>
+        </a:xfrm>
+      </p:grpSpPr>
+      <p:sp>
+        <p:nvSpPr>
+          <p:cNvPr id="500" name="Google Shape;500;p60"/>
+          <p:cNvSpPr txBox="1">
+            <a:spLocks noGrp="1"/>
+          </p:cNvSpPr>
+          <p:nvPr>
+            <p:ph type="title"/>
+          </p:nvPr>
+        </p:nvSpPr>
+        <p:spPr>
+          <a:xfrm>
+            <a:off x="411480" y="308611"/>
+            <a:ext cx="6173470" cy="891778"/>
+          </a:xfrm>
+          <a:noFill/>
+          <a:ln>
+            <a:noFill/>
+          </a:ln>
+        </p:spPr>
+        <p:txBody>
+          <a:bodyPr spcFirstLastPara="1" wrap="square" lIns="91425" tIns="91425" rIns="91425" bIns="91425" anchor="t" anchorCtr="0">
+            <a:normAutofit/>
+          </a:bodyPr>
+          <a:lstStyle/>
+          <a:p>
+            <a:pPr lvl="0"/>
+            <a:r>
+              <a:rPr lang="en-US"/>
+              <a:t>TRY - EXCEPT CONTINUED</a:t>
+            </a:r>
+          </a:p>
+        </p:txBody>
+      </p:sp>
+      <p:sp>
+        <p:nvSpPr>
+          <p:cNvPr id="501" name="Google Shape;501;p60"/>
+          <p:cNvSpPr txBox="1">
+            <a:spLocks noGrp="1"/>
+          </p:cNvSpPr>
+          <p:nvPr>
+            <p:ph type="body" idx="1"/>
+          </p:nvPr>
+        </p:nvSpPr>
+        <p:spPr>
+          <a:xfrm>
+            <a:off x="352007" y="914400"/>
+            <a:ext cx="5929847" cy="1457093"/>
+          </a:xfrm>
+          <a:noFill/>
+          <a:ln>
+            <a:noFill/>
+          </a:ln>
+        </p:spPr>
+        <p:txBody>
+          <a:bodyPr spcFirstLastPara="1" wrap="square" lIns="91425" tIns="91425" rIns="91425" bIns="91425" anchor="t" anchorCtr="0">
+            <a:normAutofit/>
+          </a:bodyPr>
+          <a:lstStyle/>
+          <a:p>
+            <a:pPr lvl="0"/>
+            <a:r>
+              <a:rPr lang="en-US" sz="2600" dirty="0">
+                <a:solidFill>
+                  <a:schemeClr val="bg1"/>
+                </a:solidFill>
+              </a:rPr>
+              <a:t>Multiple except statements</a:t>
+            </a:r>
+            <a:endParaRPr lang="en-US" sz="2100" dirty="0">
+              <a:solidFill>
+                <a:schemeClr val="bg1"/>
+              </a:solidFill>
+            </a:endParaRPr>
+          </a:p>
+          <a:p>
+            <a:pPr marL="604838" lvl="1" indent="0">
+              <a:buNone/>
+            </a:pPr>
+            <a:endParaRPr lang="en-US" dirty="0">
+              <a:solidFill>
+                <a:schemeClr val="bg1"/>
+              </a:solidFill>
+            </a:endParaRPr>
+          </a:p>
+          <a:p>
+            <a:pPr lvl="0"/>
+            <a:endParaRPr lang="en-US" dirty="0">
+              <a:sym typeface="Consolas"/>
+            </a:endParaRPr>
+          </a:p>
+          <a:p>
+            <a:pPr lvl="0"/>
+            <a:endParaRPr lang="en-US" dirty="0"/>
+          </a:p>
+          <a:p>
+            <a:pPr lvl="0"/>
+            <a:endParaRPr lang="en-US" dirty="0"/>
+          </a:p>
+        </p:txBody>
+      </p:sp>
+      <p:sp>
+        <p:nvSpPr>
+          <p:cNvPr id="3" name="TextBox 2">
+            <a:extLst>
+              <a:ext uri="{FF2B5EF4-FFF2-40B4-BE49-F238E27FC236}">
+                <a16:creationId xmlns:a16="http://schemas.microsoft.com/office/drawing/2014/main" id="{70A03235-D35B-4026-1609-55A4708471CD}"/>
+              </a:ext>
+            </a:extLst>
+          </p:cNvPr>
+          <p:cNvSpPr txBox="1"/>
+          <p:nvPr/>
+        </p:nvSpPr>
+        <p:spPr>
+          <a:xfrm>
+            <a:off x="702524" y="1642946"/>
+            <a:ext cx="5690841" cy="2554545"/>
+          </a:xfrm>
+          <a:prstGeom prst="rect">
+            <a:avLst/>
+          </a:prstGeom>
+          <a:noFill/>
+        </p:spPr>
+        <p:txBody>
+          <a:bodyPr wrap="square">
+            <a:spAutoFit/>
+          </a:bodyPr>
+          <a:lstStyle/>
+          <a:p>
+            <a:pPr lvl="0"/>
+            <a:r>
+              <a:rPr lang="en-US" sz="2000" dirty="0">
+                <a:solidFill>
+                  <a:schemeClr val="bg1"/>
+                </a:solidFill>
+                <a:sym typeface="Consolas"/>
+              </a:rPr>
+              <a:t>try:</a:t>
+            </a:r>
+          </a:p>
+          <a:p>
+            <a:pPr lvl="0"/>
+            <a:r>
+              <a:rPr lang="en-US" sz="2000" dirty="0">
+                <a:solidFill>
+                  <a:schemeClr val="bg1"/>
+                </a:solidFill>
+                <a:sym typeface="Consolas"/>
+              </a:rPr>
+              <a:t>    result = 10 / 2</a:t>
+            </a:r>
+          </a:p>
+          <a:p>
+            <a:pPr lvl="0"/>
+            <a:r>
+              <a:rPr lang="en-US" sz="2000" dirty="0">
+                <a:solidFill>
+                  <a:schemeClr val="bg1"/>
+                </a:solidFill>
+                <a:sym typeface="Consolas"/>
+              </a:rPr>
+              <a:t>except ZeroDivisionError:</a:t>
+            </a:r>
+          </a:p>
+          <a:p>
+            <a:pPr lvl="0"/>
+            <a:r>
+              <a:rPr lang="en-US" sz="2000" dirty="0">
+                <a:solidFill>
+                  <a:schemeClr val="bg1"/>
+                </a:solidFill>
+                <a:sym typeface="Consolas"/>
+              </a:rPr>
+              <a:t>    print("Cannot divide by zero.")</a:t>
+            </a:r>
+          </a:p>
+          <a:p>
+            <a:pPr lvl="0"/>
+            <a:r>
+              <a:rPr lang="en-US" sz="2000" dirty="0">
+                <a:solidFill>
+                  <a:schemeClr val="bg1"/>
+                </a:solidFill>
+                <a:sym typeface="Consolas"/>
+              </a:rPr>
+              <a:t>except </a:t>
+            </a:r>
+            <a:r>
+              <a:rPr lang="en-US" sz="2000" dirty="0" err="1">
+                <a:solidFill>
+                  <a:schemeClr val="bg1"/>
+                </a:solidFill>
+                <a:sym typeface="Consolas"/>
+              </a:rPr>
+              <a:t>ValueError</a:t>
+            </a:r>
+            <a:r>
+              <a:rPr lang="en-US" sz="2000" dirty="0">
+                <a:solidFill>
+                  <a:schemeClr val="bg1"/>
+                </a:solidFill>
+                <a:sym typeface="Consolas"/>
+              </a:rPr>
+              <a:t>:</a:t>
+            </a:r>
+          </a:p>
+          <a:p>
+            <a:pPr lvl="0"/>
+            <a:r>
+              <a:rPr lang="en-US" sz="2000" dirty="0">
+                <a:solidFill>
+                  <a:schemeClr val="bg1"/>
+                </a:solidFill>
+                <a:sym typeface="Consolas"/>
+              </a:rPr>
+              <a:t>    print(“Incorrect conversion”)</a:t>
+            </a:r>
+          </a:p>
+          <a:p>
+            <a:pPr lvl="0"/>
+            <a:r>
+              <a:rPr lang="en-US" sz="2000" dirty="0">
+                <a:solidFill>
+                  <a:schemeClr val="bg1"/>
+                </a:solidFill>
+                <a:sym typeface="Consolas"/>
+              </a:rPr>
+              <a:t>except:</a:t>
+            </a:r>
+          </a:p>
+          <a:p>
+            <a:pPr lvl="0"/>
+            <a:r>
+              <a:rPr lang="en-US" sz="2000" dirty="0">
+                <a:solidFill>
+                  <a:schemeClr val="bg1"/>
+                </a:solidFill>
+                <a:sym typeface="Consolas"/>
+              </a:rPr>
+              <a:t>    print(“You are seeing this message in error!”)</a:t>
+            </a:r>
+          </a:p>
+        </p:txBody>
+      </p:sp>
+    </p:spTree>
+  </p:cSld>
+  <p:clrMapOvr>
+    <a:masterClrMapping/>
+  </p:clrMapOvr>
+  <p:timing>
+    <p:tnLst>
+      <p:par>
+        <p:cTn id="1" dur="indefinite" restart="never" nodeType="tmRoot">
+          <p:childTnLst>
+            <p:seq concurrent="1" nextAc="seek">
+              <p:cTn id="2" dur="indefinite" nodeType="mainSeq">
+                <p:childTnLst>
+                  <p:par>
+                    <p:cTn id="3" fill="hold">
+                      <p:stCondLst>
+                        <p:cond delay="indefinite"/>
+                      </p:stCondLst>
+                      <p:childTnLst>
+                        <p:par>
+                          <p:cTn id="4" fill="hold">
+                            <p:stCondLst>
+                              <p:cond delay="0"/>
+                            </p:stCondLst>
+                            <p:childTnLst>
+                              <p:par>
+                                <p:cTn id="5" presetID="1" presetClass="entr" presetSubtype="0" fill="hold" grpId="0" nodeType="clickEffect">
+                                  <p:stCondLst>
+                                    <p:cond delay="0"/>
+                                  </p:stCondLst>
+                                  <p:childTnLst>
+                                    <p:set>
+                                      <p:cBhvr>
+                                        <p:cTn id="6" dur="1" fill="hold">
+                                          <p:stCondLst>
+                                            <p:cond delay="0"/>
+                                          </p:stCondLst>
+                                        </p:cTn>
+                                        <p:tgtEl>
+                                          <p:spTgt spid="3"/>
+                                        </p:tgtEl>
+                                        <p:attrNameLst>
+                                          <p:attrName>style.visibility</p:attrName>
+                                        </p:attrNameLst>
+                                      </p:cBhvr>
+                                      <p:to>
+                                        <p:strVal val="visible"/>
+                                      </p:to>
+                                    </p:set>
+                                  </p:childTnLst>
+                                </p:cTn>
+                              </p:par>
+                            </p:childTnLst>
+                          </p:cTn>
+                        </p:par>
+                      </p:childTnLst>
+                    </p:cTn>
+                  </p:par>
+                </p:childTnLst>
+              </p:cTn>
+              <p:prevCondLst>
+                <p:cond evt="onPrev" delay="0">
+                  <p:tgtEl>
+                    <p:sldTgt/>
+                  </p:tgtEl>
+                </p:cond>
+              </p:prevCondLst>
+              <p:nextCondLst>
+                <p:cond evt="onNext" delay="0">
+                  <p:tgtEl>
+                    <p:sldTgt/>
+                  </p:tgtEl>
+                </p:cond>
+              </p:nextCondLst>
+            </p:seq>
+          </p:childTnLst>
+        </p:cTn>
+      </p:par>
+    </p:tnLst>
+    <p:bldLst>
+      <p:bldP spid="3" grpId="0"/>
+    </p:bldLst>
+  </p:timing>
+</p:sld>
+</file>
+
+<file path=ppt/slides/slide13.xml><?xml version="1.0" encoding="utf-8"?>
+<p:sld xmlns:a="http://schemas.openxmlformats.org/drawingml/2006/main" xmlns:r="http://schemas.openxmlformats.org/officeDocument/2006/relationships" xmlns:p="http://schemas.openxmlformats.org/presentationml/2006/main">
+  <p:cSld>
+    <p:spTree>
+      <p:nvGrpSpPr>
+        <p:cNvPr id="1" name="Shape 499">
+          <a:extLst>
+            <a:ext uri="{FF2B5EF4-FFF2-40B4-BE49-F238E27FC236}">
+              <a16:creationId xmlns:a16="http://schemas.microsoft.com/office/drawing/2014/main" id="{EEBC8AFD-5F6C-C21C-EC80-EC2EE62AEAA0}"/>
+            </a:ext>
+          </a:extLst>
+        </p:cNvPr>
+        <p:cNvGrpSpPr/>
+        <p:nvPr/>
+      </p:nvGrpSpPr>
+      <p:grpSpPr>
+        <a:xfrm>
+          <a:off x="0" y="0"/>
+          <a:ext cx="0" cy="0"/>
+          <a:chOff x="0" y="0"/>
+          <a:chExt cx="0" cy="0"/>
+        </a:xfrm>
+      </p:grpSpPr>
+      <p:sp>
+        <p:nvSpPr>
+          <p:cNvPr id="500" name="Google Shape;500;p60">
+            <a:extLst>
+              <a:ext uri="{FF2B5EF4-FFF2-40B4-BE49-F238E27FC236}">
+                <a16:creationId xmlns:a16="http://schemas.microsoft.com/office/drawing/2014/main" id="{F1D83413-65FF-EA44-5CA2-D03B294AE4B2}"/>
+              </a:ext>
+            </a:extLst>
+          </p:cNvPr>
+          <p:cNvSpPr txBox="1">
+            <a:spLocks noGrp="1"/>
+          </p:cNvSpPr>
+          <p:nvPr>
+            <p:ph type="title"/>
+          </p:nvPr>
+        </p:nvSpPr>
+        <p:spPr>
+          <a:xfrm>
+            <a:off x="411480" y="308611"/>
+            <a:ext cx="6173470" cy="891778"/>
+          </a:xfrm>
+          <a:noFill/>
+          <a:ln>
+            <a:noFill/>
+          </a:ln>
+        </p:spPr>
+        <p:txBody>
+          <a:bodyPr spcFirstLastPara="1" wrap="square" lIns="91425" tIns="91425" rIns="91425" bIns="91425" anchor="t" anchorCtr="0">
+            <a:normAutofit/>
+          </a:bodyPr>
+          <a:lstStyle/>
+          <a:p>
+            <a:pPr lvl="0"/>
+            <a:r>
+              <a:rPr lang="en-US"/>
+              <a:t>TRY - EXCEPT CONTINUED</a:t>
+            </a:r>
+          </a:p>
+        </p:txBody>
+      </p:sp>
+      <p:sp>
+        <p:nvSpPr>
+          <p:cNvPr id="501" name="Google Shape;501;p60">
+            <a:extLst>
+              <a:ext uri="{FF2B5EF4-FFF2-40B4-BE49-F238E27FC236}">
+                <a16:creationId xmlns:a16="http://schemas.microsoft.com/office/drawing/2014/main" id="{559571E5-1152-2BFE-0A02-FA002AFE9AAB}"/>
+              </a:ext>
+            </a:extLst>
+          </p:cNvPr>
+          <p:cNvSpPr txBox="1">
+            <a:spLocks noGrp="1"/>
+          </p:cNvSpPr>
+          <p:nvPr>
+            <p:ph type="body" idx="1"/>
+          </p:nvPr>
+        </p:nvSpPr>
+        <p:spPr>
+          <a:xfrm>
+            <a:off x="352007" y="914400"/>
+            <a:ext cx="5929847" cy="1457093"/>
+          </a:xfrm>
+          <a:noFill/>
+          <a:ln>
+            <a:noFill/>
+          </a:ln>
+        </p:spPr>
+        <p:txBody>
+          <a:bodyPr spcFirstLastPara="1" wrap="square" lIns="91425" tIns="91425" rIns="91425" bIns="91425" anchor="t" anchorCtr="0">
+            <a:normAutofit/>
+          </a:bodyPr>
+          <a:lstStyle/>
+          <a:p>
+            <a:pPr lvl="0"/>
+            <a:r>
+              <a:rPr lang="en-US" sz="2600" dirty="0">
+                <a:solidFill>
+                  <a:schemeClr val="bg1"/>
+                </a:solidFill>
+              </a:rPr>
+              <a:t>Optional</a:t>
+            </a:r>
+          </a:p>
+          <a:p>
+            <a:pPr lvl="1"/>
+            <a:r>
+              <a:rPr lang="en-US" sz="2100" dirty="0">
+                <a:solidFill>
+                  <a:schemeClr val="bg1"/>
+                </a:solidFill>
+                <a:sym typeface="Consolas"/>
+              </a:rPr>
+              <a:t>else</a:t>
+            </a:r>
+            <a:r>
+              <a:rPr lang="en-US" sz="2100" dirty="0">
+                <a:solidFill>
+                  <a:schemeClr val="bg1"/>
+                </a:solidFill>
+              </a:rPr>
+              <a:t>: Runs if no error occurs</a:t>
+            </a:r>
+          </a:p>
+          <a:p>
+            <a:pPr lvl="1"/>
+            <a:r>
+              <a:rPr lang="en-US" sz="2100" dirty="0">
+                <a:solidFill>
+                  <a:schemeClr val="bg1"/>
+                </a:solidFill>
+                <a:sym typeface="Consolas"/>
+              </a:rPr>
+              <a:t>finally</a:t>
+            </a:r>
+            <a:r>
+              <a:rPr lang="en-US" sz="2100" dirty="0">
+                <a:solidFill>
+                  <a:schemeClr val="bg1"/>
+                </a:solidFill>
+              </a:rPr>
+              <a:t>: always runs</a:t>
+            </a:r>
+          </a:p>
+          <a:p>
+            <a:pPr marL="604838" lvl="1" indent="0">
+              <a:buNone/>
+            </a:pPr>
+            <a:endParaRPr lang="en-US" dirty="0">
+              <a:solidFill>
+                <a:schemeClr val="bg1"/>
+              </a:solidFill>
+            </a:endParaRPr>
+          </a:p>
+          <a:p>
+            <a:pPr lvl="0"/>
+            <a:endParaRPr lang="en-US" dirty="0">
+              <a:sym typeface="Consolas"/>
+            </a:endParaRPr>
+          </a:p>
+          <a:p>
+            <a:pPr lvl="0"/>
+            <a:endParaRPr lang="en-US" dirty="0"/>
+          </a:p>
+          <a:p>
+            <a:pPr lvl="0"/>
+            <a:endParaRPr lang="en-US" dirty="0"/>
+          </a:p>
+        </p:txBody>
+      </p:sp>
+      <p:sp>
+        <p:nvSpPr>
+          <p:cNvPr id="3" name="TextBox 2">
+            <a:extLst>
+              <a:ext uri="{FF2B5EF4-FFF2-40B4-BE49-F238E27FC236}">
+                <a16:creationId xmlns:a16="http://schemas.microsoft.com/office/drawing/2014/main" id="{CD35D585-17CB-A1A3-D712-7F458F86A4FC}"/>
+              </a:ext>
+            </a:extLst>
+          </p:cNvPr>
+          <p:cNvSpPr txBox="1"/>
+          <p:nvPr/>
+        </p:nvSpPr>
+        <p:spPr>
+          <a:xfrm>
+            <a:off x="687657" y="2371493"/>
+            <a:ext cx="4572000" cy="2554545"/>
+          </a:xfrm>
+          <a:prstGeom prst="rect">
+            <a:avLst/>
+          </a:prstGeom>
+          <a:noFill/>
+        </p:spPr>
+        <p:txBody>
+          <a:bodyPr wrap="square">
+            <a:spAutoFit/>
+          </a:bodyPr>
+          <a:lstStyle/>
+          <a:p>
+            <a:pPr lvl="0"/>
+            <a:r>
+              <a:rPr lang="en-US" sz="2000" dirty="0">
+                <a:solidFill>
+                  <a:schemeClr val="bg1"/>
+                </a:solidFill>
+                <a:sym typeface="Consolas"/>
+              </a:rPr>
+              <a:t>try:</a:t>
+            </a:r>
+          </a:p>
+          <a:p>
+            <a:pPr lvl="0"/>
+            <a:r>
+              <a:rPr lang="en-US" sz="2000" dirty="0">
+                <a:solidFill>
+                  <a:schemeClr val="bg1"/>
+                </a:solidFill>
+                <a:sym typeface="Consolas"/>
+              </a:rPr>
+              <a:t>    result = 10 / 2</a:t>
+            </a:r>
+          </a:p>
+          <a:p>
+            <a:pPr lvl="0"/>
+            <a:r>
+              <a:rPr lang="en-US" sz="2000" dirty="0">
+                <a:solidFill>
+                  <a:schemeClr val="bg1"/>
+                </a:solidFill>
+                <a:sym typeface="Consolas"/>
+              </a:rPr>
+              <a:t>except ZeroDivisionError:</a:t>
+            </a:r>
+          </a:p>
+          <a:p>
+            <a:pPr lvl="0"/>
+            <a:r>
+              <a:rPr lang="en-US" sz="2000" dirty="0">
+                <a:solidFill>
+                  <a:schemeClr val="bg1"/>
+                </a:solidFill>
+                <a:sym typeface="Consolas"/>
+              </a:rPr>
+              <a:t>    print("Cannot divide by zero.")</a:t>
+            </a:r>
+          </a:p>
+          <a:p>
+            <a:pPr lvl="0"/>
+            <a:r>
+              <a:rPr lang="en-US" sz="2000" dirty="0">
+                <a:solidFill>
+                  <a:schemeClr val="bg1"/>
+                </a:solidFill>
+                <a:sym typeface="Consolas"/>
+              </a:rPr>
+              <a:t>else:</a:t>
+            </a:r>
+          </a:p>
+          <a:p>
+            <a:pPr lvl="0"/>
+            <a:r>
+              <a:rPr lang="en-US" sz="2000" dirty="0">
+                <a:solidFill>
+                  <a:schemeClr val="bg1"/>
+                </a:solidFill>
+                <a:sym typeface="Consolas"/>
+              </a:rPr>
+              <a:t>    print("Division successful.")</a:t>
+            </a:r>
+          </a:p>
+          <a:p>
+            <a:pPr lvl="0"/>
+            <a:r>
+              <a:rPr lang="en-US" sz="2000" dirty="0">
+                <a:solidFill>
+                  <a:schemeClr val="bg1"/>
+                </a:solidFill>
+                <a:sym typeface="Consolas"/>
+              </a:rPr>
+              <a:t>finally:</a:t>
+            </a:r>
+          </a:p>
+          <a:p>
+            <a:pPr lvl="0"/>
+            <a:r>
+              <a:rPr lang="en-US" sz="2000" dirty="0">
+                <a:solidFill>
+                  <a:schemeClr val="bg1"/>
+                </a:solidFill>
+                <a:sym typeface="Consolas"/>
+              </a:rPr>
+              <a:t>    print("Done.")</a:t>
+            </a:r>
+          </a:p>
+        </p:txBody>
+      </p:sp>
+    </p:spTree>
+    <p:extLst>
+      <p:ext uri="{BB962C8B-B14F-4D97-AF65-F5344CB8AC3E}">
+        <p14:creationId xmlns:p14="http://schemas.microsoft.com/office/powerpoint/2010/main" val="2410237747"/>
+      </p:ext>
+    </p:extLst>
+  </p:cSld>
+  <p:clrMapOvr>
+    <a:masterClrMapping/>
+  </p:clrMapOvr>
+  <p:timing>
+    <p:tnLst>
+      <p:par>
+        <p:cTn id="1" dur="indefinite" restart="never" nodeType="tmRoot">
+          <p:childTnLst>
+            <p:seq concurrent="1" nextAc="seek">
+              <p:cTn id="2" dur="indefinite" nodeType="mainSeq">
+                <p:childTnLst>
+                  <p:par>
+                    <p:cTn id="3" fill="hold">
+                      <p:stCondLst>
+                        <p:cond delay="indefinite"/>
+                      </p:stCondLst>
+                      <p:childTnLst>
+                        <p:par>
+                          <p:cTn id="4" fill="hold">
+                            <p:stCondLst>
+                              <p:cond delay="0"/>
+                            </p:stCondLst>
+                            <p:childTnLst>
+                              <p:par>
+                                <p:cTn id="5" presetID="1" presetClass="entr" presetSubtype="0" fill="hold" grpId="0" nodeType="clickEffect">
+                                  <p:stCondLst>
+                                    <p:cond delay="0"/>
+                                  </p:stCondLst>
+                                  <p:childTnLst>
+                                    <p:set>
+                                      <p:cBhvr>
+                                        <p:cTn id="6" dur="1" fill="hold">
+                                          <p:stCondLst>
+                                            <p:cond delay="0"/>
+                                          </p:stCondLst>
+                                        </p:cTn>
+                                        <p:tgtEl>
+                                          <p:spTgt spid="3"/>
+                                        </p:tgtEl>
+                                        <p:attrNameLst>
+                                          <p:attrName>style.visibility</p:attrName>
+                                        </p:attrNameLst>
+                                      </p:cBhvr>
+                                      <p:to>
+                                        <p:strVal val="visible"/>
+                                      </p:to>
+                                    </p:set>
+                                  </p:childTnLst>
+                                </p:cTn>
+                              </p:par>
+                            </p:childTnLst>
+                          </p:cTn>
+                        </p:par>
+                      </p:childTnLst>
+                    </p:cTn>
+                  </p:par>
+                </p:childTnLst>
+              </p:cTn>
+              <p:prevCondLst>
+                <p:cond evt="onPrev" delay="0">
+                  <p:tgtEl>
+                    <p:sldTgt/>
+                  </p:tgtEl>
+                </p:cond>
+              </p:prevCondLst>
+              <p:nextCondLst>
+                <p:cond evt="onNext" delay="0">
+                  <p:tgtEl>
+                    <p:sldTgt/>
+                  </p:tgtEl>
+                </p:cond>
+              </p:nextCondLst>
+            </p:seq>
+          </p:childTnLst>
+        </p:cTn>
+      </p:par>
+    </p:tnLst>
+    <p:bldLst>
+      <p:bldP spid="3" grpId="0"/>
+    </p:bldLst>
+  </p:timing>
+</p:sld>
+</file>
+
+<file path=ppt/slides/slide14.xml><?xml version="1.0" encoding="utf-8"?>
+<p:sld xmlns:a="http://schemas.openxmlformats.org/drawingml/2006/main" xmlns:r="http://schemas.openxmlformats.org/officeDocument/2006/relationships" xmlns:p="http://schemas.openxmlformats.org/presentationml/2006/main">
+  <p:cSld>
+    <p:spTree>
+      <p:nvGrpSpPr>
+        <p:cNvPr id="1" name="Shape 505"/>
+        <p:cNvGrpSpPr/>
+        <p:nvPr/>
+      </p:nvGrpSpPr>
+      <p:grpSpPr>
+        <a:xfrm>
+          <a:off x="0" y="0"/>
+          <a:ext cx="0" cy="0"/>
+          <a:chOff x="0" y="0"/>
+          <a:chExt cx="0" cy="0"/>
+        </a:xfrm>
+      </p:grpSpPr>
+      <p:sp>
+        <p:nvSpPr>
+          <p:cNvPr id="506" name="Google Shape;506;p61"/>
+          <p:cNvSpPr txBox="1">
+            <a:spLocks noGrp="1"/>
+          </p:cNvSpPr>
+          <p:nvPr>
+            <p:ph type="title"/>
+          </p:nvPr>
+        </p:nvSpPr>
+        <p:spPr>
+          <a:xfrm>
+            <a:off x="411480" y="308611"/>
+            <a:ext cx="6173470" cy="891778"/>
+          </a:xfrm>
+          <a:noFill/>
+          <a:ln>
+            <a:noFill/>
+          </a:ln>
+        </p:spPr>
+        <p:txBody>
+          <a:bodyPr spcFirstLastPara="1" wrap="square" lIns="91425" tIns="91425" rIns="91425" bIns="91425" anchor="t" anchorCtr="0">
+            <a:normAutofit/>
+          </a:bodyPr>
+          <a:lstStyle/>
+          <a:p>
+            <a:pPr lvl="0"/>
+            <a:r>
+              <a:rPr lang="en-US"/>
+              <a:t>RAISE</a:t>
+            </a:r>
+          </a:p>
+        </p:txBody>
+      </p:sp>
+      <p:sp>
+        <p:nvSpPr>
+          <p:cNvPr id="507" name="Google Shape;507;p61"/>
+          <p:cNvSpPr txBox="1">
+            <a:spLocks noGrp="1"/>
+          </p:cNvSpPr>
+          <p:nvPr>
+            <p:ph type="body" idx="1"/>
+          </p:nvPr>
+        </p:nvSpPr>
+        <p:spPr>
+          <a:xfrm>
+            <a:off x="240495" y="860782"/>
+            <a:ext cx="8516930" cy="3017520"/>
+          </a:xfrm>
+          <a:noFill/>
+          <a:ln>
+            <a:noFill/>
+          </a:ln>
+        </p:spPr>
+        <p:txBody>
+          <a:bodyPr spcFirstLastPara="1" wrap="square" lIns="91425" tIns="91425" rIns="91425" bIns="91425" anchor="t" anchorCtr="0">
+            <a:normAutofit/>
+          </a:bodyPr>
+          <a:lstStyle/>
+          <a:p>
+            <a:pPr lvl="0"/>
+            <a:r>
+              <a:rPr lang="en-US" dirty="0">
+                <a:solidFill>
+                  <a:schemeClr val="bg1"/>
+                </a:solidFill>
+              </a:rPr>
+              <a:t>“raise” is used to intentionally trigger an error</a:t>
+            </a:r>
+          </a:p>
+          <a:p>
+            <a:pPr lvl="0"/>
+            <a:r>
+              <a:rPr lang="en-US" dirty="0">
+                <a:solidFill>
+                  <a:schemeClr val="bg1"/>
+                </a:solidFill>
+              </a:rPr>
+              <a:t>Helps enforce rules and catch problems early</a:t>
+            </a:r>
+          </a:p>
+          <a:p>
+            <a:pPr lvl="0"/>
+            <a:r>
+              <a:rPr lang="en-US" dirty="0">
+                <a:solidFill>
+                  <a:schemeClr val="bg1"/>
+                </a:solidFill>
+              </a:rPr>
+              <a:t>Make your code more predictable and safe</a:t>
+            </a:r>
+          </a:p>
+          <a:p>
+            <a:pPr lvl="0"/>
+            <a:r>
+              <a:rPr lang="en-US" dirty="0">
+                <a:solidFill>
+                  <a:schemeClr val="bg1"/>
+                </a:solidFill>
+              </a:rPr>
+              <a:t>Useful for custom error messages or defining your own exceptions</a:t>
+            </a:r>
+          </a:p>
+          <a:p>
+            <a:pPr lvl="0"/>
+            <a:endParaRPr lang="en-US" dirty="0"/>
+          </a:p>
+          <a:p>
+            <a:pPr lvl="0"/>
+            <a:endParaRPr lang="en-US" dirty="0"/>
+          </a:p>
+          <a:p>
+            <a:pPr lvl="0"/>
+            <a:endParaRPr lang="en-US" dirty="0"/>
+          </a:p>
+        </p:txBody>
+      </p:sp>
+      <p:sp>
+        <p:nvSpPr>
+          <p:cNvPr id="3" name="TextBox 2">
+            <a:extLst>
+              <a:ext uri="{FF2B5EF4-FFF2-40B4-BE49-F238E27FC236}">
+                <a16:creationId xmlns:a16="http://schemas.microsoft.com/office/drawing/2014/main" id="{5B996DBA-7DE9-0229-30AC-41536D9BD04E}"/>
+              </a:ext>
+            </a:extLst>
+          </p:cNvPr>
+          <p:cNvSpPr txBox="1"/>
+          <p:nvPr/>
+        </p:nvSpPr>
+        <p:spPr>
+          <a:xfrm>
+            <a:off x="539982" y="2278104"/>
+            <a:ext cx="8064036" cy="2462213"/>
+          </a:xfrm>
+          <a:prstGeom prst="rect">
+            <a:avLst/>
+          </a:prstGeom>
+          <a:noFill/>
+        </p:spPr>
+        <p:txBody>
+          <a:bodyPr wrap="square">
+            <a:spAutoFit/>
+          </a:bodyPr>
+          <a:lstStyle/>
+          <a:p>
+            <a:pPr lvl="0"/>
+            <a:endParaRPr lang="en-US" dirty="0">
+              <a:solidFill>
+                <a:schemeClr val="bg1"/>
+              </a:solidFill>
+              <a:sym typeface="Consolas"/>
+            </a:endParaRPr>
+          </a:p>
+          <a:p>
+            <a:pPr lvl="0"/>
+            <a:r>
+              <a:rPr lang="en-US" dirty="0">
+                <a:solidFill>
+                  <a:schemeClr val="bg1"/>
+                </a:solidFill>
+                <a:sym typeface="Consolas"/>
+              </a:rPr>
+              <a:t>if age &lt; 0:</a:t>
+            </a:r>
+          </a:p>
+          <a:p>
+            <a:pPr lvl="0"/>
+            <a:r>
+              <a:rPr lang="en-US" dirty="0">
+                <a:solidFill>
+                  <a:schemeClr val="bg1"/>
+                </a:solidFill>
+                <a:sym typeface="Consolas"/>
+              </a:rPr>
+              <a:t>raise </a:t>
+            </a:r>
+            <a:r>
+              <a:rPr lang="en-US" dirty="0" err="1">
+                <a:solidFill>
+                  <a:schemeClr val="bg1"/>
+                </a:solidFill>
+                <a:sym typeface="Consolas"/>
+              </a:rPr>
+              <a:t>ValueError</a:t>
+            </a:r>
+            <a:r>
+              <a:rPr lang="en-US" dirty="0">
+                <a:solidFill>
+                  <a:schemeClr val="bg1"/>
+                </a:solidFill>
+                <a:sym typeface="Consolas"/>
+              </a:rPr>
+              <a:t>("Age cannot be negative.")</a:t>
+            </a:r>
+          </a:p>
+          <a:p>
+            <a:pPr lvl="0"/>
+            <a:endParaRPr lang="en-US" dirty="0">
+              <a:solidFill>
+                <a:schemeClr val="bg1"/>
+              </a:solidFill>
+              <a:sym typeface="Consolas"/>
+            </a:endParaRPr>
+          </a:p>
+          <a:p>
+            <a:pPr lvl="0"/>
+            <a:r>
+              <a:rPr lang="en-US" dirty="0">
+                <a:solidFill>
+                  <a:schemeClr val="bg1"/>
+                </a:solidFill>
+              </a:rPr>
+              <a:t>Built-in Exceptions</a:t>
+            </a:r>
+          </a:p>
+          <a:p>
+            <a:pPr lvl="0"/>
+            <a:r>
+              <a:rPr lang="en-US" dirty="0">
+                <a:solidFill>
+                  <a:schemeClr val="bg1"/>
+                </a:solidFill>
+                <a:sym typeface="Consolas"/>
+              </a:rPr>
+              <a:t>raise </a:t>
+            </a:r>
+            <a:r>
+              <a:rPr lang="en-US" dirty="0" err="1">
+                <a:solidFill>
+                  <a:schemeClr val="bg1"/>
+                </a:solidFill>
+                <a:sym typeface="Consolas"/>
+              </a:rPr>
+              <a:t>TypeError</a:t>
+            </a:r>
+            <a:r>
+              <a:rPr lang="en-US" dirty="0">
+                <a:solidFill>
+                  <a:schemeClr val="bg1"/>
+                </a:solidFill>
+                <a:sym typeface="Consolas"/>
+              </a:rPr>
+              <a:t>("This function only accepts strings.")</a:t>
+            </a:r>
+          </a:p>
+          <a:p>
+            <a:pPr lvl="0"/>
+            <a:r>
+              <a:rPr lang="en-US" dirty="0">
+                <a:solidFill>
+                  <a:schemeClr val="bg1"/>
+                </a:solidFill>
+                <a:sym typeface="Consolas"/>
+              </a:rPr>
+              <a:t>raise ZeroDivisionError("Cannot divide by zero.")</a:t>
+            </a:r>
+          </a:p>
+          <a:p>
+            <a:pPr lvl="0"/>
+            <a:endParaRPr lang="en-US" dirty="0">
+              <a:solidFill>
+                <a:schemeClr val="bg1"/>
+              </a:solidFill>
+              <a:sym typeface="Consolas"/>
+            </a:endParaRPr>
+          </a:p>
+          <a:p>
+            <a:pPr lvl="0"/>
+            <a:endParaRPr lang="en-US" dirty="0">
+              <a:solidFill>
+                <a:schemeClr val="bg1"/>
+              </a:solidFill>
+            </a:endParaRPr>
+          </a:p>
+          <a:p>
+            <a:pPr lvl="0"/>
+            <a:r>
+              <a:rPr lang="en-US" dirty="0">
+                <a:solidFill>
+                  <a:schemeClr val="bg1"/>
+                </a:solidFill>
+              </a:rPr>
+              <a:t>Raised errors can be caught and handled with try / except</a:t>
+            </a:r>
+          </a:p>
+          <a:p>
+            <a:pPr lvl="0"/>
+            <a:r>
+              <a:rPr lang="en-US" dirty="0">
+                <a:solidFill>
+                  <a:schemeClr val="bg1"/>
+                </a:solidFill>
+              </a:rPr>
+              <a:t>If not caught, they will be passed to the output and stop the program</a:t>
+            </a:r>
+          </a:p>
+        </p:txBody>
+      </p:sp>
+    </p:spTree>
+  </p:cSld>
+  <p:clrMapOvr>
+    <a:masterClrMapping/>
+  </p:clrMapOvr>
+  <p:timing>
+    <p:tnLst>
+      <p:par>
+        <p:cTn id="1" dur="indefinite" restart="never" nodeType="tmRoot">
+          <p:childTnLst>
+            <p:seq concurrent="1" nextAc="seek">
+              <p:cTn id="2" dur="indefinite" nodeType="mainSeq">
+                <p:childTnLst>
+                  <p:par>
+                    <p:cTn id="3" fill="hold">
+                      <p:stCondLst>
+                        <p:cond delay="indefinite"/>
+                      </p:stCondLst>
+                      <p:childTnLst>
+                        <p:par>
+                          <p:cTn id="4" fill="hold">
+                            <p:stCondLst>
+                              <p:cond delay="0"/>
+                            </p:stCondLst>
+                            <p:childTnLst>
+                              <p:par>
+                                <p:cTn id="5" presetID="1" presetClass="entr" presetSubtype="0" fill="hold" grpId="0" nodeType="clickEffect">
+                                  <p:stCondLst>
+                                    <p:cond delay="0"/>
+                                  </p:stCondLst>
+                                  <p:childTnLst>
+                                    <p:set>
+                                      <p:cBhvr>
+                                        <p:cTn id="6" dur="1" fill="hold">
+                                          <p:stCondLst>
+                                            <p:cond delay="0"/>
+                                          </p:stCondLst>
+                                        </p:cTn>
+                                        <p:tgtEl>
+                                          <p:spTgt spid="3"/>
+                                        </p:tgtEl>
+                                        <p:attrNameLst>
+                                          <p:attrName>style.visibility</p:attrName>
+                                        </p:attrNameLst>
+                                      </p:cBhvr>
+                                      <p:to>
+                                        <p:strVal val="visible"/>
+                                      </p:to>
+                                    </p:set>
+                                  </p:childTnLst>
+                                </p:cTn>
+                              </p:par>
+                            </p:childTnLst>
+                          </p:cTn>
+                        </p:par>
+                      </p:childTnLst>
+                    </p:cTn>
+                  </p:par>
+                </p:childTnLst>
+              </p:cTn>
+              <p:prevCondLst>
+                <p:cond evt="onPrev" delay="0">
+                  <p:tgtEl>
+                    <p:sldTgt/>
+                  </p:tgtEl>
+                </p:cond>
+              </p:prevCondLst>
+              <p:nextCondLst>
+                <p:cond evt="onNext" delay="0">
+                  <p:tgtEl>
+                    <p:sldTgt/>
+                  </p:tgtEl>
+                </p:cond>
+              </p:nextCondLst>
+            </p:seq>
+          </p:childTnLst>
+        </p:cTn>
+      </p:par>
+    </p:tnLst>
+    <p:bldLst>
+      <p:bldP spid="3" grpId="0"/>
+    </p:bldLst>
+  </p:timing>
+</p:sld>
+</file>
+
+<file path=ppt/slides/slide15.xml><?xml version="1.0" encoding="utf-8"?>
+<p:sld xmlns:a="http://schemas.openxmlformats.org/drawingml/2006/main" xmlns:r="http://schemas.openxmlformats.org/officeDocument/2006/relationships" xmlns:p="http://schemas.openxmlformats.org/presentationml/2006/main">
+  <p:cSld>
+    <p:spTree>
+      <p:nvGrpSpPr>
+        <p:cNvPr id="1" name="Shape 511">
+          <a:extLst>
+            <a:ext uri="{FF2B5EF4-FFF2-40B4-BE49-F238E27FC236}">
+              <a16:creationId xmlns:a16="http://schemas.microsoft.com/office/drawing/2014/main" id="{6B2C2EEC-5410-B106-F604-7BC328C4FA19}"/>
+            </a:ext>
+          </a:extLst>
+        </p:cNvPr>
+        <p:cNvGrpSpPr/>
+        <p:nvPr/>
+      </p:nvGrpSpPr>
+      <p:grpSpPr>
+        <a:xfrm>
+          <a:off x="0" y="0"/>
+          <a:ext cx="0" cy="0"/>
+          <a:chOff x="0" y="0"/>
+          <a:chExt cx="0" cy="0"/>
+        </a:xfrm>
+      </p:grpSpPr>
+      <p:sp>
+        <p:nvSpPr>
+          <p:cNvPr id="512" name="Google Shape;512;p62">
+            <a:extLst>
+              <a:ext uri="{FF2B5EF4-FFF2-40B4-BE49-F238E27FC236}">
+                <a16:creationId xmlns:a16="http://schemas.microsoft.com/office/drawing/2014/main" id="{1357D0BB-7E77-0CF9-EAE9-D2FEDE99C148}"/>
+              </a:ext>
+            </a:extLst>
+          </p:cNvPr>
+          <p:cNvSpPr txBox="1">
+            <a:spLocks noGrp="1"/>
+          </p:cNvSpPr>
+          <p:nvPr>
+            <p:ph type="title"/>
+          </p:nvPr>
+        </p:nvSpPr>
+        <p:spPr>
+          <a:xfrm>
+            <a:off x="411480" y="308611"/>
+            <a:ext cx="6173470" cy="891778"/>
+          </a:xfrm>
+          <a:noFill/>
+          <a:ln>
+            <a:noFill/>
+          </a:ln>
+        </p:spPr>
+        <p:txBody>
+          <a:bodyPr spcFirstLastPara="1" wrap="square" lIns="91425" tIns="91425" rIns="91425" bIns="91425" anchor="t" anchorCtr="0">
+            <a:normAutofit/>
+          </a:bodyPr>
+          <a:lstStyle/>
+          <a:p>
+            <a:pPr lvl="0"/>
+            <a:r>
+              <a:rPr lang="en-US" dirty="0"/>
+              <a:t>Exercise 1 (15 min)</a:t>
+            </a:r>
+          </a:p>
+        </p:txBody>
+      </p:sp>
+      <p:sp>
+        <p:nvSpPr>
+          <p:cNvPr id="3" name="Google Shape;513;p62">
+            <a:extLst>
+              <a:ext uri="{FF2B5EF4-FFF2-40B4-BE49-F238E27FC236}">
+                <a16:creationId xmlns:a16="http://schemas.microsoft.com/office/drawing/2014/main" id="{027B582E-4378-7CDA-7512-00D64A51374B}"/>
+              </a:ext>
+            </a:extLst>
+          </p:cNvPr>
+          <p:cNvSpPr txBox="1">
+            <a:spLocks noGrp="1"/>
+          </p:cNvSpPr>
+          <p:nvPr>
+            <p:ph type="body" idx="1"/>
+          </p:nvPr>
+        </p:nvSpPr>
+        <p:spPr>
+          <a:xfrm>
+            <a:off x="411480" y="1611630"/>
+            <a:ext cx="7847857" cy="3017520"/>
+          </a:xfrm>
+          <a:noFill/>
+          <a:ln>
+            <a:noFill/>
+          </a:ln>
+        </p:spPr>
+        <p:txBody>
+          <a:bodyPr spcFirstLastPara="1" wrap="square" lIns="91425" tIns="91425" rIns="91425" bIns="91425" anchor="t" anchorCtr="0">
+            <a:normAutofit/>
+          </a:bodyPr>
+          <a:lstStyle/>
+          <a:p>
+            <a:pPr lvl="0"/>
+            <a:r>
+              <a:rPr lang="en-US" dirty="0">
+                <a:solidFill>
+                  <a:schemeClr val="bg1"/>
+                </a:solidFill>
+              </a:rPr>
+              <a:t>What kind of errors can occur in pre-class Problem 2?</a:t>
+            </a:r>
+          </a:p>
+          <a:p>
+            <a:pPr lvl="0"/>
+            <a:endParaRPr lang="en-US" dirty="0">
+              <a:solidFill>
+                <a:schemeClr val="bg1"/>
+              </a:solidFill>
+            </a:endParaRPr>
+          </a:p>
+          <a:p>
+            <a:pPr lvl="0"/>
+            <a:r>
+              <a:rPr lang="en-US" dirty="0">
+                <a:solidFill>
+                  <a:schemeClr val="bg1"/>
+                </a:solidFill>
+              </a:rPr>
+              <a:t>Add in try-except blocks to catch errors and allow the program to continue gracefully after these errors occur. </a:t>
+            </a:r>
+          </a:p>
+        </p:txBody>
+      </p:sp>
+    </p:spTree>
+    <p:extLst>
+      <p:ext uri="{BB962C8B-B14F-4D97-AF65-F5344CB8AC3E}">
+        <p14:creationId xmlns:p14="http://schemas.microsoft.com/office/powerpoint/2010/main" val="1376424257"/>
+      </p:ext>
+    </p:extLst>
+  </p:cSld>
+  <p:clrMapOvr>
+    <a:masterClrMapping/>
+  </p:clrMapOvr>
+</p:sld>
+</file>
+
+<file path=ppt/slides/slide16.xml><?xml version="1.0" encoding="utf-8"?>
+<p:sld xmlns:a="http://schemas.openxmlformats.org/drawingml/2006/main" xmlns:r="http://schemas.openxmlformats.org/officeDocument/2006/relationships" xmlns:p="http://schemas.openxmlformats.org/presentationml/2006/main">
+  <p:cSld>
+    <p:spTree>
+      <p:nvGrpSpPr>
+        <p:cNvPr id="1" name="Shape 511"/>
+        <p:cNvGrpSpPr/>
+        <p:nvPr/>
+      </p:nvGrpSpPr>
+      <p:grpSpPr>
+        <a:xfrm>
+          <a:off x="0" y="0"/>
+          <a:ext cx="0" cy="0"/>
+          <a:chOff x="0" y="0"/>
+          <a:chExt cx="0" cy="0"/>
+        </a:xfrm>
+      </p:grpSpPr>
+      <p:sp>
+        <p:nvSpPr>
+          <p:cNvPr id="512" name="Google Shape;512;p62"/>
+          <p:cNvSpPr txBox="1">
+            <a:spLocks noGrp="1"/>
+          </p:cNvSpPr>
+          <p:nvPr>
+            <p:ph type="title"/>
+          </p:nvPr>
+        </p:nvSpPr>
+        <p:spPr>
+          <a:xfrm>
+            <a:off x="411480" y="308611"/>
+            <a:ext cx="6173470" cy="891778"/>
+          </a:xfrm>
+          <a:noFill/>
+          <a:ln>
+            <a:noFill/>
+          </a:ln>
+        </p:spPr>
+        <p:txBody>
+          <a:bodyPr spcFirstLastPara="1" wrap="square" lIns="91425" tIns="91425" rIns="91425" bIns="91425" anchor="t" anchorCtr="0">
+            <a:normAutofit/>
+          </a:bodyPr>
+          <a:lstStyle/>
+          <a:p>
+            <a:pPr lvl="0"/>
+            <a:r>
+              <a:rPr lang="en-US" dirty="0"/>
+              <a:t>Exercise 2 (20 min)</a:t>
+            </a:r>
+          </a:p>
+        </p:txBody>
+      </p:sp>
+      <p:sp>
+        <p:nvSpPr>
+          <p:cNvPr id="513" name="Google Shape;513;p62"/>
+          <p:cNvSpPr txBox="1">
+            <a:spLocks noGrp="1"/>
+          </p:cNvSpPr>
+          <p:nvPr>
+            <p:ph type="body" idx="1"/>
+          </p:nvPr>
+        </p:nvSpPr>
+        <p:spPr>
+          <a:xfrm>
+            <a:off x="411480" y="1611630"/>
+            <a:ext cx="7847857" cy="3017520"/>
+          </a:xfrm>
+          <a:noFill/>
+          <a:ln>
+            <a:noFill/>
+          </a:ln>
+        </p:spPr>
+        <p:txBody>
+          <a:bodyPr spcFirstLastPara="1" wrap="square" lIns="91425" tIns="91425" rIns="91425" bIns="91425" anchor="t" anchorCtr="0">
+            <a:normAutofit/>
+          </a:bodyPr>
+          <a:lstStyle/>
+          <a:p>
+            <a:pPr lvl="0"/>
+            <a:r>
+              <a:rPr lang="en-US" dirty="0">
+                <a:solidFill>
+                  <a:schemeClr val="bg1"/>
+                </a:solidFill>
+              </a:rPr>
+              <a:t>Write a block of code that takes in user input until they guess the random number</a:t>
+            </a:r>
+          </a:p>
+          <a:p>
+            <a:pPr lvl="0"/>
+            <a:r>
+              <a:rPr lang="en-US" dirty="0">
+                <a:solidFill>
+                  <a:schemeClr val="bg1"/>
+                </a:solidFill>
+              </a:rPr>
+              <a:t>Prompt the user to help them with their guess</a:t>
+            </a:r>
+          </a:p>
+          <a:p>
+            <a:pPr lvl="0"/>
+            <a:r>
+              <a:rPr lang="en-US" dirty="0">
+                <a:solidFill>
+                  <a:schemeClr val="bg1"/>
+                </a:solidFill>
+              </a:rPr>
+              <a:t>Handle the following situations:</a:t>
+            </a:r>
+          </a:p>
+          <a:p>
+            <a:pPr lvl="1"/>
+            <a:r>
+              <a:rPr lang="en-US" dirty="0">
+                <a:solidFill>
+                  <a:schemeClr val="bg1"/>
+                </a:solidFill>
+              </a:rPr>
+              <a:t>User does not input the right python data type</a:t>
+            </a:r>
+          </a:p>
+          <a:p>
+            <a:pPr lvl="1"/>
+            <a:r>
+              <a:rPr lang="en-US" dirty="0">
+                <a:solidFill>
+                  <a:schemeClr val="bg1"/>
+                </a:solidFill>
+              </a:rPr>
+              <a:t>User inputs a negative number</a:t>
+            </a:r>
+          </a:p>
+          <a:p>
+            <a:pPr lvl="1"/>
+            <a:r>
+              <a:rPr lang="en-US" dirty="0">
+                <a:solidFill>
+                  <a:schemeClr val="bg1"/>
+                </a:solidFill>
+              </a:rPr>
+              <a:t>User inputs a number outside the guess range</a:t>
+            </a:r>
+          </a:p>
+          <a:p>
+            <a:pPr marL="604838" lvl="1" indent="0">
+              <a:buNone/>
+            </a:pPr>
+            <a:r>
+              <a:rPr lang="en-US" dirty="0">
+                <a:solidFill>
+                  <a:schemeClr val="bg1"/>
+                </a:solidFill>
+              </a:rPr>
+              <a:t>Hint: use </a:t>
+            </a:r>
+            <a:r>
+              <a:rPr lang="en-US" dirty="0" err="1">
+                <a:solidFill>
+                  <a:schemeClr val="bg1"/>
+                </a:solidFill>
+              </a:rPr>
+              <a:t>random.randomint</a:t>
+            </a:r>
+            <a:r>
+              <a:rPr lang="en-US" dirty="0">
+                <a:solidFill>
+                  <a:schemeClr val="bg1"/>
+                </a:solidFill>
+              </a:rPr>
+              <a:t>() to generate a random number</a:t>
+            </a:r>
+          </a:p>
+        </p:txBody>
+      </p:sp>
+    </p:spTree>
+  </p:cSld>
+  <p:clrMapOvr>
+    <a:masterClrMapping/>
+  </p:clrMapOvr>
+</p:sld>
+</file>
+
+<file path=ppt/slides/slide17.xml><?xml version="1.0" encoding="utf-8"?>
+<p:sld xmlns:a="http://schemas.openxmlformats.org/drawingml/2006/main" xmlns:r="http://schemas.openxmlformats.org/officeDocument/2006/relationships" xmlns:p="http://schemas.openxmlformats.org/presentationml/2006/main">
+  <p:cSld>
+    <p:spTree>
+      <p:nvGrpSpPr>
         <p:cNvPr id="1" name="Shape 517"/>
         <p:cNvGrpSpPr/>
         <p:nvPr/>
@@ -44358,8 +46654,8 @@
           <a:p>
             <a:pPr lvl="0"/>
             <a:r>
-              <a:rPr lang="en-US"/>
-              <a:t>FINAL CODING EXERCISE</a:t>
+              <a:rPr lang="en-US" dirty="0"/>
+              <a:t>Exercise 3 (20 min)</a:t>
             </a:r>
           </a:p>
         </p:txBody>
@@ -44376,8 +46672,8 @@
         </p:nvSpPr>
         <p:spPr>
           <a:xfrm>
-            <a:off x="411480" y="1611630"/>
-            <a:ext cx="5096351" cy="3017520"/>
+            <a:off x="411479" y="1200389"/>
+            <a:ext cx="8390549" cy="3634500"/>
           </a:xfrm>
           <a:noFill/>
           <a:ln>
@@ -44386,66 +46682,43 @@
         </p:spPr>
         <p:txBody>
           <a:bodyPr spcFirstLastPara="1" wrap="square" lIns="91425" tIns="91425" rIns="91425" bIns="91425" anchor="t" anchorCtr="0">
-            <a:normAutofit fontScale="77500" lnSpcReduction="20000"/>
+            <a:normAutofit/>
           </a:bodyPr>
           <a:lstStyle/>
           <a:p>
             <a:pPr lvl="0"/>
             <a:r>
-              <a:rPr lang="en-US"/>
-              <a:t>20 min </a:t>
-            </a:r>
-          </a:p>
-          <a:p>
-            <a:pPr lvl="0"/>
-            <a:r>
-              <a:rPr lang="en-US"/>
+              <a:rPr lang="en-US" sz="1400" dirty="0">
+                <a:solidFill>
+                  <a:schemeClr val="bg1"/>
+                </a:solidFill>
+              </a:rPr>
               <a:t>Given a list of numbers, write a program that:</a:t>
             </a:r>
           </a:p>
           <a:p>
             <a:pPr lvl="0"/>
-            <a:r>
-              <a:rPr lang="en-US"/>
-              <a:t>Loops through the list</a:t>
-            </a:r>
+            <a:endParaRPr lang="en-US" sz="1400" dirty="0">
+              <a:solidFill>
+                <a:schemeClr val="bg1"/>
+              </a:solidFill>
+            </a:endParaRPr>
           </a:p>
           <a:p>
             <a:pPr lvl="0"/>
             <a:r>
-              <a:rPr lang="en-US"/>
-              <a:t>Skips any None values or non-integer types with an error message using try/except</a:t>
-            </a:r>
-          </a:p>
-          <a:p>
-            <a:pPr lvl="0"/>
-            <a:r>
-              <a:rPr lang="en-US"/>
-              <a:t>Raises a ValueError if it finds a negative number (stops the program)</a:t>
-            </a:r>
-          </a:p>
-          <a:p>
-            <a:pPr lvl="0"/>
-            <a:r>
-              <a:rPr lang="en-US"/>
-              <a:t>Collects all valid positive integers into a new list</a:t>
-            </a:r>
-          </a:p>
-          <a:p>
-            <a:pPr lvl="0"/>
-            <a:r>
-              <a:rPr lang="en-US"/>
-              <a:t>Prints the new list and the sum of its numbers</a:t>
-            </a:r>
-          </a:p>
-          <a:p>
-            <a:pPr lvl="0"/>
-            <a:r>
-              <a:rPr lang="en-US"/>
-              <a:t>List: </a:t>
+              <a:rPr lang="en-US" sz="1400" dirty="0">
+                <a:solidFill>
+                  <a:schemeClr val="bg1"/>
+                </a:solidFill>
+              </a:rPr>
+              <a:t>Loops through the List: </a:t>
             </a:r>
             <a:r>
-              <a:rPr lang="en-US">
+              <a:rPr lang="en-US" sz="1400" dirty="0">
+                <a:solidFill>
+                  <a:schemeClr val="bg1"/>
+                </a:solidFill>
                 <a:sym typeface="Consolas"/>
               </a:rPr>
               <a:t>[10, -5, 20, ‘hello’, 5.2, 15, None, 30]</a:t>
@@ -44453,42 +46726,178 @@
           </a:p>
           <a:p>
             <a:pPr lvl="0"/>
+            <a:endParaRPr lang="en-US" sz="1400" dirty="0">
+              <a:solidFill>
+                <a:schemeClr val="bg1"/>
+              </a:solidFill>
+              <a:sym typeface="Consolas"/>
+            </a:endParaRPr>
+          </a:p>
+          <a:p>
+            <a:pPr lvl="0"/>
             <a:r>
-              <a:rPr lang="en-US"/>
+              <a:rPr lang="en-US" sz="1400" dirty="0">
+                <a:solidFill>
+                  <a:schemeClr val="bg1"/>
+                </a:solidFill>
+              </a:rPr>
+              <a:t>Skips any None values or non-integer types with an error message using try/except</a:t>
+            </a:r>
+          </a:p>
+          <a:p>
+            <a:pPr lvl="0"/>
+            <a:r>
+              <a:rPr lang="en-US" sz="1400" dirty="0">
+                <a:solidFill>
+                  <a:schemeClr val="bg1"/>
+                </a:solidFill>
+              </a:rPr>
+              <a:t>Raises a </a:t>
+            </a:r>
+            <a:r>
+              <a:rPr lang="en-US" sz="1400" dirty="0" err="1">
+                <a:solidFill>
+                  <a:schemeClr val="bg1"/>
+                </a:solidFill>
+              </a:rPr>
+              <a:t>ValueError</a:t>
+            </a:r>
+            <a:r>
+              <a:rPr lang="en-US" sz="1400" dirty="0">
+                <a:solidFill>
+                  <a:schemeClr val="bg1"/>
+                </a:solidFill>
+              </a:rPr>
+              <a:t> if it finds a negative number (stops the program)</a:t>
+            </a:r>
+          </a:p>
+          <a:p>
+            <a:pPr lvl="0"/>
+            <a:endParaRPr lang="en-US" sz="1400" dirty="0">
+              <a:solidFill>
+                <a:schemeClr val="bg1"/>
+              </a:solidFill>
+            </a:endParaRPr>
+          </a:p>
+          <a:p>
+            <a:pPr lvl="0"/>
+            <a:r>
+              <a:rPr lang="en-US" sz="1400" dirty="0">
+                <a:solidFill>
+                  <a:schemeClr val="bg1"/>
+                </a:solidFill>
+              </a:rPr>
+              <a:t>Collects all valid positive integers into a new list</a:t>
+            </a:r>
+          </a:p>
+          <a:p>
+            <a:pPr lvl="0"/>
+            <a:endParaRPr lang="en-US" sz="1400" dirty="0">
+              <a:solidFill>
+                <a:schemeClr val="bg1"/>
+              </a:solidFill>
+            </a:endParaRPr>
+          </a:p>
+          <a:p>
+            <a:pPr lvl="0"/>
+            <a:r>
+              <a:rPr lang="en-US" sz="1400" dirty="0">
+                <a:solidFill>
+                  <a:schemeClr val="bg1"/>
+                </a:solidFill>
+              </a:rPr>
+              <a:t>Prints the new list and the sum of its numbers</a:t>
+            </a:r>
+          </a:p>
+          <a:p>
+            <a:pPr lvl="0"/>
+            <a:endParaRPr lang="en-US" sz="1400" dirty="0">
+              <a:solidFill>
+                <a:schemeClr val="bg1"/>
+              </a:solidFill>
+            </a:endParaRPr>
+          </a:p>
+          <a:p>
+            <a:pPr lvl="0"/>
+            <a:r>
+              <a:rPr lang="en-US" sz="1400" dirty="0">
+                <a:solidFill>
+                  <a:schemeClr val="bg1"/>
+                </a:solidFill>
+              </a:rPr>
               <a:t>Once you have a solution, remove -5 from the list and run it again.</a:t>
             </a:r>
           </a:p>
           <a:p>
             <a:pPr lvl="0"/>
+            <a:endParaRPr lang="en-US" sz="1400" dirty="0">
+              <a:solidFill>
+                <a:schemeClr val="bg1"/>
+              </a:solidFill>
+            </a:endParaRPr>
+          </a:p>
+          <a:p>
+            <a:pPr lvl="0"/>
             <a:r>
-              <a:rPr lang="en-US"/>
+              <a:rPr lang="en-US" sz="1400" dirty="0">
+                <a:solidFill>
+                  <a:schemeClr val="bg1"/>
+                </a:solidFill>
+              </a:rPr>
               <a:t>Hints:  </a:t>
             </a:r>
           </a:p>
           <a:p>
             <a:pPr lvl="0"/>
             <a:r>
-              <a:rPr lang="en-US"/>
+              <a:rPr lang="en-US" sz="1400" dirty="0">
+                <a:solidFill>
+                  <a:schemeClr val="bg1"/>
+                </a:solidFill>
+              </a:rPr>
               <a:t>Use </a:t>
             </a:r>
             <a:r>
-              <a:rPr lang="en-US">
+              <a:rPr lang="en-US" sz="1400" dirty="0" err="1">
+                <a:solidFill>
+                  <a:schemeClr val="bg1"/>
+                </a:solidFill>
                 <a:sym typeface="Consolas"/>
               </a:rPr>
-              <a:t>isinstance(item, int) </a:t>
+              <a:t>isinstance</a:t>
             </a:r>
             <a:r>
-              <a:rPr lang="en-US"/>
+              <a:rPr lang="en-US" sz="1400" dirty="0">
+                <a:solidFill>
+                  <a:schemeClr val="bg1"/>
+                </a:solidFill>
+                <a:sym typeface="Consolas"/>
+              </a:rPr>
+              <a:t>(item, int) </a:t>
+            </a:r>
+            <a:r>
+              <a:rPr lang="en-US" sz="1400" dirty="0">
+                <a:solidFill>
+                  <a:schemeClr val="bg1"/>
+                </a:solidFill>
+              </a:rPr>
               <a:t>to check types</a:t>
             </a:r>
           </a:p>
           <a:p>
             <a:pPr lvl="0"/>
             <a:r>
-              <a:rPr lang="en-US"/>
+              <a:rPr lang="en-US" sz="1400" dirty="0">
+                <a:solidFill>
+                  <a:schemeClr val="bg1"/>
+                </a:solidFill>
+              </a:rPr>
               <a:t>Build the valid list as you go</a:t>
             </a:r>
-            <a:endParaRPr lang="en-US">
+            <a:endParaRPr lang="en-US" sz="1400" dirty="0">
+              <a:solidFill>
+                <a:schemeClr val="bg1"/>
+              </a:solidFill>
               <a:sym typeface="Consolas"/>
             </a:endParaRPr>
           </a:p>
@@ -44503,6 +46912,632 @@
 </file>
 
 <file path=ppt/slides/slide2.xml><?xml version="1.0" encoding="utf-8"?>
+<p:sld xmlns:a="http://schemas.openxmlformats.org/drawingml/2006/main" xmlns:r="http://schemas.openxmlformats.org/officeDocument/2006/relationships" xmlns:p="http://schemas.openxmlformats.org/presentationml/2006/main">
+  <p:cSld>
+    <p:spTree>
+      <p:nvGrpSpPr>
+        <p:cNvPr id="1" name="">
+          <a:extLst>
+            <a:ext uri="{FF2B5EF4-FFF2-40B4-BE49-F238E27FC236}">
+              <a16:creationId xmlns:a16="http://schemas.microsoft.com/office/drawing/2014/main" id="{372D87CF-5E92-D709-ADC1-CD5AB2C3F775}"/>
+            </a:ext>
+          </a:extLst>
+        </p:cNvPr>
+        <p:cNvGrpSpPr/>
+        <p:nvPr/>
+      </p:nvGrpSpPr>
+      <p:grpSpPr>
+        <a:xfrm>
+          <a:off x="0" y="0"/>
+          <a:ext cx="0" cy="0"/>
+          <a:chOff x="0" y="0"/>
+          <a:chExt cx="0" cy="0"/>
+        </a:xfrm>
+      </p:grpSpPr>
+      <p:sp>
+        <p:nvSpPr>
+          <p:cNvPr id="2" name="Title 1">
+            <a:extLst>
+              <a:ext uri="{FF2B5EF4-FFF2-40B4-BE49-F238E27FC236}">
+                <a16:creationId xmlns:a16="http://schemas.microsoft.com/office/drawing/2014/main" id="{2AEBB9CF-99E0-34C2-13BD-CE711791B329}"/>
+              </a:ext>
+            </a:extLst>
+          </p:cNvPr>
+          <p:cNvSpPr>
+            <a:spLocks noGrp="1"/>
+          </p:cNvSpPr>
+          <p:nvPr>
+            <p:ph type="title"/>
+          </p:nvPr>
+        </p:nvSpPr>
+        <p:spPr/>
+        <p:txBody>
+          <a:bodyPr/>
+          <a:lstStyle/>
+          <a:p>
+            <a:br>
+              <a:rPr lang="en-US" dirty="0"/>
+            </a:br>
+            <a:r>
+              <a:rPr lang="en-US" dirty="0"/>
+              <a:t>Course Schedule</a:t>
+            </a:r>
+          </a:p>
+        </p:txBody>
+      </p:sp>
+      <p:pic>
+        <p:nvPicPr>
+          <p:cNvPr id="7" name="Content Placeholder 6">
+            <a:extLst>
+              <a:ext uri="{FF2B5EF4-FFF2-40B4-BE49-F238E27FC236}">
+                <a16:creationId xmlns:a16="http://schemas.microsoft.com/office/drawing/2014/main" id="{D6C03BA8-C242-A7E3-06B9-2FDDD142A3E2}"/>
+              </a:ext>
+            </a:extLst>
+          </p:cNvPr>
+          <p:cNvPicPr>
+            <a:picLocks noGrp="1" noChangeAspect="1"/>
+          </p:cNvPicPr>
+          <p:nvPr>
+            <p:ph idx="1"/>
+          </p:nvPr>
+        </p:nvPicPr>
+        <p:blipFill>
+          <a:blip r:embed="rId3"/>
+          <a:stretch>
+            <a:fillRect/>
+          </a:stretch>
+        </p:blipFill>
+        <p:spPr>
+          <a:xfrm>
+            <a:off x="381000" y="989100"/>
+            <a:ext cx="8382000" cy="3716356"/>
+          </a:xfrm>
+          <a:prstGeom prst="rect">
+            <a:avLst/>
+          </a:prstGeom>
+          <a:noFill/>
+          <a:ln>
+            <a:noFill/>
+          </a:ln>
+        </p:spPr>
+      </p:pic>
+      <p:sp>
+        <p:nvSpPr>
+          <p:cNvPr id="8" name="Rectangle 7">
+            <a:extLst>
+              <a:ext uri="{FF2B5EF4-FFF2-40B4-BE49-F238E27FC236}">
+                <a16:creationId xmlns:a16="http://schemas.microsoft.com/office/drawing/2014/main" id="{0C366FE1-DAFA-E7EC-025F-E1D1E8686851}"/>
+              </a:ext>
+            </a:extLst>
+          </p:cNvPr>
+          <p:cNvSpPr/>
+          <p:nvPr/>
+        </p:nvSpPr>
+        <p:spPr>
+          <a:xfrm>
+            <a:off x="97505" y="2419351"/>
+            <a:ext cx="4713249" cy="227205"/>
+          </a:xfrm>
+          <a:prstGeom prst="rect">
+            <a:avLst/>
+          </a:prstGeom>
+          <a:noFill/>
+          <a:ln w="38100">
+            <a:solidFill>
+              <a:srgbClr val="FF0000"/>
+            </a:solidFill>
+          </a:ln>
+        </p:spPr>
+        <p:style>
+          <a:lnRef idx="2">
+            <a:schemeClr val="accent1">
+              <a:shade val="15000"/>
+            </a:schemeClr>
+          </a:lnRef>
+          <a:fillRef idx="1">
+            <a:schemeClr val="accent1"/>
+          </a:fillRef>
+          <a:effectRef idx="0">
+            <a:schemeClr val="accent1"/>
+          </a:effectRef>
+          <a:fontRef idx="minor">
+            <a:schemeClr val="lt1"/>
+          </a:fontRef>
+        </p:style>
+        <p:txBody>
+          <a:bodyPr rtlCol="0" anchor="ctr"/>
+          <a:lstStyle/>
+          <a:p>
+            <a:pPr algn="ctr"/>
+            <a:endParaRPr lang="en-US" sz="1800" dirty="0"/>
+          </a:p>
+        </p:txBody>
+      </p:sp>
+    </p:spTree>
+    <p:extLst>
+      <p:ext uri="{BB962C8B-B14F-4D97-AF65-F5344CB8AC3E}">
+        <p14:creationId xmlns:p14="http://schemas.microsoft.com/office/powerpoint/2010/main" val="1919185427"/>
+      </p:ext>
+    </p:extLst>
+  </p:cSld>
+  <p:clrMapOvr>
+    <a:masterClrMapping/>
+  </p:clrMapOvr>
+</p:sld>
+</file>
+
+<file path=ppt/slides/slide3.xml><?xml version="1.0" encoding="utf-8"?>
+<p:sld xmlns:a="http://schemas.openxmlformats.org/drawingml/2006/main" xmlns:r="http://schemas.openxmlformats.org/officeDocument/2006/relationships" xmlns:p="http://schemas.openxmlformats.org/presentationml/2006/main">
+  <p:cSld>
+    <p:spTree>
+      <p:nvGrpSpPr>
+        <p:cNvPr id="1" name="Shape 470">
+          <a:extLst>
+            <a:ext uri="{FF2B5EF4-FFF2-40B4-BE49-F238E27FC236}">
+              <a16:creationId xmlns:a16="http://schemas.microsoft.com/office/drawing/2014/main" id="{331C143A-1CF1-E401-0CB5-D7BA22316B98}"/>
+            </a:ext>
+          </a:extLst>
+        </p:cNvPr>
+        <p:cNvGrpSpPr/>
+        <p:nvPr/>
+      </p:nvGrpSpPr>
+      <p:grpSpPr>
+        <a:xfrm>
+          <a:off x="0" y="0"/>
+          <a:ext cx="0" cy="0"/>
+          <a:chOff x="0" y="0"/>
+          <a:chExt cx="0" cy="0"/>
+        </a:xfrm>
+      </p:grpSpPr>
+      <p:sp>
+        <p:nvSpPr>
+          <p:cNvPr id="471" name="Google Shape;471;p55">
+            <a:extLst>
+              <a:ext uri="{FF2B5EF4-FFF2-40B4-BE49-F238E27FC236}">
+                <a16:creationId xmlns:a16="http://schemas.microsoft.com/office/drawing/2014/main" id="{55422540-3734-61F7-53F7-602380429E8F}"/>
+              </a:ext>
+            </a:extLst>
+          </p:cNvPr>
+          <p:cNvSpPr txBox="1">
+            <a:spLocks noGrp="1"/>
+          </p:cNvSpPr>
+          <p:nvPr>
+            <p:ph type="title"/>
+          </p:nvPr>
+        </p:nvSpPr>
+        <p:spPr>
+          <a:xfrm>
+            <a:off x="3578426" y="2125861"/>
+            <a:ext cx="6173470" cy="891778"/>
+          </a:xfrm>
+          <a:noFill/>
+          <a:ln>
+            <a:noFill/>
+          </a:ln>
+        </p:spPr>
+        <p:txBody>
+          <a:bodyPr spcFirstLastPara="1" wrap="square" lIns="91425" tIns="91425" rIns="91425" bIns="91425" anchor="t" anchorCtr="0">
+            <a:normAutofit/>
+          </a:bodyPr>
+          <a:lstStyle/>
+          <a:p>
+            <a:pPr lvl="0"/>
+            <a:r>
+              <a:rPr lang="en-US" dirty="0"/>
+              <a:t>Review</a:t>
+            </a:r>
+          </a:p>
+        </p:txBody>
+      </p:sp>
+    </p:spTree>
+    <p:extLst>
+      <p:ext uri="{BB962C8B-B14F-4D97-AF65-F5344CB8AC3E}">
+        <p14:creationId xmlns:p14="http://schemas.microsoft.com/office/powerpoint/2010/main" val="934622849"/>
+      </p:ext>
+    </p:extLst>
+  </p:cSld>
+  <p:clrMapOvr>
+    <a:masterClrMapping/>
+  </p:clrMapOvr>
+</p:sld>
+</file>
+
+<file path=ppt/slides/slide4.xml><?xml version="1.0" encoding="utf-8"?>
+<p:sld xmlns:a="http://schemas.openxmlformats.org/drawingml/2006/main" xmlns:r="http://schemas.openxmlformats.org/officeDocument/2006/relationships" xmlns:p="http://schemas.openxmlformats.org/presentationml/2006/main">
+  <p:cSld>
+    <p:spTree>
+      <p:nvGrpSpPr>
+        <p:cNvPr id="1" name="Shape 470">
+          <a:extLst>
+            <a:ext uri="{FF2B5EF4-FFF2-40B4-BE49-F238E27FC236}">
+              <a16:creationId xmlns:a16="http://schemas.microsoft.com/office/drawing/2014/main" id="{1105E84A-1205-0701-E7F9-9675FAC2D835}"/>
+            </a:ext>
+          </a:extLst>
+        </p:cNvPr>
+        <p:cNvGrpSpPr/>
+        <p:nvPr/>
+      </p:nvGrpSpPr>
+      <p:grpSpPr>
+        <a:xfrm>
+          <a:off x="0" y="0"/>
+          <a:ext cx="0" cy="0"/>
+          <a:chOff x="0" y="0"/>
+          <a:chExt cx="0" cy="0"/>
+        </a:xfrm>
+      </p:grpSpPr>
+      <p:sp>
+        <p:nvSpPr>
+          <p:cNvPr id="471" name="Google Shape;471;p55">
+            <a:extLst>
+              <a:ext uri="{FF2B5EF4-FFF2-40B4-BE49-F238E27FC236}">
+                <a16:creationId xmlns:a16="http://schemas.microsoft.com/office/drawing/2014/main" id="{CEB7E12F-E2C9-500B-63E1-77AA22B0D1BE}"/>
+              </a:ext>
+            </a:extLst>
+          </p:cNvPr>
+          <p:cNvSpPr txBox="1">
+            <a:spLocks noGrp="1"/>
+          </p:cNvSpPr>
+          <p:nvPr>
+            <p:ph type="title"/>
+          </p:nvPr>
+        </p:nvSpPr>
+        <p:spPr>
+          <a:xfrm>
+            <a:off x="2054426" y="2356319"/>
+            <a:ext cx="6173470" cy="891778"/>
+          </a:xfrm>
+          <a:noFill/>
+          <a:ln>
+            <a:noFill/>
+          </a:ln>
+        </p:spPr>
+        <p:txBody>
+          <a:bodyPr spcFirstLastPara="1" wrap="square" lIns="91425" tIns="91425" rIns="91425" bIns="91425" anchor="t" anchorCtr="0">
+            <a:normAutofit/>
+          </a:bodyPr>
+          <a:lstStyle/>
+          <a:p>
+            <a:pPr lvl="0"/>
+            <a:r>
+              <a:rPr lang="en-US" dirty="0"/>
+              <a:t>What did we do last lesson?</a:t>
+            </a:r>
+          </a:p>
+        </p:txBody>
+      </p:sp>
+    </p:spTree>
+    <p:extLst>
+      <p:ext uri="{BB962C8B-B14F-4D97-AF65-F5344CB8AC3E}">
+        <p14:creationId xmlns:p14="http://schemas.microsoft.com/office/powerpoint/2010/main" val="1808581615"/>
+      </p:ext>
+    </p:extLst>
+  </p:cSld>
+  <p:clrMapOvr>
+    <a:masterClrMapping/>
+  </p:clrMapOvr>
+</p:sld>
+</file>
+
+<file path=ppt/slides/slide5.xml><?xml version="1.0" encoding="utf-8"?>
+<p:sld xmlns:a="http://schemas.openxmlformats.org/drawingml/2006/main" xmlns:r="http://schemas.openxmlformats.org/officeDocument/2006/relationships" xmlns:p="http://schemas.openxmlformats.org/presentationml/2006/main">
+  <p:cSld>
+    <p:spTree>
+      <p:nvGrpSpPr>
+        <p:cNvPr id="1" name="Shape 470">
+          <a:extLst>
+            <a:ext uri="{FF2B5EF4-FFF2-40B4-BE49-F238E27FC236}">
+              <a16:creationId xmlns:a16="http://schemas.microsoft.com/office/drawing/2014/main" id="{A69CB039-FD37-0C39-F21F-C7BACD8C7348}"/>
+            </a:ext>
+          </a:extLst>
+        </p:cNvPr>
+        <p:cNvGrpSpPr/>
+        <p:nvPr/>
+      </p:nvGrpSpPr>
+      <p:grpSpPr>
+        <a:xfrm>
+          <a:off x="0" y="0"/>
+          <a:ext cx="0" cy="0"/>
+          <a:chOff x="0" y="0"/>
+          <a:chExt cx="0" cy="0"/>
+        </a:xfrm>
+      </p:grpSpPr>
+      <p:sp>
+        <p:nvSpPr>
+          <p:cNvPr id="471" name="Google Shape;471;p55">
+            <a:extLst>
+              <a:ext uri="{FF2B5EF4-FFF2-40B4-BE49-F238E27FC236}">
+                <a16:creationId xmlns:a16="http://schemas.microsoft.com/office/drawing/2014/main" id="{9B8D174E-8CC3-13F6-9772-7F086E366F56}"/>
+              </a:ext>
+            </a:extLst>
+          </p:cNvPr>
+          <p:cNvSpPr txBox="1">
+            <a:spLocks noGrp="1"/>
+          </p:cNvSpPr>
+          <p:nvPr>
+            <p:ph type="title"/>
+          </p:nvPr>
+        </p:nvSpPr>
+        <p:spPr>
+          <a:xfrm>
+            <a:off x="359440" y="423441"/>
+            <a:ext cx="6173470" cy="891778"/>
+          </a:xfrm>
+          <a:noFill/>
+          <a:ln>
+            <a:noFill/>
+          </a:ln>
+        </p:spPr>
+        <p:txBody>
+          <a:bodyPr spcFirstLastPara="1" wrap="square" lIns="91425" tIns="91425" rIns="91425" bIns="91425" anchor="t" anchorCtr="0">
+            <a:normAutofit/>
+          </a:bodyPr>
+          <a:lstStyle/>
+          <a:p>
+            <a:pPr lvl="0"/>
+            <a:r>
+              <a:rPr lang="en-US" dirty="0"/>
+              <a:t>Pre Class Problem 1</a:t>
+            </a:r>
+          </a:p>
+        </p:txBody>
+      </p:sp>
+      <p:sp>
+        <p:nvSpPr>
+          <p:cNvPr id="3" name="TextBox 2">
+            <a:extLst>
+              <a:ext uri="{FF2B5EF4-FFF2-40B4-BE49-F238E27FC236}">
+                <a16:creationId xmlns:a16="http://schemas.microsoft.com/office/drawing/2014/main" id="{E0392748-B27B-1B59-3E8A-2EF44BD57245}"/>
+              </a:ext>
+            </a:extLst>
+          </p:cNvPr>
+          <p:cNvSpPr txBox="1"/>
+          <p:nvPr/>
+        </p:nvSpPr>
+        <p:spPr>
+          <a:xfrm>
+            <a:off x="195889" y="1247815"/>
+            <a:ext cx="8390550" cy="2677656"/>
+          </a:xfrm>
+          <a:prstGeom prst="rect">
+            <a:avLst/>
+          </a:prstGeom>
+          <a:noFill/>
+        </p:spPr>
+        <p:txBody>
+          <a:bodyPr wrap="square">
+            <a:spAutoFit/>
+          </a:bodyPr>
+          <a:lstStyle/>
+          <a:p>
+            <a:pPr marL="114300" lvl="0" algn="l" rtl="0">
+              <a:spcBef>
+                <a:spcPts val="0"/>
+              </a:spcBef>
+              <a:spcAft>
+                <a:spcPts val="0"/>
+              </a:spcAft>
+              <a:buSzPts val="1800"/>
+            </a:pPr>
+            <a:r>
+              <a:rPr lang="en-US" sz="2400" dirty="0">
+                <a:solidFill>
+                  <a:schemeClr val="bg1"/>
+                </a:solidFill>
+              </a:rPr>
+              <a:t>Write a Python Script that writes 100 random integer values (from 1 to 1000) to another file (.txt) .  **Only do this once**</a:t>
+            </a:r>
+          </a:p>
+          <a:p>
+            <a:pPr marL="114300" lvl="0" algn="l" rtl="0">
+              <a:spcBef>
+                <a:spcPts val="0"/>
+              </a:spcBef>
+              <a:spcAft>
+                <a:spcPts val="0"/>
+              </a:spcAft>
+              <a:buSzPts val="1800"/>
+            </a:pPr>
+            <a:endParaRPr lang="en-US" sz="2400" dirty="0">
+              <a:solidFill>
+                <a:schemeClr val="bg1"/>
+              </a:solidFill>
+            </a:endParaRPr>
+          </a:p>
+          <a:p>
+            <a:pPr marL="114300" lvl="0" algn="l" rtl="0">
+              <a:spcBef>
+                <a:spcPts val="0"/>
+              </a:spcBef>
+              <a:spcAft>
+                <a:spcPts val="0"/>
+              </a:spcAft>
+              <a:buSzPts val="1800"/>
+            </a:pPr>
+            <a:endParaRPr lang="en-US" sz="2400" dirty="0">
+              <a:solidFill>
+                <a:schemeClr val="bg1"/>
+              </a:solidFill>
+            </a:endParaRPr>
+          </a:p>
+          <a:p>
+            <a:pPr marL="114300" lvl="0" algn="l" rtl="0">
+              <a:spcBef>
+                <a:spcPts val="0"/>
+              </a:spcBef>
+              <a:spcAft>
+                <a:spcPts val="0"/>
+              </a:spcAft>
+              <a:buSzPts val="1800"/>
+            </a:pPr>
+            <a:r>
+              <a:rPr lang="en-US" sz="2400" dirty="0">
+                <a:solidFill>
+                  <a:schemeClr val="bg1"/>
+                </a:solidFill>
+              </a:rPr>
+              <a:t>Write another Python Script that opens that file, displays the highest number in the list, the lowest number in the list, and the average of that list.</a:t>
+            </a:r>
+          </a:p>
+        </p:txBody>
+      </p:sp>
+    </p:spTree>
+    <p:extLst>
+      <p:ext uri="{BB962C8B-B14F-4D97-AF65-F5344CB8AC3E}">
+        <p14:creationId xmlns:p14="http://schemas.microsoft.com/office/powerpoint/2010/main" val="4226055667"/>
+      </p:ext>
+    </p:extLst>
+  </p:cSld>
+  <p:clrMapOvr>
+    <a:masterClrMapping/>
+  </p:clrMapOvr>
+</p:sld>
+</file>
+
+<file path=ppt/slides/slide6.xml><?xml version="1.0" encoding="utf-8"?>
+<p:sld xmlns:a="http://schemas.openxmlformats.org/drawingml/2006/main" xmlns:r="http://schemas.openxmlformats.org/officeDocument/2006/relationships" xmlns:p="http://schemas.openxmlformats.org/presentationml/2006/main">
+  <p:cSld>
+    <p:spTree>
+      <p:nvGrpSpPr>
+        <p:cNvPr id="1" name="Shape 470">
+          <a:extLst>
+            <a:ext uri="{FF2B5EF4-FFF2-40B4-BE49-F238E27FC236}">
+              <a16:creationId xmlns:a16="http://schemas.microsoft.com/office/drawing/2014/main" id="{E9656FE8-FD50-A356-0EE5-BBF10756201B}"/>
+            </a:ext>
+          </a:extLst>
+        </p:cNvPr>
+        <p:cNvGrpSpPr/>
+        <p:nvPr/>
+      </p:nvGrpSpPr>
+      <p:grpSpPr>
+        <a:xfrm>
+          <a:off x="0" y="0"/>
+          <a:ext cx="0" cy="0"/>
+          <a:chOff x="0" y="0"/>
+          <a:chExt cx="0" cy="0"/>
+        </a:xfrm>
+      </p:grpSpPr>
+      <p:sp>
+        <p:nvSpPr>
+          <p:cNvPr id="471" name="Google Shape;471;p55">
+            <a:extLst>
+              <a:ext uri="{FF2B5EF4-FFF2-40B4-BE49-F238E27FC236}">
+                <a16:creationId xmlns:a16="http://schemas.microsoft.com/office/drawing/2014/main" id="{11CF11BC-40F7-7823-BE15-7648E4FEBC84}"/>
+              </a:ext>
+            </a:extLst>
+          </p:cNvPr>
+          <p:cNvSpPr txBox="1">
+            <a:spLocks noGrp="1"/>
+          </p:cNvSpPr>
+          <p:nvPr>
+            <p:ph type="title"/>
+          </p:nvPr>
+        </p:nvSpPr>
+        <p:spPr>
+          <a:xfrm>
+            <a:off x="359440" y="423441"/>
+            <a:ext cx="6173470" cy="891778"/>
+          </a:xfrm>
+          <a:noFill/>
+          <a:ln>
+            <a:noFill/>
+          </a:ln>
+        </p:spPr>
+        <p:txBody>
+          <a:bodyPr spcFirstLastPara="1" wrap="square" lIns="91425" tIns="91425" rIns="91425" bIns="91425" anchor="t" anchorCtr="0">
+            <a:normAutofit/>
+          </a:bodyPr>
+          <a:lstStyle/>
+          <a:p>
+            <a:pPr lvl="0"/>
+            <a:r>
+              <a:rPr lang="en-US" dirty="0"/>
+              <a:t>Pre Class Problem 2</a:t>
+            </a:r>
+          </a:p>
+        </p:txBody>
+      </p:sp>
+      <p:sp>
+        <p:nvSpPr>
+          <p:cNvPr id="3" name="TextBox 2">
+            <a:extLst>
+              <a:ext uri="{FF2B5EF4-FFF2-40B4-BE49-F238E27FC236}">
+                <a16:creationId xmlns:a16="http://schemas.microsoft.com/office/drawing/2014/main" id="{6677DEC7-1E2D-6138-2E95-98E16C392A91}"/>
+              </a:ext>
+            </a:extLst>
+          </p:cNvPr>
+          <p:cNvSpPr txBox="1"/>
+          <p:nvPr/>
+        </p:nvSpPr>
+        <p:spPr>
+          <a:xfrm>
+            <a:off x="195889" y="1247815"/>
+            <a:ext cx="8390550" cy="3416320"/>
+          </a:xfrm>
+          <a:prstGeom prst="rect">
+            <a:avLst/>
+          </a:prstGeom>
+          <a:noFill/>
+        </p:spPr>
+        <p:txBody>
+          <a:bodyPr wrap="square">
+            <a:spAutoFit/>
+          </a:bodyPr>
+          <a:lstStyle/>
+          <a:p>
+            <a:pPr marL="114300" lvl="0">
+              <a:buSzPts val="1800"/>
+            </a:pPr>
+            <a:r>
+              <a:rPr lang="en-US" sz="2400" dirty="0">
+                <a:solidFill>
+                  <a:schemeClr val="bg1"/>
+                </a:solidFill>
+              </a:rPr>
+              <a:t>Write a python script that contains functions for calculating the area of a circle, the area of a square, the area of a rectangle, and the area of a triangle.</a:t>
+            </a:r>
+          </a:p>
+          <a:p>
+            <a:pPr marL="114300" lvl="0" algn="l" rtl="0">
+              <a:spcBef>
+                <a:spcPts val="0"/>
+              </a:spcBef>
+              <a:spcAft>
+                <a:spcPts val="0"/>
+              </a:spcAft>
+              <a:buSzPts val="1800"/>
+            </a:pPr>
+            <a:endParaRPr lang="en-US" sz="2400" dirty="0">
+              <a:solidFill>
+                <a:schemeClr val="bg1"/>
+              </a:solidFill>
+            </a:endParaRPr>
+          </a:p>
+          <a:p>
+            <a:r>
+              <a:rPr lang="en-US" sz="2400" dirty="0">
+                <a:solidFill>
+                  <a:schemeClr val="bg1"/>
+                </a:solidFill>
+              </a:rPr>
+              <a:t>Import those functions into another python script where you ask the user what shape they would like to calculate the area for, and then prompt the user for necessary information to complete the calculation.  Display the area in a meaningful print statement.</a:t>
+            </a:r>
+          </a:p>
+        </p:txBody>
+      </p:sp>
+    </p:spTree>
+    <p:extLst>
+      <p:ext uri="{BB962C8B-B14F-4D97-AF65-F5344CB8AC3E}">
+        <p14:creationId xmlns:p14="http://schemas.microsoft.com/office/powerpoint/2010/main" val="2152760586"/>
+      </p:ext>
+    </p:extLst>
+  </p:cSld>
+  <p:clrMapOvr>
+    <a:masterClrMapping/>
+  </p:clrMapOvr>
+</p:sld>
+</file>
+
+<file path=ppt/slides/slide7.xml><?xml version="1.0" encoding="utf-8"?>
 <p:sld xmlns:a="http://schemas.openxmlformats.org/drawingml/2006/main" xmlns:r="http://schemas.openxmlformats.org/officeDocument/2006/relationships" xmlns:p="http://schemas.openxmlformats.org/presentationml/2006/main">
   <p:cSld>
     <p:spTree>
@@ -44555,31 +47590,6 @@
       </p:sp>
       <p:sp>
         <p:nvSpPr>
-          <p:cNvPr id="3" name="Text Placeholder 2">
-            <a:extLst>
-              <a:ext uri="{FF2B5EF4-FFF2-40B4-BE49-F238E27FC236}">
-                <a16:creationId xmlns:a16="http://schemas.microsoft.com/office/drawing/2014/main" id="{3F7E1484-2479-D5C8-C114-A85D1147D8B2}"/>
-              </a:ext>
-            </a:extLst>
-          </p:cNvPr>
-          <p:cNvSpPr>
-            <a:spLocks noGrp="1"/>
-          </p:cNvSpPr>
-          <p:nvPr>
-            <p:ph type="body" idx="1"/>
-          </p:nvPr>
-        </p:nvSpPr>
-        <p:spPr/>
-        <p:txBody>
-          <a:bodyPr/>
-          <a:lstStyle/>
-          <a:p>
-            <a:endParaRPr lang="en-US"/>
-          </a:p>
-        </p:txBody>
-      </p:sp>
-      <p:sp>
-        <p:nvSpPr>
           <p:cNvPr id="472" name="Google Shape;472;p55"/>
           <p:cNvSpPr txBox="1"/>
           <p:nvPr/>
@@ -44621,7 +47631,7 @@
               <a:buChar char="●"/>
             </a:pPr>
             <a:r>
-              <a:rPr lang="en" sz="1800" b="0" i="0" u="none" strike="noStrike" cap="none">
+              <a:rPr lang="en" sz="1800" b="0" i="0" u="none" strike="noStrike" cap="none" dirty="0">
                 <a:solidFill>
                   <a:schemeClr val="lt1"/>
                 </a:solidFill>
@@ -44632,7 +47642,7 @@
               </a:rPr>
               <a:t>Errors are issues in a program that prevent it from running as expected</a:t>
             </a:r>
-            <a:endParaRPr sz="1800" b="0" i="0" u="none" strike="noStrike" cap="none">
+            <a:endParaRPr sz="1800" b="0" i="0" u="none" strike="noStrike" cap="none" dirty="0">
               <a:solidFill>
                 <a:schemeClr val="lt1"/>
               </a:solidFill>
@@ -44661,7 +47671,7 @@
               <a:buChar char="●"/>
             </a:pPr>
             <a:r>
-              <a:rPr lang="en" sz="1800" b="0" i="0" u="none" strike="noStrike" cap="none">
+              <a:rPr lang="en" sz="1800" b="0" i="0" u="none" strike="noStrike" cap="none" dirty="0">
                 <a:solidFill>
                   <a:schemeClr val="lt1"/>
                 </a:solidFill>
@@ -44672,7 +47682,7 @@
               </a:rPr>
               <a:t>They help programmers find and fix mistakes</a:t>
             </a:r>
-            <a:endParaRPr sz="1800" b="0" i="0" u="none" strike="noStrike" cap="none">
+            <a:endParaRPr sz="1800" b="0" i="0" u="none" strike="noStrike" cap="none" dirty="0">
               <a:solidFill>
                 <a:schemeClr val="lt1"/>
               </a:solidFill>
@@ -44701,7 +47711,7 @@
               <a:buChar char="●"/>
             </a:pPr>
             <a:r>
-              <a:rPr lang="en" sz="1800" b="0" i="0" u="none" strike="noStrike" cap="none">
+              <a:rPr lang="en" sz="1800" b="0" i="0" u="none" strike="noStrike" cap="none" dirty="0">
                 <a:solidFill>
                   <a:schemeClr val="lt1"/>
                 </a:solidFill>
@@ -44712,7 +47722,7 @@
               </a:rPr>
               <a:t>Why learn errors?</a:t>
             </a:r>
-            <a:endParaRPr sz="1800" b="0" i="0" u="none" strike="noStrike" cap="none">
+            <a:endParaRPr sz="1800" b="0" i="0" u="none" strike="noStrike" cap="none" dirty="0">
               <a:solidFill>
                 <a:schemeClr val="lt1"/>
               </a:solidFill>
@@ -44741,7 +47751,7 @@
               <a:buChar char="○"/>
             </a:pPr>
             <a:r>
-              <a:rPr lang="en" sz="1800" b="0" i="0" u="none" strike="noStrike" cap="none">
+              <a:rPr lang="en" sz="1800" b="0" i="0" u="none" strike="noStrike" cap="none" dirty="0">
                 <a:solidFill>
                   <a:schemeClr val="lt1"/>
                 </a:solidFill>
@@ -44752,7 +47762,7 @@
               </a:rPr>
               <a:t>Errors help you debug</a:t>
             </a:r>
-            <a:endParaRPr sz="1800" b="0" i="0" u="none" strike="noStrike" cap="none">
+            <a:endParaRPr sz="1800" b="0" i="0" u="none" strike="noStrike" cap="none" dirty="0">
               <a:solidFill>
                 <a:schemeClr val="lt1"/>
               </a:solidFill>
@@ -44781,7 +47791,7 @@
               <a:buChar char="○"/>
             </a:pPr>
             <a:r>
-              <a:rPr lang="en" sz="1800" b="0" i="0" u="none" strike="noStrike" cap="none">
+              <a:rPr lang="en" sz="1800" b="0" i="0" u="none" strike="noStrike" cap="none" dirty="0">
                 <a:solidFill>
                   <a:schemeClr val="lt1"/>
                 </a:solidFill>
@@ -44792,7 +47802,7 @@
               </a:rPr>
               <a:t>Knowing common errors makes writing and fixing code faster</a:t>
             </a:r>
-            <a:endParaRPr sz="1800" b="0" i="0" u="none" strike="noStrike" cap="none">
+            <a:endParaRPr sz="1800" b="0" i="0" u="none" strike="noStrike" cap="none" dirty="0">
               <a:solidFill>
                 <a:schemeClr val="lt1"/>
               </a:solidFill>
@@ -44821,7 +47831,7 @@
               <a:buChar char="○"/>
             </a:pPr>
             <a:r>
-              <a:rPr lang="en" sz="1800" b="0" i="0" u="none" strike="noStrike" cap="none">
+              <a:rPr lang="en" sz="1800" b="0" i="0" u="none" strike="noStrike" cap="none" dirty="0">
                 <a:solidFill>
                   <a:schemeClr val="lt1"/>
                 </a:solidFill>
@@ -44832,7 +47842,7 @@
               </a:rPr>
               <a:t>Good programs handle errors gracefully</a:t>
             </a:r>
-            <a:endParaRPr sz="1800" b="0" i="0" u="none" strike="noStrike" cap="none">
+            <a:endParaRPr sz="1800" b="0" i="0" u="none" strike="noStrike" cap="none" dirty="0">
               <a:solidFill>
                 <a:schemeClr val="lt1"/>
               </a:solidFill>
@@ -44849,10 +47859,334 @@
   <p:clrMapOvr>
     <a:masterClrMapping/>
   </p:clrMapOvr>
+  <p:timing>
+    <p:tnLst>
+      <p:par>
+        <p:cTn id="1" dur="indefinite" restart="never" nodeType="tmRoot">
+          <p:childTnLst>
+            <p:seq concurrent="1" nextAc="seek">
+              <p:cTn id="2" dur="indefinite" nodeType="mainSeq">
+                <p:childTnLst>
+                  <p:par>
+                    <p:cTn id="3" fill="hold">
+                      <p:stCondLst>
+                        <p:cond delay="indefinite"/>
+                      </p:stCondLst>
+                      <p:childTnLst>
+                        <p:par>
+                          <p:cTn id="4" fill="hold">
+                            <p:stCondLst>
+                              <p:cond delay="0"/>
+                            </p:stCondLst>
+                            <p:childTnLst>
+                              <p:par>
+                                <p:cTn id="5" presetID="1" presetClass="entr" presetSubtype="0" fill="hold" nodeType="clickEffect">
+                                  <p:stCondLst>
+                                    <p:cond delay="0"/>
+                                  </p:stCondLst>
+                                  <p:childTnLst>
+                                    <p:set>
+                                      <p:cBhvr>
+                                        <p:cTn id="6" dur="1" fill="hold">
+                                          <p:stCondLst>
+                                            <p:cond delay="0"/>
+                                          </p:stCondLst>
+                                        </p:cTn>
+                                        <p:tgtEl>
+                                          <p:spTgt spid="472">
+                                            <p:txEl>
+                                              <p:pRg st="0" end="0"/>
+                                            </p:txEl>
+                                          </p:spTgt>
+                                        </p:tgtEl>
+                                        <p:attrNameLst>
+                                          <p:attrName>style.visibility</p:attrName>
+                                        </p:attrNameLst>
+                                      </p:cBhvr>
+                                      <p:to>
+                                        <p:strVal val="visible"/>
+                                      </p:to>
+                                    </p:set>
+                                  </p:childTnLst>
+                                </p:cTn>
+                              </p:par>
+                            </p:childTnLst>
+                          </p:cTn>
+                        </p:par>
+                      </p:childTnLst>
+                    </p:cTn>
+                  </p:par>
+                  <p:par>
+                    <p:cTn id="7" fill="hold">
+                      <p:stCondLst>
+                        <p:cond delay="indefinite"/>
+                      </p:stCondLst>
+                      <p:childTnLst>
+                        <p:par>
+                          <p:cTn id="8" fill="hold">
+                            <p:stCondLst>
+                              <p:cond delay="0"/>
+                            </p:stCondLst>
+                            <p:childTnLst>
+                              <p:par>
+                                <p:cTn id="9" presetID="1" presetClass="entr" presetSubtype="0" fill="hold" nodeType="clickEffect">
+                                  <p:stCondLst>
+                                    <p:cond delay="0"/>
+                                  </p:stCondLst>
+                                  <p:childTnLst>
+                                    <p:set>
+                                      <p:cBhvr>
+                                        <p:cTn id="10" dur="1" fill="hold">
+                                          <p:stCondLst>
+                                            <p:cond delay="0"/>
+                                          </p:stCondLst>
+                                        </p:cTn>
+                                        <p:tgtEl>
+                                          <p:spTgt spid="472">
+                                            <p:txEl>
+                                              <p:pRg st="1" end="1"/>
+                                            </p:txEl>
+                                          </p:spTgt>
+                                        </p:tgtEl>
+                                        <p:attrNameLst>
+                                          <p:attrName>style.visibility</p:attrName>
+                                        </p:attrNameLst>
+                                      </p:cBhvr>
+                                      <p:to>
+                                        <p:strVal val="visible"/>
+                                      </p:to>
+                                    </p:set>
+                                  </p:childTnLst>
+                                </p:cTn>
+                              </p:par>
+                            </p:childTnLst>
+                          </p:cTn>
+                        </p:par>
+                      </p:childTnLst>
+                    </p:cTn>
+                  </p:par>
+                  <p:par>
+                    <p:cTn id="11" fill="hold">
+                      <p:stCondLst>
+                        <p:cond delay="indefinite"/>
+                      </p:stCondLst>
+                      <p:childTnLst>
+                        <p:par>
+                          <p:cTn id="12" fill="hold">
+                            <p:stCondLst>
+                              <p:cond delay="0"/>
+                            </p:stCondLst>
+                            <p:childTnLst>
+                              <p:par>
+                                <p:cTn id="13" presetID="1" presetClass="entr" presetSubtype="0" fill="hold" nodeType="clickEffect">
+                                  <p:stCondLst>
+                                    <p:cond delay="0"/>
+                                  </p:stCondLst>
+                                  <p:childTnLst>
+                                    <p:set>
+                                      <p:cBhvr>
+                                        <p:cTn id="14" dur="1" fill="hold">
+                                          <p:stCondLst>
+                                            <p:cond delay="0"/>
+                                          </p:stCondLst>
+                                        </p:cTn>
+                                        <p:tgtEl>
+                                          <p:spTgt spid="472">
+                                            <p:txEl>
+                                              <p:pRg st="2" end="2"/>
+                                            </p:txEl>
+                                          </p:spTgt>
+                                        </p:tgtEl>
+                                        <p:attrNameLst>
+                                          <p:attrName>style.visibility</p:attrName>
+                                        </p:attrNameLst>
+                                      </p:cBhvr>
+                                      <p:to>
+                                        <p:strVal val="visible"/>
+                                      </p:to>
+                                    </p:set>
+                                  </p:childTnLst>
+                                </p:cTn>
+                              </p:par>
+                            </p:childTnLst>
+                          </p:cTn>
+                        </p:par>
+                      </p:childTnLst>
+                    </p:cTn>
+                  </p:par>
+                  <p:par>
+                    <p:cTn id="15" fill="hold">
+                      <p:stCondLst>
+                        <p:cond delay="indefinite"/>
+                      </p:stCondLst>
+                      <p:childTnLst>
+                        <p:par>
+                          <p:cTn id="16" fill="hold">
+                            <p:stCondLst>
+                              <p:cond delay="0"/>
+                            </p:stCondLst>
+                            <p:childTnLst>
+                              <p:par>
+                                <p:cTn id="17" presetID="1" presetClass="entr" presetSubtype="0" fill="hold" nodeType="clickEffect">
+                                  <p:stCondLst>
+                                    <p:cond delay="0"/>
+                                  </p:stCondLst>
+                                  <p:childTnLst>
+                                    <p:set>
+                                      <p:cBhvr>
+                                        <p:cTn id="18" dur="1" fill="hold">
+                                          <p:stCondLst>
+                                            <p:cond delay="0"/>
+                                          </p:stCondLst>
+                                        </p:cTn>
+                                        <p:tgtEl>
+                                          <p:spTgt spid="472">
+                                            <p:txEl>
+                                              <p:pRg st="3" end="3"/>
+                                            </p:txEl>
+                                          </p:spTgt>
+                                        </p:tgtEl>
+                                        <p:attrNameLst>
+                                          <p:attrName>style.visibility</p:attrName>
+                                        </p:attrNameLst>
+                                      </p:cBhvr>
+                                      <p:to>
+                                        <p:strVal val="visible"/>
+                                      </p:to>
+                                    </p:set>
+                                  </p:childTnLst>
+                                </p:cTn>
+                              </p:par>
+                            </p:childTnLst>
+                          </p:cTn>
+                        </p:par>
+                      </p:childTnLst>
+                    </p:cTn>
+                  </p:par>
+                  <p:par>
+                    <p:cTn id="19" fill="hold">
+                      <p:stCondLst>
+                        <p:cond delay="indefinite"/>
+                      </p:stCondLst>
+                      <p:childTnLst>
+                        <p:par>
+                          <p:cTn id="20" fill="hold">
+                            <p:stCondLst>
+                              <p:cond delay="0"/>
+                            </p:stCondLst>
+                            <p:childTnLst>
+                              <p:par>
+                                <p:cTn id="21" presetID="1" presetClass="entr" presetSubtype="0" fill="hold" nodeType="clickEffect">
+                                  <p:stCondLst>
+                                    <p:cond delay="0"/>
+                                  </p:stCondLst>
+                                  <p:childTnLst>
+                                    <p:set>
+                                      <p:cBhvr>
+                                        <p:cTn id="22" dur="1" fill="hold">
+                                          <p:stCondLst>
+                                            <p:cond delay="0"/>
+                                          </p:stCondLst>
+                                        </p:cTn>
+                                        <p:tgtEl>
+                                          <p:spTgt spid="472">
+                                            <p:txEl>
+                                              <p:pRg st="4" end="4"/>
+                                            </p:txEl>
+                                          </p:spTgt>
+                                        </p:tgtEl>
+                                        <p:attrNameLst>
+                                          <p:attrName>style.visibility</p:attrName>
+                                        </p:attrNameLst>
+                                      </p:cBhvr>
+                                      <p:to>
+                                        <p:strVal val="visible"/>
+                                      </p:to>
+                                    </p:set>
+                                  </p:childTnLst>
+                                </p:cTn>
+                              </p:par>
+                            </p:childTnLst>
+                          </p:cTn>
+                        </p:par>
+                      </p:childTnLst>
+                    </p:cTn>
+                  </p:par>
+                  <p:par>
+                    <p:cTn id="23" fill="hold">
+                      <p:stCondLst>
+                        <p:cond delay="indefinite"/>
+                      </p:stCondLst>
+                      <p:childTnLst>
+                        <p:par>
+                          <p:cTn id="24" fill="hold">
+                            <p:stCondLst>
+                              <p:cond delay="0"/>
+                            </p:stCondLst>
+                            <p:childTnLst>
+                              <p:par>
+                                <p:cTn id="25" presetID="1" presetClass="entr" presetSubtype="0" fill="hold" nodeType="clickEffect">
+                                  <p:stCondLst>
+                                    <p:cond delay="0"/>
+                                  </p:stCondLst>
+                                  <p:childTnLst>
+                                    <p:set>
+                                      <p:cBhvr>
+                                        <p:cTn id="26" dur="1" fill="hold">
+                                          <p:stCondLst>
+                                            <p:cond delay="0"/>
+                                          </p:stCondLst>
+                                        </p:cTn>
+                                        <p:tgtEl>
+                                          <p:spTgt spid="472">
+                                            <p:txEl>
+                                              <p:pRg st="5" end="5"/>
+                                            </p:txEl>
+                                          </p:spTgt>
+                                        </p:tgtEl>
+                                        <p:attrNameLst>
+                                          <p:attrName>style.visibility</p:attrName>
+                                        </p:attrNameLst>
+                                      </p:cBhvr>
+                                      <p:to>
+                                        <p:strVal val="visible"/>
+                                      </p:to>
+                                    </p:set>
+                                  </p:childTnLst>
+                                </p:cTn>
+                              </p:par>
+                            </p:childTnLst>
+                          </p:cTn>
+                        </p:par>
+                      </p:childTnLst>
+                    </p:cTn>
+                  </p:par>
+                </p:childTnLst>
+              </p:cTn>
+              <p:prevCondLst>
+                <p:cond evt="onPrev" delay="0">
+                  <p:tgtEl>
+                    <p:sldTgt/>
+                  </p:tgtEl>
+                </p:cond>
+              </p:prevCondLst>
+              <p:nextCondLst>
+                <p:cond evt="onNext" delay="0">
+                  <p:tgtEl>
+                    <p:sldTgt/>
+                  </p:tgtEl>
+                </p:cond>
+              </p:nextCondLst>
+            </p:seq>
+          </p:childTnLst>
+        </p:cTn>
+      </p:par>
+    </p:tnLst>
+  </p:timing>
 </p:sld>
 </file>
 
-<file path=ppt/slides/slide3.xml><?xml version="1.0" encoding="utf-8"?>
+<file path=ppt/slides/slide8.xml><?xml version="1.0" encoding="utf-8"?>
 <p:sld xmlns:a="http://schemas.openxmlformats.org/drawingml/2006/main" xmlns:r="http://schemas.openxmlformats.org/officeDocument/2006/relationships" xmlns:p="http://schemas.openxmlformats.org/presentationml/2006/main" show="0">
   <p:cSld>
     <p:spTree>
@@ -45033,7 +48367,7 @@
 </p:sld>
 </file>
 
-<file path=ppt/slides/slide4.xml><?xml version="1.0" encoding="utf-8"?>
+<file path=ppt/slides/slide9.xml><?xml version="1.0" encoding="utf-8"?>
 <p:sld xmlns:a="http://schemas.openxmlformats.org/drawingml/2006/main" xmlns:r="http://schemas.openxmlformats.org/officeDocument/2006/relationships" xmlns:p="http://schemas.openxmlformats.org/presentationml/2006/main">
   <p:cSld>
     <p:spTree>
@@ -45114,7 +48448,7 @@
                         <a:buNone/>
                       </a:pPr>
                       <a:r>
-                        <a:rPr lang="en" sz="1200" b="1" u="none" strike="noStrike" cap="none">
+                        <a:rPr lang="en" sz="1200" b="1" u="none" strike="noStrike" cap="none" dirty="0">
                           <a:solidFill>
                             <a:schemeClr val="lt1"/>
                           </a:solidFill>
@@ -45125,7 +48459,7 @@
                         </a:rPr>
                         <a:t>Type</a:t>
                       </a:r>
-                      <a:endParaRPr sz="1200" b="1" u="none" strike="noStrike" cap="none">
+                      <a:endParaRPr sz="1200" b="1" u="none" strike="noStrike" cap="none" dirty="0">
                         <a:solidFill>
                           <a:schemeClr val="lt1"/>
                         </a:solidFill>
@@ -45541,7 +48875,7 @@
                         <a:buNone/>
                       </a:pPr>
                       <a:r>
-                        <a:rPr lang="en" sz="1100" u="none" strike="noStrike" cap="none">
+                        <a:rPr lang="en" sz="1100" u="none" strike="noStrike" cap="none" dirty="0">
                           <a:solidFill>
                             <a:schemeClr val="lt1"/>
                           </a:solidFill>
@@ -45552,7 +48886,7 @@
                         </a:rPr>
                         <a:t>Missing colon :</a:t>
                       </a:r>
-                      <a:endParaRPr sz="1100" u="none" strike="noStrike" cap="none">
+                      <a:endParaRPr sz="1100" u="none" strike="noStrike" cap="none" dirty="0">
                         <a:solidFill>
                           <a:schemeClr val="lt1"/>
                         </a:solidFill>
@@ -45800,7 +49134,7 @@
                         <a:buNone/>
                       </a:pPr>
                       <a:r>
-                        <a:rPr lang="en" sz="1100" u="none" strike="noStrike" cap="none">
+                        <a:rPr lang="en" sz="1100" u="none" strike="noStrike" cap="none" dirty="0">
                           <a:solidFill>
                             <a:schemeClr val="lt1"/>
                           </a:solidFill>
@@ -45811,7 +49145,7 @@
                         </a:rPr>
                         <a:t>Misaligned blocks</a:t>
                       </a:r>
-                      <a:endParaRPr sz="1100" u="none" strike="noStrike" cap="none">
+                      <a:endParaRPr sz="1100" u="none" strike="noStrike" cap="none" dirty="0">
                         <a:solidFill>
                           <a:schemeClr val="lt1"/>
                         </a:solidFill>
@@ -46059,7 +49393,7 @@
                         <a:buNone/>
                       </a:pPr>
                       <a:r>
-                        <a:rPr lang="en" sz="1100" u="none" strike="noStrike" cap="none">
+                        <a:rPr lang="en" sz="1100" u="none" strike="noStrike" cap="none" dirty="0">
                           <a:solidFill>
                             <a:schemeClr val="lt1"/>
                           </a:solidFill>
@@ -46070,7 +49404,7 @@
                         </a:rPr>
                         <a:t>Add int to str</a:t>
                       </a:r>
-                      <a:endParaRPr sz="1100" u="none" strike="noStrike" cap="none">
+                      <a:endParaRPr sz="1100" u="none" strike="noStrike" cap="none" dirty="0">
                         <a:solidFill>
                           <a:schemeClr val="lt1"/>
                         </a:solidFill>
@@ -46318,7 +49652,7 @@
                         <a:buNone/>
                       </a:pPr>
                       <a:r>
-                        <a:rPr lang="en" sz="1100" u="none" strike="noStrike" cap="none">
+                        <a:rPr lang="en" sz="1100" u="none" strike="noStrike" cap="none" dirty="0">
                           <a:solidFill>
                             <a:schemeClr val="lt1"/>
                           </a:solidFill>
@@ -46329,7 +49663,7 @@
                         </a:rPr>
                         <a:t>int("abc")</a:t>
                       </a:r>
-                      <a:endParaRPr sz="1100" u="none" strike="noStrike" cap="none">
+                      <a:endParaRPr sz="1100" u="none" strike="noStrike" cap="none" dirty="0">
                         <a:solidFill>
                           <a:schemeClr val="lt1"/>
                         </a:solidFill>
@@ -47872,7 +51206,7 @@
                         <a:buNone/>
                       </a:pPr>
                       <a:r>
-                        <a:rPr lang="en" sz="1100" u="none" strike="noStrike" cap="none">
+                        <a:rPr lang="en" sz="1100" u="none" strike="noStrike" cap="none" dirty="0">
                           <a:solidFill>
                             <a:schemeClr val="lt1"/>
                           </a:solidFill>
@@ -47883,7 +51217,7 @@
                         </a:rPr>
                         <a:t>Wrong module name</a:t>
                       </a:r>
-                      <a:endParaRPr sz="1100" u="none" strike="noStrike" cap="none">
+                      <a:endParaRPr sz="1100" u="none" strike="noStrike" cap="none" dirty="0">
                         <a:solidFill>
                           <a:schemeClr val="lt1"/>
                         </a:solidFill>
@@ -47943,1060 +51277,6 @@
           </a:graphicData>
         </a:graphic>
       </p:graphicFrame>
-      <p:sp>
-        <p:nvSpPr>
-          <p:cNvPr id="2" name="Title 1">
-            <a:extLst>
-              <a:ext uri="{FF2B5EF4-FFF2-40B4-BE49-F238E27FC236}">
-                <a16:creationId xmlns:a16="http://schemas.microsoft.com/office/drawing/2014/main" id="{927E4AC0-01EA-B511-D859-5692044DD619}"/>
-              </a:ext>
-            </a:extLst>
-          </p:cNvPr>
-          <p:cNvSpPr>
-            <a:spLocks noGrp="1"/>
-          </p:cNvSpPr>
-          <p:nvPr>
-            <p:ph type="title"/>
-          </p:nvPr>
-        </p:nvSpPr>
-        <p:spPr/>
-        <p:txBody>
-          <a:bodyPr/>
-          <a:lstStyle/>
-          <a:p>
-            <a:endParaRPr lang="en-US"/>
-          </a:p>
-        </p:txBody>
-      </p:sp>
-      <p:sp>
-        <p:nvSpPr>
-          <p:cNvPr id="3" name="Text Placeholder 2">
-            <a:extLst>
-              <a:ext uri="{FF2B5EF4-FFF2-40B4-BE49-F238E27FC236}">
-                <a16:creationId xmlns:a16="http://schemas.microsoft.com/office/drawing/2014/main" id="{6D6B3114-E828-3C64-0B4A-5DA874EBE967}"/>
-              </a:ext>
-            </a:extLst>
-          </p:cNvPr>
-          <p:cNvSpPr>
-            <a:spLocks noGrp="1"/>
-          </p:cNvSpPr>
-          <p:nvPr>
-            <p:ph type="body" idx="1"/>
-          </p:nvPr>
-        </p:nvSpPr>
-        <p:spPr/>
-        <p:txBody>
-          <a:bodyPr/>
-          <a:lstStyle/>
-          <a:p>
-            <a:endParaRPr lang="en-US"/>
-          </a:p>
-        </p:txBody>
-      </p:sp>
-    </p:spTree>
-  </p:cSld>
-  <p:clrMapOvr>
-    <a:masterClrMapping/>
-  </p:clrMapOvr>
-</p:sld>
-</file>
-
-<file path=ppt/slides/slide5.xml><?xml version="1.0" encoding="utf-8"?>
-<p:sld xmlns:a="http://schemas.openxmlformats.org/drawingml/2006/main" xmlns:r="http://schemas.openxmlformats.org/officeDocument/2006/relationships" xmlns:p="http://schemas.openxmlformats.org/presentationml/2006/main">
-  <p:cSld>
-    <p:spTree>
-      <p:nvGrpSpPr>
-        <p:cNvPr id="1" name="Shape 487"/>
-        <p:cNvGrpSpPr/>
-        <p:nvPr/>
-      </p:nvGrpSpPr>
-      <p:grpSpPr>
-        <a:xfrm>
-          <a:off x="0" y="0"/>
-          <a:ext cx="0" cy="0"/>
-          <a:chOff x="0" y="0"/>
-          <a:chExt cx="0" cy="0"/>
-        </a:xfrm>
-      </p:grpSpPr>
-      <p:sp>
-        <p:nvSpPr>
-          <p:cNvPr id="488" name="Google Shape;488;p58"/>
-          <p:cNvSpPr txBox="1">
-            <a:spLocks noGrp="1"/>
-          </p:cNvSpPr>
-          <p:nvPr>
-            <p:ph type="title"/>
-          </p:nvPr>
-        </p:nvSpPr>
-        <p:spPr>
-          <a:xfrm>
-            <a:off x="411480" y="308611"/>
-            <a:ext cx="6173470" cy="891778"/>
-          </a:xfrm>
-          <a:noFill/>
-          <a:ln>
-            <a:noFill/>
-          </a:ln>
-        </p:spPr>
-        <p:txBody>
-          <a:bodyPr spcFirstLastPara="1" wrap="square" lIns="91425" tIns="91425" rIns="91425" bIns="91425" anchor="t" anchorCtr="0">
-            <a:normAutofit/>
-          </a:bodyPr>
-          <a:lstStyle/>
-          <a:p>
-            <a:pPr lvl="0"/>
-            <a:r>
-              <a:rPr lang="en-US"/>
-              <a:t>ERROR HANDLING</a:t>
-            </a:r>
-          </a:p>
-        </p:txBody>
-      </p:sp>
-      <p:sp>
-        <p:nvSpPr>
-          <p:cNvPr id="3" name="Text Placeholder 2">
-            <a:extLst>
-              <a:ext uri="{FF2B5EF4-FFF2-40B4-BE49-F238E27FC236}">
-                <a16:creationId xmlns:a16="http://schemas.microsoft.com/office/drawing/2014/main" id="{A3236906-DDF6-4444-8642-3AB19FD9C9D7}"/>
-              </a:ext>
-            </a:extLst>
-          </p:cNvPr>
-          <p:cNvSpPr>
-            <a:spLocks noGrp="1"/>
-          </p:cNvSpPr>
-          <p:nvPr>
-            <p:ph type="body" idx="1"/>
-          </p:nvPr>
-        </p:nvSpPr>
-        <p:spPr/>
-        <p:txBody>
-          <a:bodyPr/>
-          <a:lstStyle/>
-          <a:p>
-            <a:endParaRPr lang="en-US"/>
-          </a:p>
-        </p:txBody>
-      </p:sp>
-      <p:sp>
-        <p:nvSpPr>
-          <p:cNvPr id="489" name="Google Shape;489;p58"/>
-          <p:cNvSpPr txBox="1"/>
-          <p:nvPr/>
-        </p:nvSpPr>
-        <p:spPr>
-          <a:xfrm>
-            <a:off x="606210" y="1570610"/>
-            <a:ext cx="7647000" cy="3241500"/>
-          </a:xfrm>
-          <a:prstGeom prst="rect">
-            <a:avLst/>
-          </a:prstGeom>
-          <a:noFill/>
-          <a:ln>
-            <a:noFill/>
-          </a:ln>
-        </p:spPr>
-        <p:txBody>
-          <a:bodyPr spcFirstLastPara="1" wrap="square" lIns="91425" tIns="91425" rIns="91425" bIns="91425" anchor="t" anchorCtr="0">
-            <a:noAutofit/>
-          </a:bodyPr>
-          <a:lstStyle/>
-          <a:p>
-            <a:pPr marL="457200" marR="0" lvl="0" indent="-342900" algn="l" rtl="0">
-              <a:lnSpc>
-                <a:spcPct val="100000"/>
-              </a:lnSpc>
-              <a:spcBef>
-                <a:spcPts val="0"/>
-              </a:spcBef>
-              <a:spcAft>
-                <a:spcPts val="0"/>
-              </a:spcAft>
-              <a:buClr>
-                <a:srgbClr val="FFFFFF"/>
-              </a:buClr>
-              <a:buSzPts val="1800"/>
-              <a:buFont typeface="Arial"/>
-              <a:buChar char="•"/>
-            </a:pPr>
-            <a:r>
-              <a:rPr lang="en" sz="1800" b="0" i="0" u="none" strike="noStrike" cap="none">
-                <a:solidFill>
-                  <a:schemeClr val="lt1"/>
-                </a:solidFill>
-                <a:latin typeface="Roboto"/>
-                <a:ea typeface="Roboto"/>
-                <a:cs typeface="Roboto"/>
-                <a:sym typeface="Roboto"/>
-              </a:rPr>
-              <a:t>Why Handle Errors?</a:t>
-            </a:r>
-            <a:endParaRPr sz="1800" b="0" i="0" u="none" strike="noStrike" cap="none">
-              <a:solidFill>
-                <a:schemeClr val="lt1"/>
-              </a:solidFill>
-              <a:latin typeface="Roboto"/>
-              <a:ea typeface="Roboto"/>
-              <a:cs typeface="Roboto"/>
-              <a:sym typeface="Roboto"/>
-            </a:endParaRPr>
-          </a:p>
-          <a:p>
-            <a:pPr marL="914400" marR="0" lvl="1" indent="-342900" algn="l" rtl="0">
-              <a:lnSpc>
-                <a:spcPct val="100000"/>
-              </a:lnSpc>
-              <a:spcBef>
-                <a:spcPts val="0"/>
-              </a:spcBef>
-              <a:spcAft>
-                <a:spcPts val="0"/>
-              </a:spcAft>
-              <a:buClr>
-                <a:srgbClr val="FFFFFF"/>
-              </a:buClr>
-              <a:buSzPts val="1800"/>
-              <a:buFont typeface="Arial"/>
-              <a:buChar char="•"/>
-            </a:pPr>
-            <a:r>
-              <a:rPr lang="en" sz="1800" b="0" i="0" u="none" strike="noStrike" cap="none">
-                <a:solidFill>
-                  <a:schemeClr val="lt1"/>
-                </a:solidFill>
-                <a:latin typeface="Roboto"/>
-                <a:ea typeface="Roboto"/>
-                <a:cs typeface="Roboto"/>
-                <a:sym typeface="Roboto"/>
-              </a:rPr>
-              <a:t>Prevent your program from crashing</a:t>
-            </a:r>
-            <a:endParaRPr sz="1800" b="0" i="0" u="none" strike="noStrike" cap="none">
-              <a:solidFill>
-                <a:schemeClr val="lt1"/>
-              </a:solidFill>
-              <a:latin typeface="Roboto"/>
-              <a:ea typeface="Roboto"/>
-              <a:cs typeface="Roboto"/>
-              <a:sym typeface="Roboto"/>
-            </a:endParaRPr>
-          </a:p>
-          <a:p>
-            <a:pPr marL="914400" marR="0" lvl="1" indent="-342900" algn="l" rtl="0">
-              <a:lnSpc>
-                <a:spcPct val="100000"/>
-              </a:lnSpc>
-              <a:spcBef>
-                <a:spcPts val="0"/>
-              </a:spcBef>
-              <a:spcAft>
-                <a:spcPts val="0"/>
-              </a:spcAft>
-              <a:buClr>
-                <a:srgbClr val="FFFFFF"/>
-              </a:buClr>
-              <a:buSzPts val="1800"/>
-              <a:buFont typeface="Arial"/>
-              <a:buChar char="•"/>
-            </a:pPr>
-            <a:r>
-              <a:rPr lang="en" sz="1800" b="0" i="0" u="none" strike="noStrike" cap="none">
-                <a:solidFill>
-                  <a:schemeClr val="lt1"/>
-                </a:solidFill>
-                <a:latin typeface="Roboto"/>
-                <a:ea typeface="Roboto"/>
-                <a:cs typeface="Roboto"/>
-                <a:sym typeface="Roboto"/>
-              </a:rPr>
-              <a:t>Provide helpful messages to users</a:t>
-            </a:r>
-            <a:endParaRPr sz="1800" b="0" i="0" u="none" strike="noStrike" cap="none">
-              <a:solidFill>
-                <a:schemeClr val="lt1"/>
-              </a:solidFill>
-              <a:latin typeface="Roboto"/>
-              <a:ea typeface="Roboto"/>
-              <a:cs typeface="Roboto"/>
-              <a:sym typeface="Roboto"/>
-            </a:endParaRPr>
-          </a:p>
-          <a:p>
-            <a:pPr marL="914400" marR="0" lvl="1" indent="-342900" algn="l" rtl="0">
-              <a:lnSpc>
-                <a:spcPct val="100000"/>
-              </a:lnSpc>
-              <a:spcBef>
-                <a:spcPts val="0"/>
-              </a:spcBef>
-              <a:spcAft>
-                <a:spcPts val="0"/>
-              </a:spcAft>
-              <a:buClr>
-                <a:srgbClr val="FFFFFF"/>
-              </a:buClr>
-              <a:buSzPts val="1800"/>
-              <a:buFont typeface="Arial"/>
-              <a:buChar char="•"/>
-            </a:pPr>
-            <a:r>
-              <a:rPr lang="en" sz="1800" b="0" i="0" u="none" strike="noStrike" cap="none">
-                <a:solidFill>
-                  <a:schemeClr val="lt1"/>
-                </a:solidFill>
-                <a:latin typeface="Roboto"/>
-                <a:ea typeface="Roboto"/>
-                <a:cs typeface="Roboto"/>
-                <a:sym typeface="Roboto"/>
-              </a:rPr>
-              <a:t>Let your code recover from unexpected situations</a:t>
-            </a:r>
-            <a:endParaRPr sz="1800" b="0" i="0" u="none" strike="noStrike" cap="none">
-              <a:solidFill>
-                <a:schemeClr val="lt1"/>
-              </a:solidFill>
-              <a:latin typeface="Roboto"/>
-              <a:ea typeface="Roboto"/>
-              <a:cs typeface="Roboto"/>
-              <a:sym typeface="Roboto"/>
-            </a:endParaRPr>
-          </a:p>
-        </p:txBody>
-      </p:sp>
-    </p:spTree>
-  </p:cSld>
-  <p:clrMapOvr>
-    <a:masterClrMapping/>
-  </p:clrMapOvr>
-</p:sld>
-</file>
-
-<file path=ppt/slides/slide6.xml><?xml version="1.0" encoding="utf-8"?>
-<p:sld xmlns:a="http://schemas.openxmlformats.org/drawingml/2006/main" xmlns:r="http://schemas.openxmlformats.org/officeDocument/2006/relationships" xmlns:p="http://schemas.openxmlformats.org/presentationml/2006/main">
-  <p:cSld>
-    <p:spTree>
-      <p:nvGrpSpPr>
-        <p:cNvPr id="1" name="Shape 493"/>
-        <p:cNvGrpSpPr/>
-        <p:nvPr/>
-      </p:nvGrpSpPr>
-      <p:grpSpPr>
-        <a:xfrm>
-          <a:off x="0" y="0"/>
-          <a:ext cx="0" cy="0"/>
-          <a:chOff x="0" y="0"/>
-          <a:chExt cx="0" cy="0"/>
-        </a:xfrm>
-      </p:grpSpPr>
-      <p:sp>
-        <p:nvSpPr>
-          <p:cNvPr id="494" name="Google Shape;494;p59"/>
-          <p:cNvSpPr txBox="1">
-            <a:spLocks noGrp="1"/>
-          </p:cNvSpPr>
-          <p:nvPr>
-            <p:ph type="title"/>
-          </p:nvPr>
-        </p:nvSpPr>
-        <p:spPr>
-          <a:xfrm>
-            <a:off x="411480" y="308611"/>
-            <a:ext cx="6173470" cy="891778"/>
-          </a:xfrm>
-          <a:noFill/>
-          <a:ln>
-            <a:noFill/>
-          </a:ln>
-        </p:spPr>
-        <p:txBody>
-          <a:bodyPr spcFirstLastPara="1" wrap="square" lIns="91425" tIns="91425" rIns="91425" bIns="91425" anchor="t" anchorCtr="0">
-            <a:normAutofit/>
-          </a:bodyPr>
-          <a:lstStyle/>
-          <a:p>
-            <a:pPr lvl="0"/>
-            <a:r>
-              <a:rPr lang="en-US"/>
-              <a:t>TRY - EXCEPT</a:t>
-            </a:r>
-          </a:p>
-        </p:txBody>
-      </p:sp>
-      <p:sp>
-        <p:nvSpPr>
-          <p:cNvPr id="495" name="Google Shape;495;p59"/>
-          <p:cNvSpPr txBox="1">
-            <a:spLocks noGrp="1"/>
-          </p:cNvSpPr>
-          <p:nvPr>
-            <p:ph type="body" idx="1"/>
-          </p:nvPr>
-        </p:nvSpPr>
-        <p:spPr>
-          <a:xfrm>
-            <a:off x="411480" y="1611630"/>
-            <a:ext cx="5096351" cy="3017520"/>
-          </a:xfrm>
-          <a:noFill/>
-          <a:ln>
-            <a:noFill/>
-          </a:ln>
-        </p:spPr>
-        <p:txBody>
-          <a:bodyPr spcFirstLastPara="1" wrap="square" lIns="91425" tIns="91425" rIns="91425" bIns="91425" anchor="t" anchorCtr="0">
-            <a:normAutofit/>
-          </a:bodyPr>
-          <a:lstStyle/>
-          <a:p>
-            <a:pPr lvl="0"/>
-            <a:r>
-              <a:rPr lang="en-US"/>
-              <a:t>Tries a block a code and if an error is raised, can handle that error neatly</a:t>
-            </a:r>
-          </a:p>
-          <a:p>
-            <a:pPr lvl="0"/>
-            <a:r>
-              <a:rPr lang="en-US"/>
-              <a:t>Example:</a:t>
-            </a:r>
-          </a:p>
-          <a:p>
-            <a:pPr lvl="0"/>
-            <a:endParaRPr lang="en-US">
-              <a:sym typeface="Consolas"/>
-            </a:endParaRPr>
-          </a:p>
-          <a:p>
-            <a:pPr lvl="0"/>
-            <a:r>
-              <a:rPr lang="en-US">
-                <a:sym typeface="Consolas"/>
-              </a:rPr>
-              <a:t>try:</a:t>
-            </a:r>
-          </a:p>
-          <a:p>
-            <a:pPr lvl="0"/>
-            <a:r>
-              <a:rPr lang="en-US">
-                <a:sym typeface="Consolas"/>
-              </a:rPr>
-              <a:t>     # code that might cause an error</a:t>
-            </a:r>
-          </a:p>
-          <a:p>
-            <a:pPr lvl="0"/>
-            <a:r>
-              <a:rPr lang="en-US">
-                <a:sym typeface="Consolas"/>
-              </a:rPr>
-              <a:t>     number = int("abc")</a:t>
-            </a:r>
-            <a:endParaRPr lang="en-US"/>
-          </a:p>
-          <a:p>
-            <a:pPr lvl="0"/>
-            <a:r>
-              <a:rPr lang="en-US">
-                <a:sym typeface="Consolas"/>
-              </a:rPr>
-              <a:t> except ValueError:</a:t>
-            </a:r>
-          </a:p>
-          <a:p>
-            <a:pPr lvl="0"/>
-            <a:r>
-              <a:rPr lang="en-US">
-                <a:sym typeface="Consolas"/>
-              </a:rPr>
-              <a:t>     print("Oops! That wasn't a number.")</a:t>
-            </a:r>
-          </a:p>
-          <a:p>
-            <a:pPr lvl="0"/>
-            <a:endParaRPr lang="en-US"/>
-          </a:p>
-        </p:txBody>
-      </p:sp>
-    </p:spTree>
-  </p:cSld>
-  <p:clrMapOvr>
-    <a:masterClrMapping/>
-  </p:clrMapOvr>
-</p:sld>
-</file>
-
-<file path=ppt/slides/slide7.xml><?xml version="1.0" encoding="utf-8"?>
-<p:sld xmlns:a="http://schemas.openxmlformats.org/drawingml/2006/main" xmlns:r="http://schemas.openxmlformats.org/officeDocument/2006/relationships" xmlns:p="http://schemas.openxmlformats.org/presentationml/2006/main">
-  <p:cSld>
-    <p:spTree>
-      <p:nvGrpSpPr>
-        <p:cNvPr id="1" name="Shape 499"/>
-        <p:cNvGrpSpPr/>
-        <p:nvPr/>
-      </p:nvGrpSpPr>
-      <p:grpSpPr>
-        <a:xfrm>
-          <a:off x="0" y="0"/>
-          <a:ext cx="0" cy="0"/>
-          <a:chOff x="0" y="0"/>
-          <a:chExt cx="0" cy="0"/>
-        </a:xfrm>
-      </p:grpSpPr>
-      <p:sp>
-        <p:nvSpPr>
-          <p:cNvPr id="500" name="Google Shape;500;p60"/>
-          <p:cNvSpPr txBox="1">
-            <a:spLocks noGrp="1"/>
-          </p:cNvSpPr>
-          <p:nvPr>
-            <p:ph type="title"/>
-          </p:nvPr>
-        </p:nvSpPr>
-        <p:spPr>
-          <a:xfrm>
-            <a:off x="411480" y="308611"/>
-            <a:ext cx="6173470" cy="891778"/>
-          </a:xfrm>
-          <a:noFill/>
-          <a:ln>
-            <a:noFill/>
-          </a:ln>
-        </p:spPr>
-        <p:txBody>
-          <a:bodyPr spcFirstLastPara="1" wrap="square" lIns="91425" tIns="91425" rIns="91425" bIns="91425" anchor="t" anchorCtr="0">
-            <a:normAutofit/>
-          </a:bodyPr>
-          <a:lstStyle/>
-          <a:p>
-            <a:pPr lvl="0"/>
-            <a:r>
-              <a:rPr lang="en-US"/>
-              <a:t>TRY - EXCEPT CONTINUED</a:t>
-            </a:r>
-          </a:p>
-        </p:txBody>
-      </p:sp>
-      <p:sp>
-        <p:nvSpPr>
-          <p:cNvPr id="501" name="Google Shape;501;p60"/>
-          <p:cNvSpPr txBox="1">
-            <a:spLocks noGrp="1"/>
-          </p:cNvSpPr>
-          <p:nvPr>
-            <p:ph type="body" idx="1"/>
-          </p:nvPr>
-        </p:nvSpPr>
-        <p:spPr>
-          <a:xfrm>
-            <a:off x="411480" y="1611630"/>
-            <a:ext cx="5096351" cy="3017520"/>
-          </a:xfrm>
-          <a:noFill/>
-          <a:ln>
-            <a:noFill/>
-          </a:ln>
-        </p:spPr>
-        <p:txBody>
-          <a:bodyPr spcFirstLastPara="1" wrap="square" lIns="91425" tIns="91425" rIns="91425" bIns="91425" anchor="t" anchorCtr="0">
-            <a:normAutofit fontScale="85000" lnSpcReduction="20000"/>
-          </a:bodyPr>
-          <a:lstStyle/>
-          <a:p>
-            <a:pPr lvl="0"/>
-            <a:r>
-              <a:rPr lang="en-US"/>
-              <a:t>Optional</a:t>
-            </a:r>
-          </a:p>
-          <a:p>
-            <a:pPr lvl="1"/>
-            <a:r>
-              <a:rPr lang="en-US">
-                <a:sym typeface="Consolas"/>
-              </a:rPr>
-              <a:t>else</a:t>
-            </a:r>
-            <a:r>
-              <a:rPr lang="en-US"/>
-              <a:t>: Runs if no error occurs</a:t>
-            </a:r>
-          </a:p>
-          <a:p>
-            <a:pPr lvl="1"/>
-            <a:r>
-              <a:rPr lang="en-US">
-                <a:sym typeface="Consolas"/>
-              </a:rPr>
-              <a:t>finally</a:t>
-            </a:r>
-            <a:r>
-              <a:rPr lang="en-US"/>
-              <a:t>: always runs</a:t>
-            </a:r>
-          </a:p>
-          <a:p>
-            <a:pPr lvl="1"/>
-            <a:endParaRPr lang="en-US"/>
-          </a:p>
-          <a:p>
-            <a:pPr lvl="0"/>
-            <a:r>
-              <a:rPr lang="en-US"/>
-              <a:t>Example</a:t>
-            </a:r>
-          </a:p>
-          <a:p>
-            <a:pPr lvl="0"/>
-            <a:r>
-              <a:rPr lang="en-US">
-                <a:sym typeface="Consolas"/>
-              </a:rPr>
-              <a:t>try:</a:t>
-            </a:r>
-          </a:p>
-          <a:p>
-            <a:pPr lvl="0"/>
-            <a:r>
-              <a:rPr lang="en-US">
-                <a:sym typeface="Consolas"/>
-              </a:rPr>
-              <a:t>    result = 10 / 2</a:t>
-            </a:r>
-          </a:p>
-          <a:p>
-            <a:pPr lvl="0"/>
-            <a:r>
-              <a:rPr lang="en-US">
-                <a:sym typeface="Consolas"/>
-              </a:rPr>
-              <a:t>except ZeroDivisionError:</a:t>
-            </a:r>
-          </a:p>
-          <a:p>
-            <a:pPr lvl="0"/>
-            <a:r>
-              <a:rPr lang="en-US">
-                <a:sym typeface="Consolas"/>
-              </a:rPr>
-              <a:t>    print("Cannot divide by zero.")</a:t>
-            </a:r>
-          </a:p>
-          <a:p>
-            <a:pPr lvl="0"/>
-            <a:r>
-              <a:rPr lang="en-US">
-                <a:sym typeface="Consolas"/>
-              </a:rPr>
-              <a:t>else:</a:t>
-            </a:r>
-          </a:p>
-          <a:p>
-            <a:pPr lvl="0"/>
-            <a:r>
-              <a:rPr lang="en-US">
-                <a:sym typeface="Consolas"/>
-              </a:rPr>
-              <a:t>    print("Division successful.")</a:t>
-            </a:r>
-          </a:p>
-          <a:p>
-            <a:pPr lvl="0"/>
-            <a:r>
-              <a:rPr lang="en-US">
-                <a:sym typeface="Consolas"/>
-              </a:rPr>
-              <a:t>finally:</a:t>
-            </a:r>
-          </a:p>
-          <a:p>
-            <a:pPr lvl="0"/>
-            <a:r>
-              <a:rPr lang="en-US">
-                <a:sym typeface="Consolas"/>
-              </a:rPr>
-              <a:t>    print("Done.")</a:t>
-            </a:r>
-          </a:p>
-          <a:p>
-            <a:pPr lvl="0"/>
-            <a:endParaRPr lang="en-US">
-              <a:sym typeface="Consolas"/>
-            </a:endParaRPr>
-          </a:p>
-          <a:p>
-            <a:pPr lvl="0"/>
-            <a:endParaRPr lang="en-US"/>
-          </a:p>
-          <a:p>
-            <a:pPr lvl="0"/>
-            <a:endParaRPr lang="en-US"/>
-          </a:p>
-        </p:txBody>
-      </p:sp>
-    </p:spTree>
-  </p:cSld>
-  <p:clrMapOvr>
-    <a:masterClrMapping/>
-  </p:clrMapOvr>
-</p:sld>
-</file>
-
-<file path=ppt/slides/slide8.xml><?xml version="1.0" encoding="utf-8"?>
-<p:sld xmlns:a="http://schemas.openxmlformats.org/drawingml/2006/main" xmlns:r="http://schemas.openxmlformats.org/officeDocument/2006/relationships" xmlns:p="http://schemas.openxmlformats.org/presentationml/2006/main">
-  <p:cSld>
-    <p:spTree>
-      <p:nvGrpSpPr>
-        <p:cNvPr id="1" name="Shape 505"/>
-        <p:cNvGrpSpPr/>
-        <p:nvPr/>
-      </p:nvGrpSpPr>
-      <p:grpSpPr>
-        <a:xfrm>
-          <a:off x="0" y="0"/>
-          <a:ext cx="0" cy="0"/>
-          <a:chOff x="0" y="0"/>
-          <a:chExt cx="0" cy="0"/>
-        </a:xfrm>
-      </p:grpSpPr>
-      <p:sp>
-        <p:nvSpPr>
-          <p:cNvPr id="506" name="Google Shape;506;p61"/>
-          <p:cNvSpPr txBox="1">
-            <a:spLocks noGrp="1"/>
-          </p:cNvSpPr>
-          <p:nvPr>
-            <p:ph type="title"/>
-          </p:nvPr>
-        </p:nvSpPr>
-        <p:spPr>
-          <a:xfrm>
-            <a:off x="411480" y="308611"/>
-            <a:ext cx="6173470" cy="891778"/>
-          </a:xfrm>
-          <a:noFill/>
-          <a:ln>
-            <a:noFill/>
-          </a:ln>
-        </p:spPr>
-        <p:txBody>
-          <a:bodyPr spcFirstLastPara="1" wrap="square" lIns="91425" tIns="91425" rIns="91425" bIns="91425" anchor="t" anchorCtr="0">
-            <a:normAutofit/>
-          </a:bodyPr>
-          <a:lstStyle/>
-          <a:p>
-            <a:pPr lvl="0"/>
-            <a:r>
-              <a:rPr lang="en-US"/>
-              <a:t>RAISE</a:t>
-            </a:r>
-          </a:p>
-        </p:txBody>
-      </p:sp>
-      <p:sp>
-        <p:nvSpPr>
-          <p:cNvPr id="507" name="Google Shape;507;p61"/>
-          <p:cNvSpPr txBox="1">
-            <a:spLocks noGrp="1"/>
-          </p:cNvSpPr>
-          <p:nvPr>
-            <p:ph type="body" idx="1"/>
-          </p:nvPr>
-        </p:nvSpPr>
-        <p:spPr>
-          <a:xfrm>
-            <a:off x="411480" y="1611630"/>
-            <a:ext cx="5096351" cy="3017520"/>
-          </a:xfrm>
-          <a:noFill/>
-          <a:ln>
-            <a:noFill/>
-          </a:ln>
-        </p:spPr>
-        <p:txBody>
-          <a:bodyPr spcFirstLastPara="1" wrap="square" lIns="91425" tIns="91425" rIns="91425" bIns="91425" anchor="t" anchorCtr="0">
-            <a:normAutofit fontScale="62500" lnSpcReduction="20000"/>
-          </a:bodyPr>
-          <a:lstStyle/>
-          <a:p>
-            <a:pPr lvl="0"/>
-            <a:r>
-              <a:rPr lang="en-US"/>
-              <a:t>“raise” is used to intentionally trigger an error</a:t>
-            </a:r>
-          </a:p>
-          <a:p>
-            <a:pPr lvl="0"/>
-            <a:r>
-              <a:rPr lang="en-US"/>
-              <a:t>Helps enforce rules and catch problems early</a:t>
-            </a:r>
-          </a:p>
-          <a:p>
-            <a:pPr lvl="0"/>
-            <a:r>
-              <a:rPr lang="en-US"/>
-              <a:t>Make your code more predictable and safe</a:t>
-            </a:r>
-          </a:p>
-          <a:p>
-            <a:pPr lvl="0"/>
-            <a:r>
-              <a:rPr lang="en-US"/>
-              <a:t>Useful for custom error messages or defining your own exceptions</a:t>
-            </a:r>
-          </a:p>
-          <a:p>
-            <a:pPr lvl="0"/>
-            <a:endParaRPr lang="en-US"/>
-          </a:p>
-          <a:p>
-            <a:pPr lvl="0"/>
-            <a:r>
-              <a:rPr lang="en-US"/>
-              <a:t>Syntax</a:t>
-            </a:r>
-          </a:p>
-          <a:p>
-            <a:pPr lvl="0"/>
-            <a:endParaRPr lang="en-US">
-              <a:sym typeface="Consolas"/>
-            </a:endParaRPr>
-          </a:p>
-          <a:p>
-            <a:pPr lvl="0"/>
-            <a:r>
-              <a:rPr lang="en-US">
-                <a:sym typeface="Consolas"/>
-              </a:rPr>
-              <a:t>if age &lt; 0:</a:t>
-            </a:r>
-          </a:p>
-          <a:p>
-            <a:pPr lvl="0"/>
-            <a:r>
-              <a:rPr lang="en-US">
-                <a:sym typeface="Consolas"/>
-              </a:rPr>
-              <a:t>raise ValueError("Age cannot be negative.")</a:t>
-            </a:r>
-          </a:p>
-          <a:p>
-            <a:pPr lvl="0"/>
-            <a:endParaRPr lang="en-US">
-              <a:sym typeface="Consolas"/>
-            </a:endParaRPr>
-          </a:p>
-          <a:p>
-            <a:pPr lvl="0"/>
-            <a:r>
-              <a:rPr lang="en-US"/>
-              <a:t>Built-in Exceptions</a:t>
-            </a:r>
-          </a:p>
-          <a:p>
-            <a:pPr lvl="0"/>
-            <a:r>
-              <a:rPr lang="en-US">
-                <a:sym typeface="Consolas"/>
-              </a:rPr>
-              <a:t>raise TypeError("This function only accepts strings.")</a:t>
-            </a:r>
-          </a:p>
-          <a:p>
-            <a:pPr lvl="0"/>
-            <a:r>
-              <a:rPr lang="en-US">
-                <a:sym typeface="Consolas"/>
-              </a:rPr>
-              <a:t>raise ZeroDivisionError("Cannot divide by zero.")</a:t>
-            </a:r>
-          </a:p>
-          <a:p>
-            <a:pPr lvl="0"/>
-            <a:endParaRPr lang="en-US">
-              <a:sym typeface="Consolas"/>
-            </a:endParaRPr>
-          </a:p>
-          <a:p>
-            <a:pPr lvl="0"/>
-            <a:endParaRPr lang="en-US"/>
-          </a:p>
-          <a:p>
-            <a:pPr lvl="0"/>
-            <a:r>
-              <a:rPr lang="en-US"/>
-              <a:t>Raised errors can be caught and handled with try / except</a:t>
-            </a:r>
-          </a:p>
-          <a:p>
-            <a:pPr lvl="0"/>
-            <a:r>
-              <a:rPr lang="en-US"/>
-              <a:t>If not caught, they will be passed to the output and stop the program</a:t>
-            </a:r>
-          </a:p>
-          <a:p>
-            <a:pPr lvl="0"/>
-            <a:endParaRPr lang="en-US"/>
-          </a:p>
-          <a:p>
-            <a:pPr lvl="0"/>
-            <a:endParaRPr lang="en-US"/>
-          </a:p>
-          <a:p>
-            <a:pPr lvl="0"/>
-            <a:endParaRPr lang="en-US"/>
-          </a:p>
-        </p:txBody>
-      </p:sp>
-    </p:spTree>
-  </p:cSld>
-  <p:clrMapOvr>
-    <a:masterClrMapping/>
-  </p:clrMapOvr>
-</p:sld>
-</file>
-
-<file path=ppt/slides/slide9.xml><?xml version="1.0" encoding="utf-8"?>
-<p:sld xmlns:a="http://schemas.openxmlformats.org/drawingml/2006/main" xmlns:r="http://schemas.openxmlformats.org/officeDocument/2006/relationships" xmlns:p="http://schemas.openxmlformats.org/presentationml/2006/main" show="0">
-  <p:cSld>
-    <p:spTree>
-      <p:nvGrpSpPr>
-        <p:cNvPr id="1" name="Shape 511"/>
-        <p:cNvGrpSpPr/>
-        <p:nvPr/>
-      </p:nvGrpSpPr>
-      <p:grpSpPr>
-        <a:xfrm>
-          <a:off x="0" y="0"/>
-          <a:ext cx="0" cy="0"/>
-          <a:chOff x="0" y="0"/>
-          <a:chExt cx="0" cy="0"/>
-        </a:xfrm>
-      </p:grpSpPr>
-      <p:sp>
-        <p:nvSpPr>
-          <p:cNvPr id="512" name="Google Shape;512;p62"/>
-          <p:cNvSpPr txBox="1">
-            <a:spLocks noGrp="1"/>
-          </p:cNvSpPr>
-          <p:nvPr>
-            <p:ph type="title"/>
-          </p:nvPr>
-        </p:nvSpPr>
-        <p:spPr>
-          <a:xfrm>
-            <a:off x="411480" y="308611"/>
-            <a:ext cx="6173470" cy="891778"/>
-          </a:xfrm>
-          <a:noFill/>
-          <a:ln>
-            <a:noFill/>
-          </a:ln>
-        </p:spPr>
-        <p:txBody>
-          <a:bodyPr spcFirstLastPara="1" wrap="square" lIns="91425" tIns="91425" rIns="91425" bIns="91425" anchor="t" anchorCtr="0">
-            <a:normAutofit/>
-          </a:bodyPr>
-          <a:lstStyle/>
-          <a:p>
-            <a:pPr lvl="0"/>
-            <a:r>
-              <a:rPr lang="en-US"/>
-              <a:t>FINAL CODING EXERCISE</a:t>
-            </a:r>
-          </a:p>
-        </p:txBody>
-      </p:sp>
-      <p:sp>
-        <p:nvSpPr>
-          <p:cNvPr id="513" name="Google Shape;513;p62"/>
-          <p:cNvSpPr txBox="1">
-            <a:spLocks noGrp="1"/>
-          </p:cNvSpPr>
-          <p:nvPr>
-            <p:ph type="body" idx="1"/>
-          </p:nvPr>
-        </p:nvSpPr>
-        <p:spPr>
-          <a:xfrm>
-            <a:off x="411480" y="1611630"/>
-            <a:ext cx="5096351" cy="3017520"/>
-          </a:xfrm>
-          <a:noFill/>
-          <a:ln>
-            <a:noFill/>
-          </a:ln>
-        </p:spPr>
-        <p:txBody>
-          <a:bodyPr spcFirstLastPara="1" wrap="square" lIns="91425" tIns="91425" rIns="91425" bIns="91425" anchor="t" anchorCtr="0">
-            <a:normAutofit fontScale="85000" lnSpcReduction="10000"/>
-          </a:bodyPr>
-          <a:lstStyle/>
-          <a:p>
-            <a:pPr lvl="0"/>
-            <a:r>
-              <a:rPr lang="en-US"/>
-              <a:t>20 min </a:t>
-            </a:r>
-          </a:p>
-          <a:p>
-            <a:pPr lvl="0"/>
-            <a:endParaRPr lang="en-US"/>
-          </a:p>
-          <a:p>
-            <a:pPr lvl="0"/>
-            <a:r>
-              <a:rPr lang="en-US"/>
-              <a:t>Write a block of code that takes in user input until they guess the random number</a:t>
-            </a:r>
-          </a:p>
-          <a:p>
-            <a:pPr lvl="0"/>
-            <a:r>
-              <a:rPr lang="en-US"/>
-              <a:t>Prompt the user to help them with their guess</a:t>
-            </a:r>
-          </a:p>
-          <a:p>
-            <a:pPr lvl="0"/>
-            <a:r>
-              <a:rPr lang="en-US"/>
-              <a:t>Handle the following situations</a:t>
-            </a:r>
-          </a:p>
-          <a:p>
-            <a:pPr lvl="0"/>
-            <a:r>
-              <a:rPr lang="en-US"/>
-              <a:t>User does not input the right python data type</a:t>
-            </a:r>
-          </a:p>
-          <a:p>
-            <a:pPr lvl="0"/>
-            <a:r>
-              <a:rPr lang="en-US"/>
-              <a:t>User inputs a negative number</a:t>
-            </a:r>
-          </a:p>
-          <a:p>
-            <a:pPr lvl="0"/>
-            <a:r>
-              <a:rPr lang="en-US"/>
-              <a:t>User inputs a number outside the guess range</a:t>
-            </a:r>
-          </a:p>
-          <a:p>
-            <a:pPr lvl="0"/>
-            <a:r>
-              <a:rPr lang="en-US"/>
-              <a:t>Hint: use random.randomint() to generate a random number</a:t>
-            </a:r>
-          </a:p>
-        </p:txBody>
-      </p:sp>
     </p:spTree>
   </p:cSld>
   <p:clrMapOvr>
